--- a/output/wordlabs-explore-3day.pptx
+++ b/output/wordlabs-explore-3day.pptx
@@ -4240,7 +4240,7 @@
                 <a:ea typeface="Calibri" pitchFamily="34" charset="-122"/>
                 <a:cs typeface="Calibri" pitchFamily="34" charset="-120"/>
               </a:rPr>
-              <a:t>"to search or travel through"</a:t>
+              <a:t>"to search or discover new things"</a:t>
             </a:r>
             <a:endParaRPr lang="en-US" sz="2200" dirty="0"/>
           </a:p>
@@ -5288,7 +5288,7 @@
                 <a:ea typeface="Calibri" pitchFamily="34" charset="-122"/>
                 <a:cs typeface="Calibri" pitchFamily="34" charset="-120"/>
               </a:rPr>
-              <a:t>Word Labs  •  wordlabs.app  •  Root: 'explore' = to search or travel through</a:t>
+              <a:t>Word Labs  •  wordlabs.app  •  Root: 'explore' = to search or discover new things</a:t>
             </a:r>
             <a:endParaRPr lang="en-US" sz="800" dirty="0"/>
           </a:p>
@@ -5928,7 +5928,7 @@
                 <a:ea typeface="Calibri" pitchFamily="34" charset="-122"/>
                 <a:cs typeface="Calibri" pitchFamily="34" charset="-120"/>
               </a:rPr>
-              <a:t>Word Labs  •  wordlabs.app  •  Root: 'explore' = to search or travel through</a:t>
+              <a:t>Word Labs  •  wordlabs.app  •  Root: 'explore' = to search or discover new things</a:t>
             </a:r>
             <a:endParaRPr lang="en-US" sz="800" dirty="0"/>
           </a:p>
@@ -6071,7 +6071,7 @@
                 <a:ea typeface="Calibri" pitchFamily="34" charset="-122"/>
                 <a:cs typeface="Calibri" pitchFamily="34" charset="-120"/>
               </a:rPr>
-              <a:t> set off on an exciting </a:t>
+              <a:t> went on an exciting </a:t>
             </a:r>
             <a:pPr algn="l" indent="0" marL="0">
               <a:buNone/>
@@ -6102,7 +6102,7 @@
                 <a:ea typeface="Calibri" pitchFamily="34" charset="-122"/>
                 <a:cs typeface="Calibri" pitchFamily="34" charset="-120"/>
               </a:rPr>
-              <a:t> of the ancient caves.</a:t>
+              <a:t> of the rainforest.</a:t>
             </a:r>
             <a:endParaRPr lang="en-US" sz="1800" dirty="0"/>
           </a:p>
@@ -6716,7 +6716,7 @@
                 <a:ea typeface="Calibri" pitchFamily="34" charset="-122"/>
                 <a:cs typeface="Calibri" pitchFamily="34" charset="-120"/>
               </a:rPr>
-              <a:t>Word Labs  •  wordlabs.app  •  Root: 'explore' = to search or travel through</a:t>
+              <a:t>Word Labs  •  wordlabs.app  •  Root: 'explore' = to search or discover new things</a:t>
             </a:r>
             <a:endParaRPr lang="en-US" sz="800" dirty="0"/>
           </a:p>
@@ -7543,7 +7543,7 @@
                 <a:ea typeface="Calibri" pitchFamily="34" charset="-122"/>
                 <a:cs typeface="Calibri" pitchFamily="34" charset="-120"/>
               </a:rPr>
-              <a:t>Word Labs  •  wordlabs.app  •  Root: 'explore' = to search or travel through</a:t>
+              <a:t>Word Labs  •  wordlabs.app  •  Root: 'explore' = to search or discover new things</a:t>
             </a:r>
             <a:endParaRPr lang="en-US" sz="800" dirty="0"/>
           </a:p>
@@ -7762,7 +7762,7 @@
         </p:nvSpPr>
         <p:spPr>
           <a:xfrm>
-            <a:off x="2221992" y="2258568"/>
+            <a:off x="2938272" y="2258568"/>
             <a:ext cx="1828800" cy="292608"/>
           </a:xfrm>
           <a:prstGeom prst="rect">
@@ -7796,7 +7796,7 @@
         </p:nvSpPr>
         <p:spPr>
           <a:xfrm>
-            <a:off x="2221992" y="2258568"/>
+            <a:off x="2938272" y="2258568"/>
             <a:ext cx="1828800" cy="292608"/>
           </a:xfrm>
           <a:prstGeom prst="rect">
@@ -7835,7 +7835,7 @@
         </p:nvSpPr>
         <p:spPr>
           <a:xfrm>
-            <a:off x="2221992" y="2569464"/>
+            <a:off x="2938272" y="2569464"/>
             <a:ext cx="1828800" cy="201168"/>
           </a:xfrm>
           <a:prstGeom prst="rect">
@@ -7860,7 +7860,7 @@
                 <a:ea typeface="Calibri" pitchFamily="34" charset="-122"/>
                 <a:cs typeface="Calibri" pitchFamily="34" charset="-120"/>
               </a:rPr>
-              <a:t>to search or travel through</a:t>
+              <a:t>to search or discover</a:t>
             </a:r>
             <a:endParaRPr lang="en-US" sz="850" dirty="0"/>
           </a:p>
@@ -7868,13 +7868,52 @@
       </p:sp>
       <p:sp>
         <p:nvSpPr>
-          <p:cNvPr id="19" name="Shape 17"/>
-          <p:cNvSpPr/>
-          <p:nvPr/>
-        </p:nvSpPr>
-        <p:spPr>
-          <a:xfrm>
-            <a:off x="4370832" y="2258568"/>
+          <p:cNvPr id="19" name="Text 17"/>
+          <p:cNvSpPr/>
+          <p:nvPr/>
+        </p:nvSpPr>
+        <p:spPr>
+          <a:xfrm>
+            <a:off x="2938272" y="2752344"/>
+            <a:ext cx="1828800" cy="182880"/>
+          </a:xfrm>
+          <a:prstGeom prst="rect">
+            <a:avLst/>
+          </a:prstGeom>
+          <a:noFill/>
+          <a:ln/>
+        </p:spPr>
+        <p:txBody>
+          <a:bodyPr wrap="square" lIns="0" tIns="0" rIns="0" bIns="0" rtlCol="0" anchor="t"/>
+          <a:lstStyle/>
+          <a:p>
+            <a:pPr algn="ctr" indent="0" marL="0">
+              <a:buNone/>
+            </a:pPr>
+            <a:r>
+              <a:rPr lang="en-US" sz="700" i="1" dirty="0">
+                <a:solidFill>
+                  <a:srgbClr val="94A3B8"/>
+                </a:solidFill>
+                <a:latin typeface="Calibri" pitchFamily="34" charset="0"/>
+                <a:ea typeface="Calibri" pitchFamily="34" charset="-122"/>
+                <a:cs typeface="Calibri" pitchFamily="34" charset="-120"/>
+              </a:rPr>
+              <a:t>'e' dropped before vowel suffix</a:t>
+            </a:r>
+            <a:endParaRPr lang="en-US" sz="700" dirty="0"/>
+          </a:p>
+        </p:txBody>
+      </p:sp>
+      <p:sp>
+        <p:nvSpPr>
+          <p:cNvPr id="20" name="Shape 18"/>
+          <p:cNvSpPr/>
+          <p:nvPr/>
+        </p:nvSpPr>
+        <p:spPr>
+          <a:xfrm>
+            <a:off x="5803392" y="2258568"/>
             <a:ext cx="1828800" cy="292608"/>
           </a:xfrm>
           <a:prstGeom prst="rect">
@@ -7902,13 +7941,13 @@
       </p:sp>
       <p:sp>
         <p:nvSpPr>
-          <p:cNvPr id="20" name="Text 18"/>
-          <p:cNvSpPr/>
-          <p:nvPr/>
-        </p:nvSpPr>
-        <p:spPr>
-          <a:xfrm>
-            <a:off x="4370832" y="2258568"/>
+          <p:cNvPr id="21" name="Text 19"/>
+          <p:cNvSpPr/>
+          <p:nvPr/>
+        </p:nvSpPr>
+        <p:spPr>
+          <a:xfrm>
+            <a:off x="5803392" y="2258568"/>
             <a:ext cx="1828800" cy="292608"/>
           </a:xfrm>
           <a:prstGeom prst="rect">
@@ -7933,7 +7972,7 @@
                 <a:ea typeface="Trebuchet MS" pitchFamily="34" charset="-122"/>
                 <a:cs typeface="Trebuchet MS" pitchFamily="34" charset="-120"/>
               </a:rPr>
-              <a:t>r</a:t>
+              <a:t>er</a:t>
             </a:r>
             <a:endParaRPr lang="en-US" sz="1300" dirty="0"/>
           </a:p>
@@ -7941,13 +7980,13 @@
       </p:sp>
       <p:sp>
         <p:nvSpPr>
-          <p:cNvPr id="21" name="Text 19"/>
-          <p:cNvSpPr/>
-          <p:nvPr/>
-        </p:nvSpPr>
-        <p:spPr>
-          <a:xfrm>
-            <a:off x="4370832" y="2569464"/>
+          <p:cNvPr id="22" name="Text 20"/>
+          <p:cNvSpPr/>
+          <p:nvPr/>
+        </p:nvSpPr>
+        <p:spPr>
+          <a:xfrm>
+            <a:off x="5803392" y="2569464"/>
             <a:ext cx="1828800" cy="201168"/>
           </a:xfrm>
           <a:prstGeom prst="rect">
@@ -7972,7 +8011,7 @@
                 <a:ea typeface="Calibri" pitchFamily="34" charset="-122"/>
                 <a:cs typeface="Calibri" pitchFamily="34" charset="-120"/>
               </a:rPr>
-              <a:t>connecting consonant</a:t>
+              <a:t>a person who does something</a:t>
             </a:r>
             <a:endParaRPr lang="en-US" sz="850" dirty="0"/>
           </a:p>
@@ -7980,216 +8019,197 @@
       </p:sp>
       <p:sp>
         <p:nvSpPr>
-          <p:cNvPr id="22" name="Text 20"/>
-          <p:cNvSpPr/>
-          <p:nvPr/>
-        </p:nvSpPr>
-        <p:spPr>
-          <a:xfrm>
-            <a:off x="4370832" y="2752344"/>
-            <a:ext cx="1828800" cy="182880"/>
-          </a:xfrm>
-          <a:prstGeom prst="rect">
-            <a:avLst/>
-          </a:prstGeom>
-          <a:noFill/>
-          <a:ln/>
-        </p:spPr>
-        <p:txBody>
-          <a:bodyPr wrap="square" lIns="0" tIns="0" rIns="0" bIns="0" rtlCol="0" anchor="t"/>
-          <a:lstStyle/>
-          <a:p>
-            <a:pPr algn="ctr" indent="0" marL="0">
-              <a:buNone/>
-            </a:pPr>
-            <a:r>
-              <a:rPr lang="en-US" sz="700" i="1" dirty="0">
-                <a:solidFill>
-                  <a:srgbClr val="94A3B8"/>
+          <p:cNvPr id="23" name="Shape 21"/>
+          <p:cNvSpPr/>
+          <p:nvPr/>
+        </p:nvSpPr>
+        <p:spPr>
+          <a:xfrm>
+            <a:off x="365760" y="3273552"/>
+            <a:ext cx="1371600" cy="658368"/>
+          </a:xfrm>
+          <a:prstGeom prst="rect">
+            <a:avLst>
+              <a:gd name="adj" fmla="val 8333"/>
+            </a:avLst>
+          </a:prstGeom>
+          <a:solidFill>
+            <a:srgbClr val="E2E8F0"/>
+          </a:solidFill>
+          <a:ln w="12700">
+            <a:solidFill>
+              <a:srgbClr val="E2E8F0"/>
+            </a:solidFill>
+            <a:prstDash val="solid"/>
+          </a:ln>
+        </p:spPr>
+      </p:sp>
+      <p:sp>
+        <p:nvSpPr>
+          <p:cNvPr id="24" name="Text 22"/>
+          <p:cNvSpPr/>
+          <p:nvPr/>
+        </p:nvSpPr>
+        <p:spPr>
+          <a:xfrm>
+            <a:off x="365760" y="3273552"/>
+            <a:ext cx="1371600" cy="658368"/>
+          </a:xfrm>
+          <a:prstGeom prst="rect">
+            <a:avLst/>
+          </a:prstGeom>
+          <a:noFill/>
+          <a:ln/>
+        </p:spPr>
+        <p:txBody>
+          <a:bodyPr wrap="square" lIns="0" tIns="0" rIns="0" bIns="0" rtlCol="0" anchor="ctr"/>
+          <a:lstStyle/>
+          <a:p>
+            <a:pPr algn="ctr" indent="0" marL="0">
+              <a:buNone/>
+            </a:pPr>
+            <a:r>
+              <a:rPr lang="en-US" sz="1100" b="1" dirty="0">
+                <a:solidFill>
+                  <a:srgbClr val="475569"/>
+                </a:solidFill>
+                <a:latin typeface="Trebuchet MS" pitchFamily="34" charset="0"/>
+                <a:ea typeface="Trebuchet MS" pitchFamily="34" charset="-122"/>
+                <a:cs typeface="Trebuchet MS" pitchFamily="34" charset="-120"/>
+              </a:rPr>
+              <a:t>Syllables</a:t>
+            </a:r>
+            <a:endParaRPr lang="en-US" sz="1100" dirty="0"/>
+          </a:p>
+        </p:txBody>
+      </p:sp>
+      <p:sp>
+        <p:nvSpPr>
+          <p:cNvPr id="25" name="Shape 23"/>
+          <p:cNvSpPr/>
+          <p:nvPr/>
+        </p:nvSpPr>
+        <p:spPr>
+          <a:xfrm>
+            <a:off x="1874520" y="3273552"/>
+            <a:ext cx="6903720" cy="658368"/>
+          </a:xfrm>
+          <a:prstGeom prst="rect">
+            <a:avLst>
+              <a:gd name="adj" fmla="val 8333"/>
+            </a:avLst>
+          </a:prstGeom>
+          <a:solidFill>
+            <a:srgbClr val="F8FAFC"/>
+          </a:solidFill>
+          <a:ln w="12700">
+            <a:solidFill>
+              <a:srgbClr val="E2E8F0"/>
+            </a:solidFill>
+            <a:prstDash val="dash"/>
+          </a:ln>
+        </p:spPr>
+      </p:sp>
+      <p:sp>
+        <p:nvSpPr>
+          <p:cNvPr id="26" name="Text 24"/>
+          <p:cNvSpPr/>
+          <p:nvPr/>
+        </p:nvSpPr>
+        <p:spPr>
+          <a:xfrm>
+            <a:off x="1874520" y="3273552"/>
+            <a:ext cx="6903720" cy="658368"/>
+          </a:xfrm>
+          <a:prstGeom prst="rect">
+            <a:avLst/>
+          </a:prstGeom>
+          <a:noFill/>
+          <a:ln/>
+        </p:spPr>
+        <p:txBody>
+          <a:bodyPr wrap="square" rtlCol="0" anchor="ctr"/>
+          <a:lstStyle/>
+          <a:p>
+            <a:pPr algn="ctr" indent="0" marL="0">
+              <a:buNone/>
+            </a:pPr>
+            <a:r>
+              <a:rPr lang="en-US" sz="1100" i="1" dirty="0">
+                <a:solidFill>
+                  <a:srgbClr val="CBD5E1"/>
                 </a:solidFill>
                 <a:latin typeface="Calibri" pitchFamily="34" charset="0"/>
                 <a:ea typeface="Calibri" pitchFamily="34" charset="-122"/>
                 <a:cs typeface="Calibri" pitchFamily="34" charset="-120"/>
               </a:rPr>
-              <a:t>'e' dropped before vowel suffix</a:t>
-            </a:r>
-            <a:endParaRPr lang="en-US" sz="700" dirty="0"/>
-          </a:p>
-        </p:txBody>
-      </p:sp>
-      <p:sp>
-        <p:nvSpPr>
-          <p:cNvPr id="23" name="Shape 21"/>
-          <p:cNvSpPr/>
-          <p:nvPr/>
-        </p:nvSpPr>
-        <p:spPr>
-          <a:xfrm>
-            <a:off x="6519672" y="2258568"/>
-            <a:ext cx="1828800" cy="292608"/>
+              <a:t>Write here...</a:t>
+            </a:r>
+            <a:endParaRPr lang="en-US" sz="1100" dirty="0"/>
+          </a:p>
+        </p:txBody>
+      </p:sp>
+      <p:sp>
+        <p:nvSpPr>
+          <p:cNvPr id="27" name="Shape 25"/>
+          <p:cNvSpPr/>
+          <p:nvPr/>
+        </p:nvSpPr>
+        <p:spPr>
+          <a:xfrm>
+            <a:off x="365760" y="4096512"/>
+            <a:ext cx="1371600" cy="804672"/>
           </a:xfrm>
           <a:prstGeom prst="rect">
             <a:avLst>
-              <a:gd name="adj" fmla="val 25000"/>
+              <a:gd name="adj" fmla="val 6818"/>
             </a:avLst>
           </a:prstGeom>
           <a:solidFill>
-            <a:srgbClr val="FCE7F3"/>
-          </a:solidFill>
-          <a:ln w="19050">
-            <a:solidFill>
-              <a:srgbClr val="DB2777"/>
-            </a:solidFill>
-            <a:prstDash val="solid"/>
-          </a:ln>
-          <a:effectLst>
-            <a:outerShdw sx="100000" sy="100000" kx="0" ky="0" algn="bl" rotWithShape="0" blurRad="101600" dist="38100" dir="8100000">
-              <a:srgbClr val="000000">
-                <a:alpha val="12000"/>
-              </a:srgbClr>
-            </a:outerShdw>
-          </a:effectLst>
-        </p:spPr>
-      </p:sp>
-      <p:sp>
-        <p:nvSpPr>
-          <p:cNvPr id="24" name="Text 22"/>
-          <p:cNvSpPr/>
-          <p:nvPr/>
-        </p:nvSpPr>
-        <p:spPr>
-          <a:xfrm>
-            <a:off x="6519672" y="2258568"/>
-            <a:ext cx="1828800" cy="292608"/>
-          </a:xfrm>
-          <a:prstGeom prst="rect">
-            <a:avLst/>
-          </a:prstGeom>
-          <a:noFill/>
-          <a:ln/>
-        </p:spPr>
-        <p:txBody>
-          <a:bodyPr wrap="square" lIns="0" tIns="0" rIns="0" bIns="0" rtlCol="0" anchor="ctr"/>
-          <a:lstStyle/>
-          <a:p>
-            <a:pPr algn="ctr" indent="0" marL="0">
-              <a:buNone/>
-            </a:pPr>
-            <a:r>
-              <a:rPr lang="en-US" sz="1300" b="1" dirty="0">
-                <a:solidFill>
-                  <a:srgbClr val="9D174D"/>
+            <a:srgbClr val="E2E8F0"/>
+          </a:solidFill>
+          <a:ln w="12700">
+            <a:solidFill>
+              <a:srgbClr val="E2E8F0"/>
+            </a:solidFill>
+            <a:prstDash val="solid"/>
+          </a:ln>
+        </p:spPr>
+      </p:sp>
+      <p:sp>
+        <p:nvSpPr>
+          <p:cNvPr id="28" name="Text 26"/>
+          <p:cNvSpPr/>
+          <p:nvPr/>
+        </p:nvSpPr>
+        <p:spPr>
+          <a:xfrm>
+            <a:off x="365760" y="4096512"/>
+            <a:ext cx="1371600" cy="804672"/>
+          </a:xfrm>
+          <a:prstGeom prst="rect">
+            <a:avLst/>
+          </a:prstGeom>
+          <a:noFill/>
+          <a:ln/>
+        </p:spPr>
+        <p:txBody>
+          <a:bodyPr wrap="square" lIns="0" tIns="0" rIns="0" bIns="0" rtlCol="0" anchor="ctr"/>
+          <a:lstStyle/>
+          <a:p>
+            <a:pPr algn="ctr" indent="0" marL="0">
+              <a:buNone/>
+            </a:pPr>
+            <a:r>
+              <a:rPr lang="en-US" sz="1100" b="1" dirty="0">
+                <a:solidFill>
+                  <a:srgbClr val="475569"/>
                 </a:solidFill>
                 <a:latin typeface="Trebuchet MS" pitchFamily="34" charset="0"/>
                 <a:ea typeface="Trebuchet MS" pitchFamily="34" charset="-122"/>
                 <a:cs typeface="Trebuchet MS" pitchFamily="34" charset="-120"/>
               </a:rPr>
-              <a:t>er</a:t>
-            </a:r>
-            <a:endParaRPr lang="en-US" sz="1300" dirty="0"/>
-          </a:p>
-        </p:txBody>
-      </p:sp>
-      <p:sp>
-        <p:nvSpPr>
-          <p:cNvPr id="25" name="Text 23"/>
-          <p:cNvSpPr/>
-          <p:nvPr/>
-        </p:nvSpPr>
-        <p:spPr>
-          <a:xfrm>
-            <a:off x="6519672" y="2569464"/>
-            <a:ext cx="1828800" cy="201168"/>
-          </a:xfrm>
-          <a:prstGeom prst="rect">
-            <a:avLst/>
-          </a:prstGeom>
-          <a:noFill/>
-          <a:ln/>
-        </p:spPr>
-        <p:txBody>
-          <a:bodyPr wrap="square" lIns="0" tIns="0" rIns="0" bIns="0" rtlCol="0" anchor="t"/>
-          <a:lstStyle/>
-          <a:p>
-            <a:pPr algn="ctr" indent="0" marL="0">
-              <a:buNone/>
-            </a:pPr>
-            <a:r>
-              <a:rPr lang="en-US" sz="850" dirty="0">
-                <a:solidFill>
-                  <a:srgbClr val="475569"/>
-                </a:solidFill>
-                <a:latin typeface="Calibri" pitchFamily="34" charset="0"/>
-                <a:ea typeface="Calibri" pitchFamily="34" charset="-122"/>
-                <a:cs typeface="Calibri" pitchFamily="34" charset="-120"/>
-              </a:rPr>
-              <a:t>a person who</a:t>
-            </a:r>
-            <a:endParaRPr lang="en-US" sz="850" dirty="0"/>
-          </a:p>
-        </p:txBody>
-      </p:sp>
-      <p:sp>
-        <p:nvSpPr>
-          <p:cNvPr id="26" name="Shape 24"/>
-          <p:cNvSpPr/>
-          <p:nvPr/>
-        </p:nvSpPr>
-        <p:spPr>
-          <a:xfrm>
-            <a:off x="365760" y="3273552"/>
-            <a:ext cx="1371600" cy="658368"/>
-          </a:xfrm>
-          <a:prstGeom prst="rect">
-            <a:avLst>
-              <a:gd name="adj" fmla="val 8333"/>
-            </a:avLst>
-          </a:prstGeom>
-          <a:solidFill>
-            <a:srgbClr val="E2E8F0"/>
-          </a:solidFill>
-          <a:ln w="12700">
-            <a:solidFill>
-              <a:srgbClr val="E2E8F0"/>
-            </a:solidFill>
-            <a:prstDash val="solid"/>
-          </a:ln>
-        </p:spPr>
-      </p:sp>
-      <p:sp>
-        <p:nvSpPr>
-          <p:cNvPr id="27" name="Text 25"/>
-          <p:cNvSpPr/>
-          <p:nvPr/>
-        </p:nvSpPr>
-        <p:spPr>
-          <a:xfrm>
-            <a:off x="365760" y="3273552"/>
-            <a:ext cx="1371600" cy="658368"/>
-          </a:xfrm>
-          <a:prstGeom prst="rect">
-            <a:avLst/>
-          </a:prstGeom>
-          <a:noFill/>
-          <a:ln/>
-        </p:spPr>
-        <p:txBody>
-          <a:bodyPr wrap="square" lIns="0" tIns="0" rIns="0" bIns="0" rtlCol="0" anchor="ctr"/>
-          <a:lstStyle/>
-          <a:p>
-            <a:pPr algn="ctr" indent="0" marL="0">
-              <a:buNone/>
-            </a:pPr>
-            <a:r>
-              <a:rPr lang="en-US" sz="1100" b="1" dirty="0">
-                <a:solidFill>
-                  <a:srgbClr val="475569"/>
-                </a:solidFill>
-                <a:latin typeface="Trebuchet MS" pitchFamily="34" charset="0"/>
-                <a:ea typeface="Trebuchet MS" pitchFamily="34" charset="-122"/>
-                <a:cs typeface="Trebuchet MS" pitchFamily="34" charset="-120"/>
-              </a:rPr>
-              <a:t>Syllables</a:t>
+              <a:t>Phonemes</a:t>
             </a:r>
             <a:endParaRPr lang="en-US" sz="1100" dirty="0"/>
           </a:p>
@@ -8197,80 +8217,14 @@
       </p:sp>
       <p:sp>
         <p:nvSpPr>
-          <p:cNvPr id="28" name="Shape 26"/>
-          <p:cNvSpPr/>
-          <p:nvPr/>
-        </p:nvSpPr>
-        <p:spPr>
-          <a:xfrm>
-            <a:off x="1874520" y="3273552"/>
-            <a:ext cx="6903720" cy="658368"/>
-          </a:xfrm>
-          <a:prstGeom prst="rect">
-            <a:avLst>
-              <a:gd name="adj" fmla="val 8333"/>
-            </a:avLst>
-          </a:prstGeom>
-          <a:solidFill>
-            <a:srgbClr val="F8FAFC"/>
-          </a:solidFill>
-          <a:ln w="12700">
-            <a:solidFill>
-              <a:srgbClr val="E2E8F0"/>
-            </a:solidFill>
-            <a:prstDash val="dash"/>
-          </a:ln>
-        </p:spPr>
-      </p:sp>
-      <p:sp>
-        <p:nvSpPr>
-          <p:cNvPr id="29" name="Text 27"/>
-          <p:cNvSpPr/>
-          <p:nvPr/>
-        </p:nvSpPr>
-        <p:spPr>
-          <a:xfrm>
-            <a:off x="1874520" y="3273552"/>
-            <a:ext cx="6903720" cy="658368"/>
-          </a:xfrm>
-          <a:prstGeom prst="rect">
-            <a:avLst/>
-          </a:prstGeom>
-          <a:noFill/>
-          <a:ln/>
-        </p:spPr>
-        <p:txBody>
-          <a:bodyPr wrap="square" rtlCol="0" anchor="ctr"/>
-          <a:lstStyle/>
-          <a:p>
-            <a:pPr algn="ctr" indent="0" marL="0">
-              <a:buNone/>
-            </a:pPr>
-            <a:r>
-              <a:rPr lang="en-US" sz="1100" i="1" dirty="0">
-                <a:solidFill>
-                  <a:srgbClr val="CBD5E1"/>
-                </a:solidFill>
-                <a:latin typeface="Calibri" pitchFamily="34" charset="0"/>
-                <a:ea typeface="Calibri" pitchFamily="34" charset="-122"/>
-                <a:cs typeface="Calibri" pitchFamily="34" charset="-120"/>
-              </a:rPr>
-              <a:t>Write here...</a:t>
-            </a:r>
-            <a:endParaRPr lang="en-US" sz="1100" dirty="0"/>
-          </a:p>
-        </p:txBody>
-      </p:sp>
-      <p:sp>
-        <p:nvSpPr>
-          <p:cNvPr id="30" name="Shape 28"/>
-          <p:cNvSpPr/>
-          <p:nvPr/>
-        </p:nvSpPr>
-        <p:spPr>
-          <a:xfrm>
-            <a:off x="365760" y="4096512"/>
-            <a:ext cx="1371600" cy="804672"/>
+          <p:cNvPr id="29" name="Shape 27"/>
+          <p:cNvSpPr/>
+          <p:nvPr/>
+        </p:nvSpPr>
+        <p:spPr>
+          <a:xfrm>
+            <a:off x="1874520" y="4096512"/>
+            <a:ext cx="6903720" cy="804672"/>
           </a:xfrm>
           <a:prstGeom prst="rect">
             <a:avLst>
@@ -8278,85 +8232,19 @@
             </a:avLst>
           </a:prstGeom>
           <a:solidFill>
-            <a:srgbClr val="E2E8F0"/>
+            <a:srgbClr val="F8FAFC"/>
           </a:solidFill>
           <a:ln w="12700">
             <a:solidFill>
               <a:srgbClr val="E2E8F0"/>
             </a:solidFill>
-            <a:prstDash val="solid"/>
-          </a:ln>
-        </p:spPr>
-      </p:sp>
-      <p:sp>
-        <p:nvSpPr>
-          <p:cNvPr id="31" name="Text 29"/>
-          <p:cNvSpPr/>
-          <p:nvPr/>
-        </p:nvSpPr>
-        <p:spPr>
-          <a:xfrm>
-            <a:off x="365760" y="4096512"/>
-            <a:ext cx="1371600" cy="804672"/>
-          </a:xfrm>
-          <a:prstGeom prst="rect">
-            <a:avLst/>
-          </a:prstGeom>
-          <a:noFill/>
-          <a:ln/>
-        </p:spPr>
-        <p:txBody>
-          <a:bodyPr wrap="square" lIns="0" tIns="0" rIns="0" bIns="0" rtlCol="0" anchor="ctr"/>
-          <a:lstStyle/>
-          <a:p>
-            <a:pPr algn="ctr" indent="0" marL="0">
-              <a:buNone/>
-            </a:pPr>
-            <a:r>
-              <a:rPr lang="en-US" sz="1100" b="1" dirty="0">
-                <a:solidFill>
-                  <a:srgbClr val="475569"/>
-                </a:solidFill>
-                <a:latin typeface="Trebuchet MS" pitchFamily="34" charset="0"/>
-                <a:ea typeface="Trebuchet MS" pitchFamily="34" charset="-122"/>
-                <a:cs typeface="Trebuchet MS" pitchFamily="34" charset="-120"/>
-              </a:rPr>
-              <a:t>Phonemes</a:t>
-            </a:r>
-            <a:endParaRPr lang="en-US" sz="1100" dirty="0"/>
-          </a:p>
-        </p:txBody>
-      </p:sp>
-      <p:sp>
-        <p:nvSpPr>
-          <p:cNvPr id="32" name="Shape 30"/>
-          <p:cNvSpPr/>
-          <p:nvPr/>
-        </p:nvSpPr>
-        <p:spPr>
-          <a:xfrm>
-            <a:off x="1874520" y="4096512"/>
-            <a:ext cx="6903720" cy="804672"/>
-          </a:xfrm>
-          <a:prstGeom prst="rect">
-            <a:avLst>
-              <a:gd name="adj" fmla="val 6818"/>
-            </a:avLst>
-          </a:prstGeom>
-          <a:solidFill>
-            <a:srgbClr val="F8FAFC"/>
-          </a:solidFill>
-          <a:ln w="12700">
-            <a:solidFill>
-              <a:srgbClr val="E2E8F0"/>
-            </a:solidFill>
             <a:prstDash val="dash"/>
           </a:ln>
         </p:spPr>
       </p:sp>
       <p:sp>
         <p:nvSpPr>
-          <p:cNvPr id="33" name="Text 31"/>
+          <p:cNvPr id="30" name="Text 28"/>
           <p:cNvSpPr/>
           <p:nvPr/>
         </p:nvSpPr>
@@ -8679,7 +8567,7 @@
                 <a:ea typeface="Calibri" pitchFamily="34" charset="-122"/>
                 <a:cs typeface="Calibri" pitchFamily="34" charset="-120"/>
               </a:rPr>
-              <a:t>Word Labs  •  wordlabs.app  •  Root: 'explore' = to search or travel through</a:t>
+              <a:t>Word Labs  •  wordlabs.app  •  Root: 'explore' = to search or discover new things</a:t>
             </a:r>
             <a:endParaRPr lang="en-US" sz="800" dirty="0"/>
           </a:p>
@@ -8898,7 +8786,7 @@
         </p:nvSpPr>
         <p:spPr>
           <a:xfrm>
-            <a:off x="2221992" y="2258568"/>
+            <a:off x="2938272" y="2258568"/>
             <a:ext cx="1828800" cy="292608"/>
           </a:xfrm>
           <a:prstGeom prst="rect">
@@ -8932,7 +8820,7 @@
         </p:nvSpPr>
         <p:spPr>
           <a:xfrm>
-            <a:off x="2221992" y="2258568"/>
+            <a:off x="2938272" y="2258568"/>
             <a:ext cx="1828800" cy="292608"/>
           </a:xfrm>
           <a:prstGeom prst="rect">
@@ -8971,7 +8859,7 @@
         </p:nvSpPr>
         <p:spPr>
           <a:xfrm>
-            <a:off x="2221992" y="2569464"/>
+            <a:off x="2938272" y="2569464"/>
             <a:ext cx="1828800" cy="201168"/>
           </a:xfrm>
           <a:prstGeom prst="rect">
@@ -8996,7 +8884,7 @@
                 <a:ea typeface="Calibri" pitchFamily="34" charset="-122"/>
                 <a:cs typeface="Calibri" pitchFamily="34" charset="-120"/>
               </a:rPr>
-              <a:t>to search or travel through</a:t>
+              <a:t>to search or discover</a:t>
             </a:r>
             <a:endParaRPr lang="en-US" sz="850" dirty="0"/>
           </a:p>
@@ -9004,13 +8892,52 @@
       </p:sp>
       <p:sp>
         <p:nvSpPr>
-          <p:cNvPr id="19" name="Shape 17"/>
-          <p:cNvSpPr/>
-          <p:nvPr/>
-        </p:nvSpPr>
-        <p:spPr>
-          <a:xfrm>
-            <a:off x="4370832" y="2258568"/>
+          <p:cNvPr id="19" name="Text 17"/>
+          <p:cNvSpPr/>
+          <p:nvPr/>
+        </p:nvSpPr>
+        <p:spPr>
+          <a:xfrm>
+            <a:off x="2938272" y="2752344"/>
+            <a:ext cx="1828800" cy="182880"/>
+          </a:xfrm>
+          <a:prstGeom prst="rect">
+            <a:avLst/>
+          </a:prstGeom>
+          <a:noFill/>
+          <a:ln/>
+        </p:spPr>
+        <p:txBody>
+          <a:bodyPr wrap="square" lIns="0" tIns="0" rIns="0" bIns="0" rtlCol="0" anchor="t"/>
+          <a:lstStyle/>
+          <a:p>
+            <a:pPr algn="ctr" indent="0" marL="0">
+              <a:buNone/>
+            </a:pPr>
+            <a:r>
+              <a:rPr lang="en-US" sz="700" i="1" dirty="0">
+                <a:solidFill>
+                  <a:srgbClr val="94A3B8"/>
+                </a:solidFill>
+                <a:latin typeface="Calibri" pitchFamily="34" charset="0"/>
+                <a:ea typeface="Calibri" pitchFamily="34" charset="-122"/>
+                <a:cs typeface="Calibri" pitchFamily="34" charset="-120"/>
+              </a:rPr>
+              <a:t>'e' dropped before vowel suffix</a:t>
+            </a:r>
+            <a:endParaRPr lang="en-US" sz="700" dirty="0"/>
+          </a:p>
+        </p:txBody>
+      </p:sp>
+      <p:sp>
+        <p:nvSpPr>
+          <p:cNvPr id="20" name="Shape 18"/>
+          <p:cNvSpPr/>
+          <p:nvPr/>
+        </p:nvSpPr>
+        <p:spPr>
+          <a:xfrm>
+            <a:off x="5803392" y="2258568"/>
             <a:ext cx="1828800" cy="292608"/>
           </a:xfrm>
           <a:prstGeom prst="rect">
@@ -9038,13 +8965,13 @@
       </p:sp>
       <p:sp>
         <p:nvSpPr>
-          <p:cNvPr id="20" name="Text 18"/>
-          <p:cNvSpPr/>
-          <p:nvPr/>
-        </p:nvSpPr>
-        <p:spPr>
-          <a:xfrm>
-            <a:off x="4370832" y="2258568"/>
+          <p:cNvPr id="21" name="Text 19"/>
+          <p:cNvSpPr/>
+          <p:nvPr/>
+        </p:nvSpPr>
+        <p:spPr>
+          <a:xfrm>
+            <a:off x="5803392" y="2258568"/>
             <a:ext cx="1828800" cy="292608"/>
           </a:xfrm>
           <a:prstGeom prst="rect">
@@ -9069,7 +8996,7 @@
                 <a:ea typeface="Trebuchet MS" pitchFamily="34" charset="-122"/>
                 <a:cs typeface="Trebuchet MS" pitchFamily="34" charset="-120"/>
               </a:rPr>
-              <a:t>r</a:t>
+              <a:t>er</a:t>
             </a:r>
             <a:endParaRPr lang="en-US" sz="1300" dirty="0"/>
           </a:p>
@@ -9077,13 +9004,13 @@
       </p:sp>
       <p:sp>
         <p:nvSpPr>
-          <p:cNvPr id="21" name="Text 19"/>
-          <p:cNvSpPr/>
-          <p:nvPr/>
-        </p:nvSpPr>
-        <p:spPr>
-          <a:xfrm>
-            <a:off x="4370832" y="2569464"/>
+          <p:cNvPr id="22" name="Text 20"/>
+          <p:cNvSpPr/>
+          <p:nvPr/>
+        </p:nvSpPr>
+        <p:spPr>
+          <a:xfrm>
+            <a:off x="5803392" y="2569464"/>
             <a:ext cx="1828800" cy="201168"/>
           </a:xfrm>
           <a:prstGeom prst="rect">
@@ -9108,7 +9035,7 @@
                 <a:ea typeface="Calibri" pitchFamily="34" charset="-122"/>
                 <a:cs typeface="Calibri" pitchFamily="34" charset="-120"/>
               </a:rPr>
-              <a:t>connecting consonant</a:t>
+              <a:t>a person who does something</a:t>
             </a:r>
             <a:endParaRPr lang="en-US" sz="850" dirty="0"/>
           </a:p>
@@ -9116,75 +9043,29 @@
       </p:sp>
       <p:sp>
         <p:nvSpPr>
-          <p:cNvPr id="22" name="Text 20"/>
-          <p:cNvSpPr/>
-          <p:nvPr/>
-        </p:nvSpPr>
-        <p:spPr>
-          <a:xfrm>
-            <a:off x="4370832" y="2752344"/>
-            <a:ext cx="1828800" cy="182880"/>
-          </a:xfrm>
-          <a:prstGeom prst="rect">
-            <a:avLst/>
-          </a:prstGeom>
-          <a:noFill/>
-          <a:ln/>
-        </p:spPr>
-        <p:txBody>
-          <a:bodyPr wrap="square" lIns="0" tIns="0" rIns="0" bIns="0" rtlCol="0" anchor="t"/>
-          <a:lstStyle/>
-          <a:p>
-            <a:pPr algn="ctr" indent="0" marL="0">
-              <a:buNone/>
-            </a:pPr>
-            <a:r>
-              <a:rPr lang="en-US" sz="700" i="1" dirty="0">
-                <a:solidFill>
-                  <a:srgbClr val="94A3B8"/>
-                </a:solidFill>
-                <a:latin typeface="Calibri" pitchFamily="34" charset="0"/>
-                <a:ea typeface="Calibri" pitchFamily="34" charset="-122"/>
-                <a:cs typeface="Calibri" pitchFamily="34" charset="-120"/>
-              </a:rPr>
-              <a:t>'e' dropped before vowel suffix</a:t>
-            </a:r>
-            <a:endParaRPr lang="en-US" sz="700" dirty="0"/>
-          </a:p>
-        </p:txBody>
-      </p:sp>
-      <p:sp>
-        <p:nvSpPr>
           <p:cNvPr id="23" name="Shape 21"/>
           <p:cNvSpPr/>
           <p:nvPr/>
         </p:nvSpPr>
         <p:spPr>
           <a:xfrm>
-            <a:off x="6519672" y="2258568"/>
-            <a:ext cx="1828800" cy="292608"/>
+            <a:off x="365760" y="3273552"/>
+            <a:ext cx="1371600" cy="658368"/>
           </a:xfrm>
           <a:prstGeom prst="rect">
             <a:avLst>
-              <a:gd name="adj" fmla="val 25000"/>
+              <a:gd name="adj" fmla="val 8333"/>
             </a:avLst>
           </a:prstGeom>
           <a:solidFill>
-            <a:srgbClr val="FCE7F3"/>
-          </a:solidFill>
-          <a:ln w="19050">
-            <a:solidFill>
-              <a:srgbClr val="DB2777"/>
-            </a:solidFill>
-            <a:prstDash val="solid"/>
-          </a:ln>
-          <a:effectLst>
-            <a:outerShdw sx="100000" sy="100000" kx="0" ky="0" algn="bl" rotWithShape="0" blurRad="101600" dist="38100" dir="8100000">
-              <a:srgbClr val="000000">
-                <a:alpha val="12000"/>
-              </a:srgbClr>
-            </a:outerShdw>
-          </a:effectLst>
+            <a:srgbClr val="E2E8F0"/>
+          </a:solidFill>
+          <a:ln w="12700">
+            <a:solidFill>
+              <a:srgbClr val="E2E8F0"/>
+            </a:solidFill>
+            <a:prstDash val="solid"/>
+          </a:ln>
         </p:spPr>
       </p:sp>
       <p:sp>
@@ -9195,86 +9076,47 @@
         </p:nvSpPr>
         <p:spPr>
           <a:xfrm>
-            <a:off x="6519672" y="2258568"/>
-            <a:ext cx="1828800" cy="292608"/>
-          </a:xfrm>
-          <a:prstGeom prst="rect">
-            <a:avLst/>
-          </a:prstGeom>
-          <a:noFill/>
-          <a:ln/>
-        </p:spPr>
-        <p:txBody>
-          <a:bodyPr wrap="square" lIns="0" tIns="0" rIns="0" bIns="0" rtlCol="0" anchor="ctr"/>
-          <a:lstStyle/>
-          <a:p>
-            <a:pPr algn="ctr" indent="0" marL="0">
-              <a:buNone/>
-            </a:pPr>
-            <a:r>
-              <a:rPr lang="en-US" sz="1300" b="1" dirty="0">
-                <a:solidFill>
-                  <a:srgbClr val="9D174D"/>
+            <a:off x="365760" y="3273552"/>
+            <a:ext cx="1371600" cy="658368"/>
+          </a:xfrm>
+          <a:prstGeom prst="rect">
+            <a:avLst/>
+          </a:prstGeom>
+          <a:noFill/>
+          <a:ln/>
+        </p:spPr>
+        <p:txBody>
+          <a:bodyPr wrap="square" lIns="0" tIns="0" rIns="0" bIns="0" rtlCol="0" anchor="ctr"/>
+          <a:lstStyle/>
+          <a:p>
+            <a:pPr algn="ctr" indent="0" marL="0">
+              <a:buNone/>
+            </a:pPr>
+            <a:r>
+              <a:rPr lang="en-US" sz="1100" b="1" dirty="0">
+                <a:solidFill>
+                  <a:srgbClr val="475569"/>
                 </a:solidFill>
                 <a:latin typeface="Trebuchet MS" pitchFamily="34" charset="0"/>
                 <a:ea typeface="Trebuchet MS" pitchFamily="34" charset="-122"/>
                 <a:cs typeface="Trebuchet MS" pitchFamily="34" charset="-120"/>
               </a:rPr>
-              <a:t>er</a:t>
-            </a:r>
-            <a:endParaRPr lang="en-US" sz="1300" dirty="0"/>
-          </a:p>
-        </p:txBody>
-      </p:sp>
-      <p:sp>
-        <p:nvSpPr>
-          <p:cNvPr id="25" name="Text 23"/>
-          <p:cNvSpPr/>
-          <p:nvPr/>
-        </p:nvSpPr>
-        <p:spPr>
-          <a:xfrm>
-            <a:off x="6519672" y="2569464"/>
-            <a:ext cx="1828800" cy="201168"/>
-          </a:xfrm>
-          <a:prstGeom prst="rect">
-            <a:avLst/>
-          </a:prstGeom>
-          <a:noFill/>
-          <a:ln/>
-        </p:spPr>
-        <p:txBody>
-          <a:bodyPr wrap="square" lIns="0" tIns="0" rIns="0" bIns="0" rtlCol="0" anchor="t"/>
-          <a:lstStyle/>
-          <a:p>
-            <a:pPr algn="ctr" indent="0" marL="0">
-              <a:buNone/>
-            </a:pPr>
-            <a:r>
-              <a:rPr lang="en-US" sz="850" dirty="0">
-                <a:solidFill>
-                  <a:srgbClr val="475569"/>
-                </a:solidFill>
-                <a:latin typeface="Calibri" pitchFamily="34" charset="0"/>
-                <a:ea typeface="Calibri" pitchFamily="34" charset="-122"/>
-                <a:cs typeface="Calibri" pitchFamily="34" charset="-120"/>
-              </a:rPr>
-              <a:t>a person who</a:t>
-            </a:r>
-            <a:endParaRPr lang="en-US" sz="850" dirty="0"/>
-          </a:p>
-        </p:txBody>
-      </p:sp>
-      <p:sp>
-        <p:nvSpPr>
-          <p:cNvPr id="26" name="Shape 24"/>
-          <p:cNvSpPr/>
-          <p:nvPr/>
-        </p:nvSpPr>
-        <p:spPr>
-          <a:xfrm>
-            <a:off x="365760" y="3273552"/>
-            <a:ext cx="1371600" cy="658368"/>
+              <a:t>Syllables</a:t>
+            </a:r>
+            <a:endParaRPr lang="en-US" sz="1100" dirty="0"/>
+          </a:p>
+        </p:txBody>
+      </p:sp>
+      <p:sp>
+        <p:nvSpPr>
+          <p:cNvPr id="25" name="Shape 23"/>
+          <p:cNvSpPr/>
+          <p:nvPr/>
+        </p:nvSpPr>
+        <p:spPr>
+          <a:xfrm>
+            <a:off x="1874520" y="3273552"/>
+            <a:ext cx="6903720" cy="658368"/>
           </a:xfrm>
           <a:prstGeom prst="rect">
             <a:avLst>
@@ -9282,11 +9124,38 @@
             </a:avLst>
           </a:prstGeom>
           <a:solidFill>
-            <a:srgbClr val="E2E8F0"/>
-          </a:solidFill>
-          <a:ln w="12700">
-            <a:solidFill>
-              <a:srgbClr val="E2E8F0"/>
+            <a:srgbClr val="CCFBF1"/>
+          </a:solidFill>
+          <a:ln w="12700">
+            <a:solidFill>
+              <a:srgbClr val="0D9488"/>
+            </a:solidFill>
+            <a:prstDash val="solid"/>
+          </a:ln>
+        </p:spPr>
+      </p:sp>
+      <p:sp>
+        <p:nvSpPr>
+          <p:cNvPr id="26" name="Shape 24"/>
+          <p:cNvSpPr/>
+          <p:nvPr/>
+        </p:nvSpPr>
+        <p:spPr>
+          <a:xfrm>
+            <a:off x="2313432" y="3364992"/>
+            <a:ext cx="1645920" cy="475488"/>
+          </a:xfrm>
+          <a:prstGeom prst="rect">
+            <a:avLst>
+              <a:gd name="adj" fmla="val 9615"/>
+            </a:avLst>
+          </a:prstGeom>
+          <a:solidFill>
+            <a:srgbClr val="FFFFFF"/>
+          </a:solidFill>
+          <a:ln w="12700">
+            <a:solidFill>
+              <a:srgbClr val="0D9488"/>
             </a:solidFill>
             <a:prstDash val="solid"/>
           </a:ln>
@@ -9300,63 +9169,75 @@
         </p:nvSpPr>
         <p:spPr>
           <a:xfrm>
-            <a:off x="365760" y="3273552"/>
-            <a:ext cx="1371600" cy="658368"/>
-          </a:xfrm>
-          <a:prstGeom prst="rect">
-            <a:avLst/>
-          </a:prstGeom>
-          <a:noFill/>
-          <a:ln/>
-        </p:spPr>
-        <p:txBody>
-          <a:bodyPr wrap="square" lIns="0" tIns="0" rIns="0" bIns="0" rtlCol="0" anchor="ctr"/>
-          <a:lstStyle/>
-          <a:p>
-            <a:pPr algn="ctr" indent="0" marL="0">
-              <a:buNone/>
-            </a:pPr>
-            <a:r>
-              <a:rPr lang="en-US" sz="1100" b="1" dirty="0">
-                <a:solidFill>
-                  <a:srgbClr val="475569"/>
+            <a:off x="2313432" y="3364992"/>
+            <a:ext cx="1645920" cy="475488"/>
+          </a:xfrm>
+          <a:prstGeom prst="rect">
+            <a:avLst/>
+          </a:prstGeom>
+          <a:noFill/>
+          <a:ln/>
+        </p:spPr>
+        <p:txBody>
+          <a:bodyPr wrap="square" lIns="0" tIns="0" rIns="0" bIns="0" rtlCol="0" anchor="ctr"/>
+          <a:lstStyle/>
+          <a:p>
+            <a:pPr algn="ctr" indent="0" marL="0">
+              <a:buNone/>
+            </a:pPr>
+            <a:r>
+              <a:rPr lang="en-US" sz="1400" b="1" dirty="0">
+                <a:solidFill>
+                  <a:srgbClr val="0D9488"/>
                 </a:solidFill>
                 <a:latin typeface="Trebuchet MS" pitchFamily="34" charset="0"/>
                 <a:ea typeface="Trebuchet MS" pitchFamily="34" charset="-122"/>
                 <a:cs typeface="Trebuchet MS" pitchFamily="34" charset="-120"/>
               </a:rPr>
-              <a:t>Syllables</a:t>
-            </a:r>
-            <a:endParaRPr lang="en-US" sz="1100" dirty="0"/>
-          </a:p>
-        </p:txBody>
-      </p:sp>
-      <p:sp>
-        <p:nvSpPr>
-          <p:cNvPr id="28" name="Shape 26"/>
-          <p:cNvSpPr/>
-          <p:nvPr/>
-        </p:nvSpPr>
-        <p:spPr>
-          <a:xfrm>
-            <a:off x="1874520" y="3273552"/>
-            <a:ext cx="6903720" cy="658368"/>
-          </a:xfrm>
-          <a:prstGeom prst="rect">
-            <a:avLst>
-              <a:gd name="adj" fmla="val 8333"/>
-            </a:avLst>
-          </a:prstGeom>
-          <a:solidFill>
-            <a:srgbClr val="CCFBF1"/>
-          </a:solidFill>
-          <a:ln w="12700">
-            <a:solidFill>
-              <a:srgbClr val="0D9488"/>
-            </a:solidFill>
-            <a:prstDash val="solid"/>
-          </a:ln>
-        </p:spPr>
+              <a:t>ex</a:t>
+            </a:r>
+            <a:endParaRPr lang="en-US" sz="1400" dirty="0"/>
+          </a:p>
+        </p:txBody>
+      </p:sp>
+      <p:sp>
+        <p:nvSpPr>
+          <p:cNvPr id="28" name="Text 26"/>
+          <p:cNvSpPr/>
+          <p:nvPr/>
+        </p:nvSpPr>
+        <p:spPr>
+          <a:xfrm>
+            <a:off x="3959352" y="3364992"/>
+            <a:ext cx="411480" cy="475488"/>
+          </a:xfrm>
+          <a:prstGeom prst="rect">
+            <a:avLst/>
+          </a:prstGeom>
+          <a:noFill/>
+          <a:ln/>
+        </p:spPr>
+        <p:txBody>
+          <a:bodyPr wrap="square" lIns="0" tIns="0" rIns="0" bIns="0" rtlCol="0" anchor="ctr"/>
+          <a:lstStyle/>
+          <a:p>
+            <a:pPr algn="ctr" indent="0" marL="0">
+              <a:buNone/>
+            </a:pPr>
+            <a:r>
+              <a:rPr lang="en-US" sz="1600" b="1" dirty="0">
+                <a:solidFill>
+                  <a:srgbClr val="0D9488"/>
+                </a:solidFill>
+                <a:latin typeface="Trebuchet MS" pitchFamily="34" charset="0"/>
+                <a:ea typeface="Trebuchet MS" pitchFamily="34" charset="-122"/>
+                <a:cs typeface="Trebuchet MS" pitchFamily="34" charset="-120"/>
+              </a:rPr>
+              <a:t>·</a:t>
+            </a:r>
+            <a:endParaRPr lang="en-US" sz="1600" dirty="0"/>
+          </a:p>
+        </p:txBody>
       </p:sp>
       <p:sp>
         <p:nvSpPr>
@@ -9366,7 +9247,7 @@
         </p:nvSpPr>
         <p:spPr>
           <a:xfrm>
-            <a:off x="2313432" y="3364992"/>
+            <a:off x="4370832" y="3364992"/>
             <a:ext cx="1645920" cy="475488"/>
           </a:xfrm>
           <a:prstGeom prst="rect">
@@ -9393,7 +9274,7 @@
         </p:nvSpPr>
         <p:spPr>
           <a:xfrm>
-            <a:off x="2313432" y="3364992"/>
+            <a:off x="4370832" y="3364992"/>
             <a:ext cx="1645920" cy="475488"/>
           </a:xfrm>
           <a:prstGeom prst="rect">
@@ -9418,7 +9299,7 @@
                 <a:ea typeface="Trebuchet MS" pitchFamily="34" charset="-122"/>
                 <a:cs typeface="Trebuchet MS" pitchFamily="34" charset="-120"/>
               </a:rPr>
-              <a:t>ex</a:t>
+              <a:t>plor</a:t>
             </a:r>
             <a:endParaRPr lang="en-US" sz="1400" dirty="0"/>
           </a:p>
@@ -9432,7 +9313,7 @@
         </p:nvSpPr>
         <p:spPr>
           <a:xfrm>
-            <a:off x="3959352" y="3364992"/>
+            <a:off x="6016752" y="3364992"/>
             <a:ext cx="411480" cy="475488"/>
           </a:xfrm>
           <a:prstGeom prst="rect">
@@ -9471,7 +9352,7 @@
         </p:nvSpPr>
         <p:spPr>
           <a:xfrm>
-            <a:off x="4370832" y="3364992"/>
+            <a:off x="6428232" y="3364992"/>
             <a:ext cx="1645920" cy="475488"/>
           </a:xfrm>
           <a:prstGeom prst="rect">
@@ -9498,7 +9379,7 @@
         </p:nvSpPr>
         <p:spPr>
           <a:xfrm>
-            <a:off x="4370832" y="3364992"/>
+            <a:off x="6428232" y="3364992"/>
             <a:ext cx="1645920" cy="475488"/>
           </a:xfrm>
           <a:prstGeom prst="rect">
@@ -9523,7 +9404,7 @@
                 <a:ea typeface="Trebuchet MS" pitchFamily="34" charset="-122"/>
                 <a:cs typeface="Trebuchet MS" pitchFamily="34" charset="-120"/>
               </a:rPr>
-              <a:t>plor</a:t>
+              <a:t>er</a:t>
             </a:r>
             <a:endParaRPr lang="en-US" sz="1400" dirty="0"/>
           </a:p>
@@ -9531,119 +9412,80 @@
       </p:sp>
       <p:sp>
         <p:nvSpPr>
-          <p:cNvPr id="34" name="Text 32"/>
-          <p:cNvSpPr/>
-          <p:nvPr/>
-        </p:nvSpPr>
-        <p:spPr>
-          <a:xfrm>
-            <a:off x="6016752" y="3364992"/>
-            <a:ext cx="411480" cy="475488"/>
-          </a:xfrm>
-          <a:prstGeom prst="rect">
-            <a:avLst/>
-          </a:prstGeom>
-          <a:noFill/>
-          <a:ln/>
-        </p:spPr>
-        <p:txBody>
-          <a:bodyPr wrap="square" lIns="0" tIns="0" rIns="0" bIns="0" rtlCol="0" anchor="ctr"/>
-          <a:lstStyle/>
-          <a:p>
-            <a:pPr algn="ctr" indent="0" marL="0">
-              <a:buNone/>
-            </a:pPr>
-            <a:r>
-              <a:rPr lang="en-US" sz="1600" b="1" dirty="0">
-                <a:solidFill>
-                  <a:srgbClr val="0D9488"/>
+          <p:cNvPr id="34" name="Shape 32"/>
+          <p:cNvSpPr/>
+          <p:nvPr/>
+        </p:nvSpPr>
+        <p:spPr>
+          <a:xfrm>
+            <a:off x="365760" y="4096512"/>
+            <a:ext cx="1371600" cy="804672"/>
+          </a:xfrm>
+          <a:prstGeom prst="rect">
+            <a:avLst>
+              <a:gd name="adj" fmla="val 6818"/>
+            </a:avLst>
+          </a:prstGeom>
+          <a:solidFill>
+            <a:srgbClr val="E2E8F0"/>
+          </a:solidFill>
+          <a:ln w="12700">
+            <a:solidFill>
+              <a:srgbClr val="E2E8F0"/>
+            </a:solidFill>
+            <a:prstDash val="solid"/>
+          </a:ln>
+        </p:spPr>
+      </p:sp>
+      <p:sp>
+        <p:nvSpPr>
+          <p:cNvPr id="35" name="Text 33"/>
+          <p:cNvSpPr/>
+          <p:nvPr/>
+        </p:nvSpPr>
+        <p:spPr>
+          <a:xfrm>
+            <a:off x="365760" y="4096512"/>
+            <a:ext cx="1371600" cy="804672"/>
+          </a:xfrm>
+          <a:prstGeom prst="rect">
+            <a:avLst/>
+          </a:prstGeom>
+          <a:noFill/>
+          <a:ln/>
+        </p:spPr>
+        <p:txBody>
+          <a:bodyPr wrap="square" lIns="0" tIns="0" rIns="0" bIns="0" rtlCol="0" anchor="ctr"/>
+          <a:lstStyle/>
+          <a:p>
+            <a:pPr algn="ctr" indent="0" marL="0">
+              <a:buNone/>
+            </a:pPr>
+            <a:r>
+              <a:rPr lang="en-US" sz="1100" b="1" dirty="0">
+                <a:solidFill>
+                  <a:srgbClr val="475569"/>
                 </a:solidFill>
                 <a:latin typeface="Trebuchet MS" pitchFamily="34" charset="0"/>
                 <a:ea typeface="Trebuchet MS" pitchFamily="34" charset="-122"/>
                 <a:cs typeface="Trebuchet MS" pitchFamily="34" charset="-120"/>
               </a:rPr>
-              <a:t>·</a:t>
-            </a:r>
-            <a:endParaRPr lang="en-US" sz="1600" dirty="0"/>
-          </a:p>
-        </p:txBody>
-      </p:sp>
-      <p:sp>
-        <p:nvSpPr>
-          <p:cNvPr id="35" name="Shape 33"/>
-          <p:cNvSpPr/>
-          <p:nvPr/>
-        </p:nvSpPr>
-        <p:spPr>
-          <a:xfrm>
-            <a:off x="6428232" y="3364992"/>
-            <a:ext cx="1645920" cy="475488"/>
-          </a:xfrm>
-          <a:prstGeom prst="rect">
-            <a:avLst>
-              <a:gd name="adj" fmla="val 9615"/>
-            </a:avLst>
-          </a:prstGeom>
-          <a:solidFill>
-            <a:srgbClr val="FFFFFF"/>
-          </a:solidFill>
-          <a:ln w="12700">
-            <a:solidFill>
-              <a:srgbClr val="0D9488"/>
-            </a:solidFill>
-            <a:prstDash val="solid"/>
-          </a:ln>
-        </p:spPr>
-      </p:sp>
-      <p:sp>
-        <p:nvSpPr>
-          <p:cNvPr id="36" name="Text 34"/>
-          <p:cNvSpPr/>
-          <p:nvPr/>
-        </p:nvSpPr>
-        <p:spPr>
-          <a:xfrm>
-            <a:off x="6428232" y="3364992"/>
-            <a:ext cx="1645920" cy="475488"/>
-          </a:xfrm>
-          <a:prstGeom prst="rect">
-            <a:avLst/>
-          </a:prstGeom>
-          <a:noFill/>
-          <a:ln/>
-        </p:spPr>
-        <p:txBody>
-          <a:bodyPr wrap="square" lIns="0" tIns="0" rIns="0" bIns="0" rtlCol="0" anchor="ctr"/>
-          <a:lstStyle/>
-          <a:p>
-            <a:pPr algn="ctr" indent="0" marL="0">
-              <a:buNone/>
-            </a:pPr>
-            <a:r>
-              <a:rPr lang="en-US" sz="1400" b="1" dirty="0">
-                <a:solidFill>
-                  <a:srgbClr val="0D9488"/>
-                </a:solidFill>
-                <a:latin typeface="Trebuchet MS" pitchFamily="34" charset="0"/>
-                <a:ea typeface="Trebuchet MS" pitchFamily="34" charset="-122"/>
-                <a:cs typeface="Trebuchet MS" pitchFamily="34" charset="-120"/>
-              </a:rPr>
-              <a:t>er</a:t>
-            </a:r>
-            <a:endParaRPr lang="en-US" sz="1400" dirty="0"/>
-          </a:p>
-        </p:txBody>
-      </p:sp>
-      <p:sp>
-        <p:nvSpPr>
-          <p:cNvPr id="37" name="Shape 35"/>
-          <p:cNvSpPr/>
-          <p:nvPr/>
-        </p:nvSpPr>
-        <p:spPr>
-          <a:xfrm>
-            <a:off x="365760" y="4096512"/>
-            <a:ext cx="1371600" cy="804672"/>
+              <a:t>Phonemes</a:t>
+            </a:r>
+            <a:endParaRPr lang="en-US" sz="1100" dirty="0"/>
+          </a:p>
+        </p:txBody>
+      </p:sp>
+      <p:sp>
+        <p:nvSpPr>
+          <p:cNvPr id="36" name="Shape 34"/>
+          <p:cNvSpPr/>
+          <p:nvPr/>
+        </p:nvSpPr>
+        <p:spPr>
+          <a:xfrm>
+            <a:off x="1874520" y="4096512"/>
+            <a:ext cx="6903720" cy="804672"/>
           </a:xfrm>
           <a:prstGeom prst="rect">
             <a:avLst>
@@ -9651,85 +9493,19 @@
             </a:avLst>
           </a:prstGeom>
           <a:solidFill>
-            <a:srgbClr val="E2E8F0"/>
+            <a:srgbClr val="F8FAFC"/>
           </a:solidFill>
           <a:ln w="12700">
             <a:solidFill>
               <a:srgbClr val="E2E8F0"/>
             </a:solidFill>
-            <a:prstDash val="solid"/>
-          </a:ln>
-        </p:spPr>
-      </p:sp>
-      <p:sp>
-        <p:nvSpPr>
-          <p:cNvPr id="38" name="Text 36"/>
-          <p:cNvSpPr/>
-          <p:nvPr/>
-        </p:nvSpPr>
-        <p:spPr>
-          <a:xfrm>
-            <a:off x="365760" y="4096512"/>
-            <a:ext cx="1371600" cy="804672"/>
-          </a:xfrm>
-          <a:prstGeom prst="rect">
-            <a:avLst/>
-          </a:prstGeom>
-          <a:noFill/>
-          <a:ln/>
-        </p:spPr>
-        <p:txBody>
-          <a:bodyPr wrap="square" lIns="0" tIns="0" rIns="0" bIns="0" rtlCol="0" anchor="ctr"/>
-          <a:lstStyle/>
-          <a:p>
-            <a:pPr algn="ctr" indent="0" marL="0">
-              <a:buNone/>
-            </a:pPr>
-            <a:r>
-              <a:rPr lang="en-US" sz="1100" b="1" dirty="0">
-                <a:solidFill>
-                  <a:srgbClr val="475569"/>
-                </a:solidFill>
-                <a:latin typeface="Trebuchet MS" pitchFamily="34" charset="0"/>
-                <a:ea typeface="Trebuchet MS" pitchFamily="34" charset="-122"/>
-                <a:cs typeface="Trebuchet MS" pitchFamily="34" charset="-120"/>
-              </a:rPr>
-              <a:t>Phonemes</a:t>
-            </a:r>
-            <a:endParaRPr lang="en-US" sz="1100" dirty="0"/>
-          </a:p>
-        </p:txBody>
-      </p:sp>
-      <p:sp>
-        <p:nvSpPr>
-          <p:cNvPr id="39" name="Shape 37"/>
-          <p:cNvSpPr/>
-          <p:nvPr/>
-        </p:nvSpPr>
-        <p:spPr>
-          <a:xfrm>
-            <a:off x="1874520" y="4096512"/>
-            <a:ext cx="6903720" cy="804672"/>
-          </a:xfrm>
-          <a:prstGeom prst="rect">
-            <a:avLst>
-              <a:gd name="adj" fmla="val 6818"/>
-            </a:avLst>
-          </a:prstGeom>
-          <a:solidFill>
-            <a:srgbClr val="F8FAFC"/>
-          </a:solidFill>
-          <a:ln w="12700">
-            <a:solidFill>
-              <a:srgbClr val="E2E8F0"/>
-            </a:solidFill>
             <a:prstDash val="dash"/>
           </a:ln>
         </p:spPr>
       </p:sp>
       <p:sp>
         <p:nvSpPr>
-          <p:cNvPr id="40" name="Text 38"/>
+          <p:cNvPr id="37" name="Text 35"/>
           <p:cNvSpPr/>
           <p:nvPr/>
         </p:nvSpPr>
@@ -10052,7 +9828,7 @@
                 <a:ea typeface="Calibri" pitchFamily="34" charset="-122"/>
                 <a:cs typeface="Calibri" pitchFamily="34" charset="-120"/>
               </a:rPr>
-              <a:t>Word Labs  •  wordlabs.app  •  Root: 'explore' = to search or travel through</a:t>
+              <a:t>Word Labs  •  wordlabs.app  •  Root: 'explore' = to search or discover new things</a:t>
             </a:r>
             <a:endParaRPr lang="en-US" sz="800" dirty="0"/>
           </a:p>
@@ -10271,7 +10047,7 @@
         </p:nvSpPr>
         <p:spPr>
           <a:xfrm>
-            <a:off x="2221992" y="2258568"/>
+            <a:off x="2938272" y="2258568"/>
             <a:ext cx="1828800" cy="292608"/>
           </a:xfrm>
           <a:prstGeom prst="rect">
@@ -10305,7 +10081,7 @@
         </p:nvSpPr>
         <p:spPr>
           <a:xfrm>
-            <a:off x="2221992" y="2258568"/>
+            <a:off x="2938272" y="2258568"/>
             <a:ext cx="1828800" cy="292608"/>
           </a:xfrm>
           <a:prstGeom prst="rect">
@@ -10344,7 +10120,7 @@
         </p:nvSpPr>
         <p:spPr>
           <a:xfrm>
-            <a:off x="2221992" y="2569464"/>
+            <a:off x="2938272" y="2569464"/>
             <a:ext cx="1828800" cy="201168"/>
           </a:xfrm>
           <a:prstGeom prst="rect">
@@ -10369,7 +10145,7 @@
                 <a:ea typeface="Calibri" pitchFamily="34" charset="-122"/>
                 <a:cs typeface="Calibri" pitchFamily="34" charset="-120"/>
               </a:rPr>
-              <a:t>to search or travel through</a:t>
+              <a:t>to search or discover</a:t>
             </a:r>
             <a:endParaRPr lang="en-US" sz="850" dirty="0"/>
           </a:p>
@@ -10377,13 +10153,52 @@
       </p:sp>
       <p:sp>
         <p:nvSpPr>
-          <p:cNvPr id="19" name="Shape 17"/>
-          <p:cNvSpPr/>
-          <p:nvPr/>
-        </p:nvSpPr>
-        <p:spPr>
-          <a:xfrm>
-            <a:off x="4370832" y="2258568"/>
+          <p:cNvPr id="19" name="Text 17"/>
+          <p:cNvSpPr/>
+          <p:nvPr/>
+        </p:nvSpPr>
+        <p:spPr>
+          <a:xfrm>
+            <a:off x="2938272" y="2752344"/>
+            <a:ext cx="1828800" cy="182880"/>
+          </a:xfrm>
+          <a:prstGeom prst="rect">
+            <a:avLst/>
+          </a:prstGeom>
+          <a:noFill/>
+          <a:ln/>
+        </p:spPr>
+        <p:txBody>
+          <a:bodyPr wrap="square" lIns="0" tIns="0" rIns="0" bIns="0" rtlCol="0" anchor="t"/>
+          <a:lstStyle/>
+          <a:p>
+            <a:pPr algn="ctr" indent="0" marL="0">
+              <a:buNone/>
+            </a:pPr>
+            <a:r>
+              <a:rPr lang="en-US" sz="700" i="1" dirty="0">
+                <a:solidFill>
+                  <a:srgbClr val="94A3B8"/>
+                </a:solidFill>
+                <a:latin typeface="Calibri" pitchFamily="34" charset="0"/>
+                <a:ea typeface="Calibri" pitchFamily="34" charset="-122"/>
+                <a:cs typeface="Calibri" pitchFamily="34" charset="-120"/>
+              </a:rPr>
+              <a:t>'e' dropped before vowel suffix</a:t>
+            </a:r>
+            <a:endParaRPr lang="en-US" sz="700" dirty="0"/>
+          </a:p>
+        </p:txBody>
+      </p:sp>
+      <p:sp>
+        <p:nvSpPr>
+          <p:cNvPr id="20" name="Shape 18"/>
+          <p:cNvSpPr/>
+          <p:nvPr/>
+        </p:nvSpPr>
+        <p:spPr>
+          <a:xfrm>
+            <a:off x="5803392" y="2258568"/>
             <a:ext cx="1828800" cy="292608"/>
           </a:xfrm>
           <a:prstGeom prst="rect">
@@ -10411,13 +10226,13 @@
       </p:sp>
       <p:sp>
         <p:nvSpPr>
-          <p:cNvPr id="20" name="Text 18"/>
-          <p:cNvSpPr/>
-          <p:nvPr/>
-        </p:nvSpPr>
-        <p:spPr>
-          <a:xfrm>
-            <a:off x="4370832" y="2258568"/>
+          <p:cNvPr id="21" name="Text 19"/>
+          <p:cNvSpPr/>
+          <p:nvPr/>
+        </p:nvSpPr>
+        <p:spPr>
+          <a:xfrm>
+            <a:off x="5803392" y="2258568"/>
             <a:ext cx="1828800" cy="292608"/>
           </a:xfrm>
           <a:prstGeom prst="rect">
@@ -10442,7 +10257,7 @@
                 <a:ea typeface="Trebuchet MS" pitchFamily="34" charset="-122"/>
                 <a:cs typeface="Trebuchet MS" pitchFamily="34" charset="-120"/>
               </a:rPr>
-              <a:t>r</a:t>
+              <a:t>er</a:t>
             </a:r>
             <a:endParaRPr lang="en-US" sz="1300" dirty="0"/>
           </a:p>
@@ -10450,13 +10265,13 @@
       </p:sp>
       <p:sp>
         <p:nvSpPr>
-          <p:cNvPr id="21" name="Text 19"/>
-          <p:cNvSpPr/>
-          <p:nvPr/>
-        </p:nvSpPr>
-        <p:spPr>
-          <a:xfrm>
-            <a:off x="4370832" y="2569464"/>
+          <p:cNvPr id="22" name="Text 20"/>
+          <p:cNvSpPr/>
+          <p:nvPr/>
+        </p:nvSpPr>
+        <p:spPr>
+          <a:xfrm>
+            <a:off x="5803392" y="2569464"/>
             <a:ext cx="1828800" cy="201168"/>
           </a:xfrm>
           <a:prstGeom prst="rect">
@@ -10481,7 +10296,7 @@
                 <a:ea typeface="Calibri" pitchFamily="34" charset="-122"/>
                 <a:cs typeface="Calibri" pitchFamily="34" charset="-120"/>
               </a:rPr>
-              <a:t>connecting consonant</a:t>
+              <a:t>a person who does something</a:t>
             </a:r>
             <a:endParaRPr lang="en-US" sz="850" dirty="0"/>
           </a:p>
@@ -10489,75 +10304,29 @@
       </p:sp>
       <p:sp>
         <p:nvSpPr>
-          <p:cNvPr id="22" name="Text 20"/>
-          <p:cNvSpPr/>
-          <p:nvPr/>
-        </p:nvSpPr>
-        <p:spPr>
-          <a:xfrm>
-            <a:off x="4370832" y="2752344"/>
-            <a:ext cx="1828800" cy="182880"/>
-          </a:xfrm>
-          <a:prstGeom prst="rect">
-            <a:avLst/>
-          </a:prstGeom>
-          <a:noFill/>
-          <a:ln/>
-        </p:spPr>
-        <p:txBody>
-          <a:bodyPr wrap="square" lIns="0" tIns="0" rIns="0" bIns="0" rtlCol="0" anchor="t"/>
-          <a:lstStyle/>
-          <a:p>
-            <a:pPr algn="ctr" indent="0" marL="0">
-              <a:buNone/>
-            </a:pPr>
-            <a:r>
-              <a:rPr lang="en-US" sz="700" i="1" dirty="0">
-                <a:solidFill>
-                  <a:srgbClr val="94A3B8"/>
-                </a:solidFill>
-                <a:latin typeface="Calibri" pitchFamily="34" charset="0"/>
-                <a:ea typeface="Calibri" pitchFamily="34" charset="-122"/>
-                <a:cs typeface="Calibri" pitchFamily="34" charset="-120"/>
-              </a:rPr>
-              <a:t>'e' dropped before vowel suffix</a:t>
-            </a:r>
-            <a:endParaRPr lang="en-US" sz="700" dirty="0"/>
-          </a:p>
-        </p:txBody>
-      </p:sp>
-      <p:sp>
-        <p:nvSpPr>
           <p:cNvPr id="23" name="Shape 21"/>
           <p:cNvSpPr/>
           <p:nvPr/>
         </p:nvSpPr>
         <p:spPr>
           <a:xfrm>
-            <a:off x="6519672" y="2258568"/>
-            <a:ext cx="1828800" cy="292608"/>
+            <a:off x="365760" y="3273552"/>
+            <a:ext cx="1371600" cy="658368"/>
           </a:xfrm>
           <a:prstGeom prst="rect">
             <a:avLst>
-              <a:gd name="adj" fmla="val 25000"/>
+              <a:gd name="adj" fmla="val 8333"/>
             </a:avLst>
           </a:prstGeom>
           <a:solidFill>
-            <a:srgbClr val="FCE7F3"/>
-          </a:solidFill>
-          <a:ln w="19050">
-            <a:solidFill>
-              <a:srgbClr val="DB2777"/>
-            </a:solidFill>
-            <a:prstDash val="solid"/>
-          </a:ln>
-          <a:effectLst>
-            <a:outerShdw sx="100000" sy="100000" kx="0" ky="0" algn="bl" rotWithShape="0" blurRad="101600" dist="38100" dir="8100000">
-              <a:srgbClr val="000000">
-                <a:alpha val="12000"/>
-              </a:srgbClr>
-            </a:outerShdw>
-          </a:effectLst>
+            <a:srgbClr val="E2E8F0"/>
+          </a:solidFill>
+          <a:ln w="12700">
+            <a:solidFill>
+              <a:srgbClr val="E2E8F0"/>
+            </a:solidFill>
+            <a:prstDash val="solid"/>
+          </a:ln>
         </p:spPr>
       </p:sp>
       <p:sp>
@@ -10568,86 +10337,47 @@
         </p:nvSpPr>
         <p:spPr>
           <a:xfrm>
-            <a:off x="6519672" y="2258568"/>
-            <a:ext cx="1828800" cy="292608"/>
-          </a:xfrm>
-          <a:prstGeom prst="rect">
-            <a:avLst/>
-          </a:prstGeom>
-          <a:noFill/>
-          <a:ln/>
-        </p:spPr>
-        <p:txBody>
-          <a:bodyPr wrap="square" lIns="0" tIns="0" rIns="0" bIns="0" rtlCol="0" anchor="ctr"/>
-          <a:lstStyle/>
-          <a:p>
-            <a:pPr algn="ctr" indent="0" marL="0">
-              <a:buNone/>
-            </a:pPr>
-            <a:r>
-              <a:rPr lang="en-US" sz="1300" b="1" dirty="0">
-                <a:solidFill>
-                  <a:srgbClr val="9D174D"/>
+            <a:off x="365760" y="3273552"/>
+            <a:ext cx="1371600" cy="658368"/>
+          </a:xfrm>
+          <a:prstGeom prst="rect">
+            <a:avLst/>
+          </a:prstGeom>
+          <a:noFill/>
+          <a:ln/>
+        </p:spPr>
+        <p:txBody>
+          <a:bodyPr wrap="square" lIns="0" tIns="0" rIns="0" bIns="0" rtlCol="0" anchor="ctr"/>
+          <a:lstStyle/>
+          <a:p>
+            <a:pPr algn="ctr" indent="0" marL="0">
+              <a:buNone/>
+            </a:pPr>
+            <a:r>
+              <a:rPr lang="en-US" sz="1100" b="1" dirty="0">
+                <a:solidFill>
+                  <a:srgbClr val="475569"/>
                 </a:solidFill>
                 <a:latin typeface="Trebuchet MS" pitchFamily="34" charset="0"/>
                 <a:ea typeface="Trebuchet MS" pitchFamily="34" charset="-122"/>
                 <a:cs typeface="Trebuchet MS" pitchFamily="34" charset="-120"/>
               </a:rPr>
-              <a:t>er</a:t>
-            </a:r>
-            <a:endParaRPr lang="en-US" sz="1300" dirty="0"/>
-          </a:p>
-        </p:txBody>
-      </p:sp>
-      <p:sp>
-        <p:nvSpPr>
-          <p:cNvPr id="25" name="Text 23"/>
-          <p:cNvSpPr/>
-          <p:nvPr/>
-        </p:nvSpPr>
-        <p:spPr>
-          <a:xfrm>
-            <a:off x="6519672" y="2569464"/>
-            <a:ext cx="1828800" cy="201168"/>
-          </a:xfrm>
-          <a:prstGeom prst="rect">
-            <a:avLst/>
-          </a:prstGeom>
-          <a:noFill/>
-          <a:ln/>
-        </p:spPr>
-        <p:txBody>
-          <a:bodyPr wrap="square" lIns="0" tIns="0" rIns="0" bIns="0" rtlCol="0" anchor="t"/>
-          <a:lstStyle/>
-          <a:p>
-            <a:pPr algn="ctr" indent="0" marL="0">
-              <a:buNone/>
-            </a:pPr>
-            <a:r>
-              <a:rPr lang="en-US" sz="850" dirty="0">
-                <a:solidFill>
-                  <a:srgbClr val="475569"/>
-                </a:solidFill>
-                <a:latin typeface="Calibri" pitchFamily="34" charset="0"/>
-                <a:ea typeface="Calibri" pitchFamily="34" charset="-122"/>
-                <a:cs typeface="Calibri" pitchFamily="34" charset="-120"/>
-              </a:rPr>
-              <a:t>a person who</a:t>
-            </a:r>
-            <a:endParaRPr lang="en-US" sz="850" dirty="0"/>
-          </a:p>
-        </p:txBody>
-      </p:sp>
-      <p:sp>
-        <p:nvSpPr>
-          <p:cNvPr id="26" name="Shape 24"/>
-          <p:cNvSpPr/>
-          <p:nvPr/>
-        </p:nvSpPr>
-        <p:spPr>
-          <a:xfrm>
-            <a:off x="365760" y="3273552"/>
-            <a:ext cx="1371600" cy="658368"/>
+              <a:t>Syllables</a:t>
+            </a:r>
+            <a:endParaRPr lang="en-US" sz="1100" dirty="0"/>
+          </a:p>
+        </p:txBody>
+      </p:sp>
+      <p:sp>
+        <p:nvSpPr>
+          <p:cNvPr id="25" name="Shape 23"/>
+          <p:cNvSpPr/>
+          <p:nvPr/>
+        </p:nvSpPr>
+        <p:spPr>
+          <a:xfrm>
+            <a:off x="1874520" y="3273552"/>
+            <a:ext cx="6903720" cy="658368"/>
           </a:xfrm>
           <a:prstGeom prst="rect">
             <a:avLst>
@@ -10655,11 +10385,38 @@
             </a:avLst>
           </a:prstGeom>
           <a:solidFill>
-            <a:srgbClr val="E2E8F0"/>
-          </a:solidFill>
-          <a:ln w="12700">
-            <a:solidFill>
-              <a:srgbClr val="E2E8F0"/>
+            <a:srgbClr val="CCFBF1"/>
+          </a:solidFill>
+          <a:ln w="12700">
+            <a:solidFill>
+              <a:srgbClr val="0D9488"/>
+            </a:solidFill>
+            <a:prstDash val="solid"/>
+          </a:ln>
+        </p:spPr>
+      </p:sp>
+      <p:sp>
+        <p:nvSpPr>
+          <p:cNvPr id="26" name="Shape 24"/>
+          <p:cNvSpPr/>
+          <p:nvPr/>
+        </p:nvSpPr>
+        <p:spPr>
+          <a:xfrm>
+            <a:off x="2313432" y="3364992"/>
+            <a:ext cx="1645920" cy="475488"/>
+          </a:xfrm>
+          <a:prstGeom prst="rect">
+            <a:avLst>
+              <a:gd name="adj" fmla="val 9615"/>
+            </a:avLst>
+          </a:prstGeom>
+          <a:solidFill>
+            <a:srgbClr val="FFFFFF"/>
+          </a:solidFill>
+          <a:ln w="12700">
+            <a:solidFill>
+              <a:srgbClr val="0D9488"/>
             </a:solidFill>
             <a:prstDash val="solid"/>
           </a:ln>
@@ -10673,32 +10430,308 @@
         </p:nvSpPr>
         <p:spPr>
           <a:xfrm>
-            <a:off x="365760" y="3273552"/>
-            <a:ext cx="1371600" cy="658368"/>
-          </a:xfrm>
-          <a:prstGeom prst="rect">
-            <a:avLst/>
-          </a:prstGeom>
-          <a:noFill/>
-          <a:ln/>
-        </p:spPr>
-        <p:txBody>
-          <a:bodyPr wrap="square" lIns="0" tIns="0" rIns="0" bIns="0" rtlCol="0" anchor="ctr"/>
-          <a:lstStyle/>
-          <a:p>
-            <a:pPr algn="ctr" indent="0" marL="0">
-              <a:buNone/>
-            </a:pPr>
-            <a:r>
-              <a:rPr lang="en-US" sz="1100" b="1" dirty="0">
-                <a:solidFill>
-                  <a:srgbClr val="475569"/>
+            <a:off x="2313432" y="3364992"/>
+            <a:ext cx="1645920" cy="475488"/>
+          </a:xfrm>
+          <a:prstGeom prst="rect">
+            <a:avLst/>
+          </a:prstGeom>
+          <a:noFill/>
+          <a:ln/>
+        </p:spPr>
+        <p:txBody>
+          <a:bodyPr wrap="square" lIns="0" tIns="0" rIns="0" bIns="0" rtlCol="0" anchor="ctr"/>
+          <a:lstStyle/>
+          <a:p>
+            <a:pPr algn="ctr" indent="0" marL="0">
+              <a:buNone/>
+            </a:pPr>
+            <a:r>
+              <a:rPr lang="en-US" sz="1400" b="1" dirty="0">
+                <a:solidFill>
+                  <a:srgbClr val="0D9488"/>
                 </a:solidFill>
                 <a:latin typeface="Trebuchet MS" pitchFamily="34" charset="0"/>
                 <a:ea typeface="Trebuchet MS" pitchFamily="34" charset="-122"/>
                 <a:cs typeface="Trebuchet MS" pitchFamily="34" charset="-120"/>
               </a:rPr>
-              <a:t>Syllables</a:t>
+              <a:t>ex</a:t>
+            </a:r>
+            <a:endParaRPr lang="en-US" sz="1400" dirty="0"/>
+          </a:p>
+        </p:txBody>
+      </p:sp>
+      <p:sp>
+        <p:nvSpPr>
+          <p:cNvPr id="28" name="Text 26"/>
+          <p:cNvSpPr/>
+          <p:nvPr/>
+        </p:nvSpPr>
+        <p:spPr>
+          <a:xfrm>
+            <a:off x="3959352" y="3364992"/>
+            <a:ext cx="411480" cy="475488"/>
+          </a:xfrm>
+          <a:prstGeom prst="rect">
+            <a:avLst/>
+          </a:prstGeom>
+          <a:noFill/>
+          <a:ln/>
+        </p:spPr>
+        <p:txBody>
+          <a:bodyPr wrap="square" lIns="0" tIns="0" rIns="0" bIns="0" rtlCol="0" anchor="ctr"/>
+          <a:lstStyle/>
+          <a:p>
+            <a:pPr algn="ctr" indent="0" marL="0">
+              <a:buNone/>
+            </a:pPr>
+            <a:r>
+              <a:rPr lang="en-US" sz="1600" b="1" dirty="0">
+                <a:solidFill>
+                  <a:srgbClr val="0D9488"/>
+                </a:solidFill>
+                <a:latin typeface="Trebuchet MS" pitchFamily="34" charset="0"/>
+                <a:ea typeface="Trebuchet MS" pitchFamily="34" charset="-122"/>
+                <a:cs typeface="Trebuchet MS" pitchFamily="34" charset="-120"/>
+              </a:rPr>
+              <a:t>·</a:t>
+            </a:r>
+            <a:endParaRPr lang="en-US" sz="1600" dirty="0"/>
+          </a:p>
+        </p:txBody>
+      </p:sp>
+      <p:sp>
+        <p:nvSpPr>
+          <p:cNvPr id="29" name="Shape 27"/>
+          <p:cNvSpPr/>
+          <p:nvPr/>
+        </p:nvSpPr>
+        <p:spPr>
+          <a:xfrm>
+            <a:off x="4370832" y="3364992"/>
+            <a:ext cx="1645920" cy="475488"/>
+          </a:xfrm>
+          <a:prstGeom prst="rect">
+            <a:avLst>
+              <a:gd name="adj" fmla="val 9615"/>
+            </a:avLst>
+          </a:prstGeom>
+          <a:solidFill>
+            <a:srgbClr val="FFFFFF"/>
+          </a:solidFill>
+          <a:ln w="12700">
+            <a:solidFill>
+              <a:srgbClr val="0D9488"/>
+            </a:solidFill>
+            <a:prstDash val="solid"/>
+          </a:ln>
+        </p:spPr>
+      </p:sp>
+      <p:sp>
+        <p:nvSpPr>
+          <p:cNvPr id="30" name="Text 28"/>
+          <p:cNvSpPr/>
+          <p:nvPr/>
+        </p:nvSpPr>
+        <p:spPr>
+          <a:xfrm>
+            <a:off x="4370832" y="3364992"/>
+            <a:ext cx="1645920" cy="475488"/>
+          </a:xfrm>
+          <a:prstGeom prst="rect">
+            <a:avLst/>
+          </a:prstGeom>
+          <a:noFill/>
+          <a:ln/>
+        </p:spPr>
+        <p:txBody>
+          <a:bodyPr wrap="square" lIns="0" tIns="0" rIns="0" bIns="0" rtlCol="0" anchor="ctr"/>
+          <a:lstStyle/>
+          <a:p>
+            <a:pPr algn="ctr" indent="0" marL="0">
+              <a:buNone/>
+            </a:pPr>
+            <a:r>
+              <a:rPr lang="en-US" sz="1400" b="1" dirty="0">
+                <a:solidFill>
+                  <a:srgbClr val="0D9488"/>
+                </a:solidFill>
+                <a:latin typeface="Trebuchet MS" pitchFamily="34" charset="0"/>
+                <a:ea typeface="Trebuchet MS" pitchFamily="34" charset="-122"/>
+                <a:cs typeface="Trebuchet MS" pitchFamily="34" charset="-120"/>
+              </a:rPr>
+              <a:t>plor</a:t>
+            </a:r>
+            <a:endParaRPr lang="en-US" sz="1400" dirty="0"/>
+          </a:p>
+        </p:txBody>
+      </p:sp>
+      <p:sp>
+        <p:nvSpPr>
+          <p:cNvPr id="31" name="Text 29"/>
+          <p:cNvSpPr/>
+          <p:nvPr/>
+        </p:nvSpPr>
+        <p:spPr>
+          <a:xfrm>
+            <a:off x="6016752" y="3364992"/>
+            <a:ext cx="411480" cy="475488"/>
+          </a:xfrm>
+          <a:prstGeom prst="rect">
+            <a:avLst/>
+          </a:prstGeom>
+          <a:noFill/>
+          <a:ln/>
+        </p:spPr>
+        <p:txBody>
+          <a:bodyPr wrap="square" lIns="0" tIns="0" rIns="0" bIns="0" rtlCol="0" anchor="ctr"/>
+          <a:lstStyle/>
+          <a:p>
+            <a:pPr algn="ctr" indent="0" marL="0">
+              <a:buNone/>
+            </a:pPr>
+            <a:r>
+              <a:rPr lang="en-US" sz="1600" b="1" dirty="0">
+                <a:solidFill>
+                  <a:srgbClr val="0D9488"/>
+                </a:solidFill>
+                <a:latin typeface="Trebuchet MS" pitchFamily="34" charset="0"/>
+                <a:ea typeface="Trebuchet MS" pitchFamily="34" charset="-122"/>
+                <a:cs typeface="Trebuchet MS" pitchFamily="34" charset="-120"/>
+              </a:rPr>
+              <a:t>·</a:t>
+            </a:r>
+            <a:endParaRPr lang="en-US" sz="1600" dirty="0"/>
+          </a:p>
+        </p:txBody>
+      </p:sp>
+      <p:sp>
+        <p:nvSpPr>
+          <p:cNvPr id="32" name="Shape 30"/>
+          <p:cNvSpPr/>
+          <p:nvPr/>
+        </p:nvSpPr>
+        <p:spPr>
+          <a:xfrm>
+            <a:off x="6428232" y="3364992"/>
+            <a:ext cx="1645920" cy="475488"/>
+          </a:xfrm>
+          <a:prstGeom prst="rect">
+            <a:avLst>
+              <a:gd name="adj" fmla="val 9615"/>
+            </a:avLst>
+          </a:prstGeom>
+          <a:solidFill>
+            <a:srgbClr val="FFFFFF"/>
+          </a:solidFill>
+          <a:ln w="12700">
+            <a:solidFill>
+              <a:srgbClr val="0D9488"/>
+            </a:solidFill>
+            <a:prstDash val="solid"/>
+          </a:ln>
+        </p:spPr>
+      </p:sp>
+      <p:sp>
+        <p:nvSpPr>
+          <p:cNvPr id="33" name="Text 31"/>
+          <p:cNvSpPr/>
+          <p:nvPr/>
+        </p:nvSpPr>
+        <p:spPr>
+          <a:xfrm>
+            <a:off x="6428232" y="3364992"/>
+            <a:ext cx="1645920" cy="475488"/>
+          </a:xfrm>
+          <a:prstGeom prst="rect">
+            <a:avLst/>
+          </a:prstGeom>
+          <a:noFill/>
+          <a:ln/>
+        </p:spPr>
+        <p:txBody>
+          <a:bodyPr wrap="square" lIns="0" tIns="0" rIns="0" bIns="0" rtlCol="0" anchor="ctr"/>
+          <a:lstStyle/>
+          <a:p>
+            <a:pPr algn="ctr" indent="0" marL="0">
+              <a:buNone/>
+            </a:pPr>
+            <a:r>
+              <a:rPr lang="en-US" sz="1400" b="1" dirty="0">
+                <a:solidFill>
+                  <a:srgbClr val="0D9488"/>
+                </a:solidFill>
+                <a:latin typeface="Trebuchet MS" pitchFamily="34" charset="0"/>
+                <a:ea typeface="Trebuchet MS" pitchFamily="34" charset="-122"/>
+                <a:cs typeface="Trebuchet MS" pitchFamily="34" charset="-120"/>
+              </a:rPr>
+              <a:t>er</a:t>
+            </a:r>
+            <a:endParaRPr lang="en-US" sz="1400" dirty="0"/>
+          </a:p>
+        </p:txBody>
+      </p:sp>
+      <p:sp>
+        <p:nvSpPr>
+          <p:cNvPr id="34" name="Shape 32"/>
+          <p:cNvSpPr/>
+          <p:nvPr/>
+        </p:nvSpPr>
+        <p:spPr>
+          <a:xfrm>
+            <a:off x="365760" y="4096512"/>
+            <a:ext cx="1371600" cy="804672"/>
+          </a:xfrm>
+          <a:prstGeom prst="rect">
+            <a:avLst>
+              <a:gd name="adj" fmla="val 6818"/>
+            </a:avLst>
+          </a:prstGeom>
+          <a:solidFill>
+            <a:srgbClr val="E2E8F0"/>
+          </a:solidFill>
+          <a:ln w="12700">
+            <a:solidFill>
+              <a:srgbClr val="E2E8F0"/>
+            </a:solidFill>
+            <a:prstDash val="solid"/>
+          </a:ln>
+        </p:spPr>
+      </p:sp>
+      <p:sp>
+        <p:nvSpPr>
+          <p:cNvPr id="35" name="Text 33"/>
+          <p:cNvSpPr/>
+          <p:nvPr/>
+        </p:nvSpPr>
+        <p:spPr>
+          <a:xfrm>
+            <a:off x="365760" y="4096512"/>
+            <a:ext cx="1371600" cy="804672"/>
+          </a:xfrm>
+          <a:prstGeom prst="rect">
+            <a:avLst/>
+          </a:prstGeom>
+          <a:noFill/>
+          <a:ln/>
+        </p:spPr>
+        <p:txBody>
+          <a:bodyPr wrap="square" lIns="0" tIns="0" rIns="0" bIns="0" rtlCol="0" anchor="ctr"/>
+          <a:lstStyle/>
+          <a:p>
+            <a:pPr algn="ctr" indent="0" marL="0">
+              <a:buNone/>
+            </a:pPr>
+            <a:r>
+              <a:rPr lang="en-US" sz="1100" b="1" dirty="0">
+                <a:solidFill>
+                  <a:srgbClr val="475569"/>
+                </a:solidFill>
+                <a:latin typeface="Trebuchet MS" pitchFamily="34" charset="0"/>
+                <a:ea typeface="Trebuchet MS" pitchFamily="34" charset="-122"/>
+                <a:cs typeface="Trebuchet MS" pitchFamily="34" charset="-120"/>
+              </a:rPr>
+              <a:t>Phonemes</a:t>
             </a:r>
             <a:endParaRPr lang="en-US" sz="1100" dirty="0"/>
           </a:p>
@@ -10706,13 +10739,13 @@
       </p:sp>
       <p:sp>
         <p:nvSpPr>
-          <p:cNvPr id="28" name="Shape 26"/>
-          <p:cNvSpPr/>
-          <p:nvPr/>
-        </p:nvSpPr>
-        <p:spPr>
-          <a:xfrm>
-            <a:off x="1874520" y="3273552"/>
+          <p:cNvPr id="36" name="Shape 34"/>
+          <p:cNvSpPr/>
+          <p:nvPr/>
+        </p:nvSpPr>
+        <p:spPr>
+          <a:xfrm>
+            <a:off x="1874520" y="4096512"/>
             <a:ext cx="6903720" cy="658368"/>
           </a:xfrm>
           <a:prstGeom prst="rect">
@@ -10721,30 +10754,30 @@
             </a:avLst>
           </a:prstGeom>
           <a:solidFill>
-            <a:srgbClr val="CCFBF1"/>
-          </a:solidFill>
-          <a:ln w="12700">
-            <a:solidFill>
-              <a:srgbClr val="0D9488"/>
-            </a:solidFill>
-            <a:prstDash val="solid"/>
-          </a:ln>
-        </p:spPr>
-      </p:sp>
-      <p:sp>
-        <p:nvSpPr>
-          <p:cNvPr id="29" name="Shape 27"/>
-          <p:cNvSpPr/>
-          <p:nvPr/>
-        </p:nvSpPr>
-        <p:spPr>
-          <a:xfrm>
-            <a:off x="2313432" y="3364992"/>
-            <a:ext cx="1645920" cy="475488"/>
+            <a:srgbClr val="FCE7F3"/>
+          </a:solidFill>
+          <a:ln w="12700">
+            <a:solidFill>
+              <a:srgbClr val="DB2777"/>
+            </a:solidFill>
+            <a:prstDash val="solid"/>
+          </a:ln>
+        </p:spPr>
+      </p:sp>
+      <p:sp>
+        <p:nvSpPr>
+          <p:cNvPr id="37" name="Shape 35"/>
+          <p:cNvSpPr/>
+          <p:nvPr/>
+        </p:nvSpPr>
+        <p:spPr>
+          <a:xfrm>
+            <a:off x="2427732" y="4169664"/>
+            <a:ext cx="685800" cy="475488"/>
           </a:xfrm>
           <a:prstGeom prst="rect">
             <a:avLst>
-              <a:gd name="adj" fmla="val 9615"/>
+              <a:gd name="adj" fmla="val 7692"/>
             </a:avLst>
           </a:prstGeom>
           <a:solidFill>
@@ -10752,104 +10785,131 @@
           </a:solidFill>
           <a:ln w="12700">
             <a:solidFill>
-              <a:srgbClr val="0D9488"/>
-            </a:solidFill>
-            <a:prstDash val="solid"/>
-          </a:ln>
-        </p:spPr>
-      </p:sp>
-      <p:sp>
-        <p:nvSpPr>
-          <p:cNvPr id="30" name="Text 28"/>
-          <p:cNvSpPr/>
-          <p:nvPr/>
-        </p:nvSpPr>
-        <p:spPr>
-          <a:xfrm>
-            <a:off x="2313432" y="3364992"/>
-            <a:ext cx="1645920" cy="475488"/>
-          </a:xfrm>
-          <a:prstGeom prst="rect">
-            <a:avLst/>
-          </a:prstGeom>
-          <a:noFill/>
-          <a:ln/>
-        </p:spPr>
-        <p:txBody>
-          <a:bodyPr wrap="square" lIns="0" tIns="0" rIns="0" bIns="0" rtlCol="0" anchor="ctr"/>
-          <a:lstStyle/>
-          <a:p>
-            <a:pPr algn="ctr" indent="0" marL="0">
-              <a:buNone/>
-            </a:pPr>
-            <a:r>
-              <a:rPr lang="en-US" sz="1400" b="1" dirty="0">
-                <a:solidFill>
-                  <a:srgbClr val="0D9488"/>
+              <a:srgbClr val="DB2777"/>
+            </a:solidFill>
+            <a:prstDash val="solid"/>
+          </a:ln>
+        </p:spPr>
+      </p:sp>
+      <p:sp>
+        <p:nvSpPr>
+          <p:cNvPr id="38" name="Text 36"/>
+          <p:cNvSpPr/>
+          <p:nvPr/>
+        </p:nvSpPr>
+        <p:spPr>
+          <a:xfrm>
+            <a:off x="2427732" y="4169664"/>
+            <a:ext cx="685800" cy="475488"/>
+          </a:xfrm>
+          <a:prstGeom prst="rect">
+            <a:avLst/>
+          </a:prstGeom>
+          <a:noFill/>
+          <a:ln/>
+        </p:spPr>
+        <p:txBody>
+          <a:bodyPr wrap="square" lIns="0" tIns="0" rIns="0" bIns="0" rtlCol="0" anchor="ctr"/>
+          <a:lstStyle/>
+          <a:p>
+            <a:pPr algn="ctr" indent="0" marL="0">
+              <a:buNone/>
+            </a:pPr>
+            <a:r>
+              <a:rPr lang="en-US" sz="900" b="1" dirty="0">
+                <a:solidFill>
+                  <a:srgbClr val="9D174D"/>
                 </a:solidFill>
                 <a:latin typeface="Trebuchet MS" pitchFamily="34" charset="0"/>
                 <a:ea typeface="Trebuchet MS" pitchFamily="34" charset="-122"/>
                 <a:cs typeface="Trebuchet MS" pitchFamily="34" charset="-120"/>
               </a:rPr>
-              <a:t>ex</a:t>
-            </a:r>
-            <a:endParaRPr lang="en-US" sz="1400" dirty="0"/>
-          </a:p>
-        </p:txBody>
-      </p:sp>
-      <p:sp>
-        <p:nvSpPr>
-          <p:cNvPr id="31" name="Text 29"/>
-          <p:cNvSpPr/>
-          <p:nvPr/>
-        </p:nvSpPr>
-        <p:spPr>
-          <a:xfrm>
-            <a:off x="3959352" y="3364992"/>
-            <a:ext cx="411480" cy="475488"/>
-          </a:xfrm>
-          <a:prstGeom prst="rect">
-            <a:avLst/>
-          </a:prstGeom>
-          <a:noFill/>
-          <a:ln/>
-        </p:spPr>
-        <p:txBody>
-          <a:bodyPr wrap="square" lIns="0" tIns="0" rIns="0" bIns="0" rtlCol="0" anchor="ctr"/>
-          <a:lstStyle/>
-          <a:p>
-            <a:pPr algn="ctr" indent="0" marL="0">
-              <a:buNone/>
-            </a:pPr>
-            <a:r>
-              <a:rPr lang="en-US" sz="1600" b="1" dirty="0">
-                <a:solidFill>
-                  <a:srgbClr val="0D9488"/>
+              <a:t>e</a:t>
+            </a:r>
+            <a:endParaRPr lang="en-US" sz="900" dirty="0"/>
+          </a:p>
+        </p:txBody>
+      </p:sp>
+      <p:sp>
+        <p:nvSpPr>
+          <p:cNvPr id="39" name="Shape 37"/>
+          <p:cNvSpPr/>
+          <p:nvPr/>
+        </p:nvSpPr>
+        <p:spPr>
+          <a:xfrm>
+            <a:off x="3639312" y="4169664"/>
+            <a:ext cx="685800" cy="475488"/>
+          </a:xfrm>
+          <a:prstGeom prst="rect">
+            <a:avLst>
+              <a:gd name="adj" fmla="val 7692"/>
+            </a:avLst>
+          </a:prstGeom>
+          <a:solidFill>
+            <a:srgbClr val="FFFFFF"/>
+          </a:solidFill>
+          <a:ln w="12700">
+            <a:solidFill>
+              <a:srgbClr val="DB2777"/>
+            </a:solidFill>
+            <a:prstDash val="solid"/>
+          </a:ln>
+        </p:spPr>
+      </p:sp>
+      <p:sp>
+        <p:nvSpPr>
+          <p:cNvPr id="40" name="Text 38"/>
+          <p:cNvSpPr/>
+          <p:nvPr/>
+        </p:nvSpPr>
+        <p:spPr>
+          <a:xfrm>
+            <a:off x="3639312" y="4169664"/>
+            <a:ext cx="685800" cy="475488"/>
+          </a:xfrm>
+          <a:prstGeom prst="rect">
+            <a:avLst/>
+          </a:prstGeom>
+          <a:noFill/>
+          <a:ln/>
+        </p:spPr>
+        <p:txBody>
+          <a:bodyPr wrap="square" lIns="0" tIns="0" rIns="0" bIns="0" rtlCol="0" anchor="ctr"/>
+          <a:lstStyle/>
+          <a:p>
+            <a:pPr algn="ctr" indent="0" marL="0">
+              <a:buNone/>
+            </a:pPr>
+            <a:r>
+              <a:rPr lang="en-US" sz="900" b="1" dirty="0">
+                <a:solidFill>
+                  <a:srgbClr val="9D174D"/>
                 </a:solidFill>
                 <a:latin typeface="Trebuchet MS" pitchFamily="34" charset="0"/>
                 <a:ea typeface="Trebuchet MS" pitchFamily="34" charset="-122"/>
                 <a:cs typeface="Trebuchet MS" pitchFamily="34" charset="-120"/>
               </a:rPr>
-              <a:t>·</a:t>
-            </a:r>
-            <a:endParaRPr lang="en-US" sz="1600" dirty="0"/>
-          </a:p>
-        </p:txBody>
-      </p:sp>
-      <p:sp>
-        <p:nvSpPr>
-          <p:cNvPr id="32" name="Shape 30"/>
-          <p:cNvSpPr/>
-          <p:nvPr/>
-        </p:nvSpPr>
-        <p:spPr>
-          <a:xfrm>
-            <a:off x="4370832" y="3364992"/>
-            <a:ext cx="1645920" cy="475488"/>
+              <a:t>x</a:t>
+            </a:r>
+            <a:endParaRPr lang="en-US" sz="900" dirty="0"/>
+          </a:p>
+        </p:txBody>
+      </p:sp>
+      <p:sp>
+        <p:nvSpPr>
+          <p:cNvPr id="41" name="Shape 39"/>
+          <p:cNvSpPr/>
+          <p:nvPr/>
+        </p:nvSpPr>
+        <p:spPr>
+          <a:xfrm>
+            <a:off x="4850892" y="4169664"/>
+            <a:ext cx="685800" cy="475488"/>
           </a:xfrm>
           <a:prstGeom prst="rect">
             <a:avLst>
-              <a:gd name="adj" fmla="val 9615"/>
+              <a:gd name="adj" fmla="val 7692"/>
             </a:avLst>
           </a:prstGeom>
           <a:solidFill>
@@ -10857,258 +10917,126 @@
           </a:solidFill>
           <a:ln w="12700">
             <a:solidFill>
-              <a:srgbClr val="0D9488"/>
-            </a:solidFill>
-            <a:prstDash val="solid"/>
-          </a:ln>
-        </p:spPr>
-      </p:sp>
-      <p:sp>
-        <p:nvSpPr>
-          <p:cNvPr id="33" name="Text 31"/>
-          <p:cNvSpPr/>
-          <p:nvPr/>
-        </p:nvSpPr>
-        <p:spPr>
-          <a:xfrm>
-            <a:off x="4370832" y="3364992"/>
-            <a:ext cx="1645920" cy="475488"/>
-          </a:xfrm>
-          <a:prstGeom prst="rect">
-            <a:avLst/>
-          </a:prstGeom>
-          <a:noFill/>
-          <a:ln/>
-        </p:spPr>
-        <p:txBody>
-          <a:bodyPr wrap="square" lIns="0" tIns="0" rIns="0" bIns="0" rtlCol="0" anchor="ctr"/>
-          <a:lstStyle/>
-          <a:p>
-            <a:pPr algn="ctr" indent="0" marL="0">
-              <a:buNone/>
-            </a:pPr>
-            <a:r>
-              <a:rPr lang="en-US" sz="1400" b="1" dirty="0">
-                <a:solidFill>
-                  <a:srgbClr val="0D9488"/>
+              <a:srgbClr val="DB2777"/>
+            </a:solidFill>
+            <a:prstDash val="solid"/>
+          </a:ln>
+        </p:spPr>
+      </p:sp>
+      <p:sp>
+        <p:nvSpPr>
+          <p:cNvPr id="42" name="Text 40"/>
+          <p:cNvSpPr/>
+          <p:nvPr/>
+        </p:nvSpPr>
+        <p:spPr>
+          <a:xfrm>
+            <a:off x="4850892" y="4169664"/>
+            <a:ext cx="685800" cy="475488"/>
+          </a:xfrm>
+          <a:prstGeom prst="rect">
+            <a:avLst/>
+          </a:prstGeom>
+          <a:noFill/>
+          <a:ln/>
+        </p:spPr>
+        <p:txBody>
+          <a:bodyPr wrap="square" lIns="0" tIns="0" rIns="0" bIns="0" rtlCol="0" anchor="ctr"/>
+          <a:lstStyle/>
+          <a:p>
+            <a:pPr algn="ctr" indent="0" marL="0">
+              <a:buNone/>
+            </a:pPr>
+            <a:r>
+              <a:rPr lang="en-US" sz="900" b="1" dirty="0">
+                <a:solidFill>
+                  <a:srgbClr val="9D174D"/>
                 </a:solidFill>
                 <a:latin typeface="Trebuchet MS" pitchFamily="34" charset="0"/>
                 <a:ea typeface="Trebuchet MS" pitchFamily="34" charset="-122"/>
                 <a:cs typeface="Trebuchet MS" pitchFamily="34" charset="-120"/>
               </a:rPr>
-              <a:t>plor</a:t>
-            </a:r>
-            <a:endParaRPr lang="en-US" sz="1400" dirty="0"/>
-          </a:p>
-        </p:txBody>
-      </p:sp>
-      <p:sp>
-        <p:nvSpPr>
-          <p:cNvPr id="34" name="Text 32"/>
-          <p:cNvSpPr/>
-          <p:nvPr/>
-        </p:nvSpPr>
-        <p:spPr>
-          <a:xfrm>
-            <a:off x="6016752" y="3364992"/>
-            <a:ext cx="411480" cy="475488"/>
-          </a:xfrm>
-          <a:prstGeom prst="rect">
-            <a:avLst/>
-          </a:prstGeom>
-          <a:noFill/>
-          <a:ln/>
-        </p:spPr>
-        <p:txBody>
-          <a:bodyPr wrap="square" lIns="0" tIns="0" rIns="0" bIns="0" rtlCol="0" anchor="ctr"/>
-          <a:lstStyle/>
-          <a:p>
-            <a:pPr algn="ctr" indent="0" marL="0">
-              <a:buNone/>
-            </a:pPr>
-            <a:r>
-              <a:rPr lang="en-US" sz="1600" b="1" dirty="0">
-                <a:solidFill>
-                  <a:srgbClr val="0D9488"/>
+              <a:t>pl</a:t>
+            </a:r>
+            <a:endParaRPr lang="en-US" sz="900" dirty="0"/>
+          </a:p>
+        </p:txBody>
+      </p:sp>
+      <p:sp>
+        <p:nvSpPr>
+          <p:cNvPr id="43" name="Shape 41"/>
+          <p:cNvSpPr/>
+          <p:nvPr/>
+        </p:nvSpPr>
+        <p:spPr>
+          <a:xfrm>
+            <a:off x="6062472" y="4169664"/>
+            <a:ext cx="685800" cy="475488"/>
+          </a:xfrm>
+          <a:prstGeom prst="rect">
+            <a:avLst>
+              <a:gd name="adj" fmla="val 7692"/>
+            </a:avLst>
+          </a:prstGeom>
+          <a:solidFill>
+            <a:srgbClr val="FFFFFF"/>
+          </a:solidFill>
+          <a:ln w="12700">
+            <a:solidFill>
+              <a:srgbClr val="DB2777"/>
+            </a:solidFill>
+            <a:prstDash val="solid"/>
+          </a:ln>
+        </p:spPr>
+      </p:sp>
+      <p:sp>
+        <p:nvSpPr>
+          <p:cNvPr id="44" name="Text 42"/>
+          <p:cNvSpPr/>
+          <p:nvPr/>
+        </p:nvSpPr>
+        <p:spPr>
+          <a:xfrm>
+            <a:off x="6062472" y="4169664"/>
+            <a:ext cx="685800" cy="475488"/>
+          </a:xfrm>
+          <a:prstGeom prst="rect">
+            <a:avLst/>
+          </a:prstGeom>
+          <a:noFill/>
+          <a:ln/>
+        </p:spPr>
+        <p:txBody>
+          <a:bodyPr wrap="square" lIns="0" tIns="0" rIns="0" bIns="0" rtlCol="0" anchor="ctr"/>
+          <a:lstStyle/>
+          <a:p>
+            <a:pPr algn="ctr" indent="0" marL="0">
+              <a:buNone/>
+            </a:pPr>
+            <a:r>
+              <a:rPr lang="en-US" sz="900" b="1" dirty="0">
+                <a:solidFill>
+                  <a:srgbClr val="9D174D"/>
                 </a:solidFill>
                 <a:latin typeface="Trebuchet MS" pitchFamily="34" charset="0"/>
                 <a:ea typeface="Trebuchet MS" pitchFamily="34" charset="-122"/>
                 <a:cs typeface="Trebuchet MS" pitchFamily="34" charset="-120"/>
               </a:rPr>
-              <a:t>·</a:t>
-            </a:r>
-            <a:endParaRPr lang="en-US" sz="1600" dirty="0"/>
-          </a:p>
-        </p:txBody>
-      </p:sp>
-      <p:sp>
-        <p:nvSpPr>
-          <p:cNvPr id="35" name="Shape 33"/>
-          <p:cNvSpPr/>
-          <p:nvPr/>
-        </p:nvSpPr>
-        <p:spPr>
-          <a:xfrm>
-            <a:off x="6428232" y="3364992"/>
-            <a:ext cx="1645920" cy="475488"/>
-          </a:xfrm>
-          <a:prstGeom prst="rect">
-            <a:avLst>
-              <a:gd name="adj" fmla="val 9615"/>
-            </a:avLst>
-          </a:prstGeom>
-          <a:solidFill>
-            <a:srgbClr val="FFFFFF"/>
-          </a:solidFill>
-          <a:ln w="12700">
-            <a:solidFill>
-              <a:srgbClr val="0D9488"/>
-            </a:solidFill>
-            <a:prstDash val="solid"/>
-          </a:ln>
-        </p:spPr>
-      </p:sp>
-      <p:sp>
-        <p:nvSpPr>
-          <p:cNvPr id="36" name="Text 34"/>
-          <p:cNvSpPr/>
-          <p:nvPr/>
-        </p:nvSpPr>
-        <p:spPr>
-          <a:xfrm>
-            <a:off x="6428232" y="3364992"/>
-            <a:ext cx="1645920" cy="475488"/>
-          </a:xfrm>
-          <a:prstGeom prst="rect">
-            <a:avLst/>
-          </a:prstGeom>
-          <a:noFill/>
-          <a:ln/>
-        </p:spPr>
-        <p:txBody>
-          <a:bodyPr wrap="square" lIns="0" tIns="0" rIns="0" bIns="0" rtlCol="0" anchor="ctr"/>
-          <a:lstStyle/>
-          <a:p>
-            <a:pPr algn="ctr" indent="0" marL="0">
-              <a:buNone/>
-            </a:pPr>
-            <a:r>
-              <a:rPr lang="en-US" sz="1400" b="1" dirty="0">
-                <a:solidFill>
-                  <a:srgbClr val="0D9488"/>
-                </a:solidFill>
-                <a:latin typeface="Trebuchet MS" pitchFamily="34" charset="0"/>
-                <a:ea typeface="Trebuchet MS" pitchFamily="34" charset="-122"/>
-                <a:cs typeface="Trebuchet MS" pitchFamily="34" charset="-120"/>
-              </a:rPr>
-              <a:t>er</a:t>
-            </a:r>
-            <a:endParaRPr lang="en-US" sz="1400" dirty="0"/>
-          </a:p>
-        </p:txBody>
-      </p:sp>
-      <p:sp>
-        <p:nvSpPr>
-          <p:cNvPr id="37" name="Shape 35"/>
-          <p:cNvSpPr/>
-          <p:nvPr/>
-        </p:nvSpPr>
-        <p:spPr>
-          <a:xfrm>
-            <a:off x="365760" y="4096512"/>
-            <a:ext cx="1371600" cy="804672"/>
-          </a:xfrm>
-          <a:prstGeom prst="rect">
-            <a:avLst>
-              <a:gd name="adj" fmla="val 6818"/>
-            </a:avLst>
-          </a:prstGeom>
-          <a:solidFill>
-            <a:srgbClr val="E2E8F0"/>
-          </a:solidFill>
-          <a:ln w="12700">
-            <a:solidFill>
-              <a:srgbClr val="E2E8F0"/>
-            </a:solidFill>
-            <a:prstDash val="solid"/>
-          </a:ln>
-        </p:spPr>
-      </p:sp>
-      <p:sp>
-        <p:nvSpPr>
-          <p:cNvPr id="38" name="Text 36"/>
-          <p:cNvSpPr/>
-          <p:nvPr/>
-        </p:nvSpPr>
-        <p:spPr>
-          <a:xfrm>
-            <a:off x="365760" y="4096512"/>
-            <a:ext cx="1371600" cy="804672"/>
-          </a:xfrm>
-          <a:prstGeom prst="rect">
-            <a:avLst/>
-          </a:prstGeom>
-          <a:noFill/>
-          <a:ln/>
-        </p:spPr>
-        <p:txBody>
-          <a:bodyPr wrap="square" lIns="0" tIns="0" rIns="0" bIns="0" rtlCol="0" anchor="ctr"/>
-          <a:lstStyle/>
-          <a:p>
-            <a:pPr algn="ctr" indent="0" marL="0">
-              <a:buNone/>
-            </a:pPr>
-            <a:r>
-              <a:rPr lang="en-US" sz="1100" b="1" dirty="0">
-                <a:solidFill>
-                  <a:srgbClr val="475569"/>
-                </a:solidFill>
-                <a:latin typeface="Trebuchet MS" pitchFamily="34" charset="0"/>
-                <a:ea typeface="Trebuchet MS" pitchFamily="34" charset="-122"/>
-                <a:cs typeface="Trebuchet MS" pitchFamily="34" charset="-120"/>
-              </a:rPr>
-              <a:t>Phonemes</a:t>
-            </a:r>
-            <a:endParaRPr lang="en-US" sz="1100" dirty="0"/>
-          </a:p>
-        </p:txBody>
-      </p:sp>
-      <p:sp>
-        <p:nvSpPr>
-          <p:cNvPr id="39" name="Shape 37"/>
-          <p:cNvSpPr/>
-          <p:nvPr/>
-        </p:nvSpPr>
-        <p:spPr>
-          <a:xfrm>
-            <a:off x="1874520" y="4096512"/>
-            <a:ext cx="6903720" cy="658368"/>
-          </a:xfrm>
-          <a:prstGeom prst="rect">
-            <a:avLst>
-              <a:gd name="adj" fmla="val 8333"/>
-            </a:avLst>
-          </a:prstGeom>
-          <a:solidFill>
-            <a:srgbClr val="FCE7F3"/>
-          </a:solidFill>
-          <a:ln w="12700">
-            <a:solidFill>
-              <a:srgbClr val="DB2777"/>
-            </a:solidFill>
-            <a:prstDash val="solid"/>
-          </a:ln>
-        </p:spPr>
-      </p:sp>
-      <p:sp>
-        <p:nvSpPr>
-          <p:cNvPr id="40" name="Shape 38"/>
-          <p:cNvSpPr/>
-          <p:nvPr/>
-        </p:nvSpPr>
-        <p:spPr>
-          <a:xfrm>
-            <a:off x="2254649" y="4169664"/>
+              <a:t>or</a:t>
+            </a:r>
+            <a:endParaRPr lang="en-US" sz="900" dirty="0"/>
+          </a:p>
+        </p:txBody>
+      </p:sp>
+      <p:sp>
+        <p:nvSpPr>
+          <p:cNvPr id="45" name="Shape 43"/>
+          <p:cNvSpPr/>
+          <p:nvPr/>
+        </p:nvSpPr>
+        <p:spPr>
+          <a:xfrm>
+            <a:off x="7274052" y="4169664"/>
             <a:ext cx="685800" cy="475488"/>
           </a:xfrm>
           <a:prstGeom prst="rect">
@@ -11129,343 +11057,13 @@
       </p:sp>
       <p:sp>
         <p:nvSpPr>
-          <p:cNvPr id="41" name="Text 39"/>
-          <p:cNvSpPr/>
-          <p:nvPr/>
-        </p:nvSpPr>
-        <p:spPr>
-          <a:xfrm>
-            <a:off x="2254649" y="4169664"/>
-            <a:ext cx="685800" cy="475488"/>
-          </a:xfrm>
-          <a:prstGeom prst="rect">
-            <a:avLst/>
-          </a:prstGeom>
-          <a:noFill/>
-          <a:ln/>
-        </p:spPr>
-        <p:txBody>
-          <a:bodyPr wrap="square" lIns="0" tIns="0" rIns="0" bIns="0" rtlCol="0" anchor="ctr"/>
-          <a:lstStyle/>
-          <a:p>
-            <a:pPr algn="ctr" indent="0" marL="0">
-              <a:buNone/>
-            </a:pPr>
-            <a:r>
-              <a:rPr lang="en-US" sz="900" b="1" dirty="0">
-                <a:solidFill>
-                  <a:srgbClr val="9D174D"/>
-                </a:solidFill>
-                <a:latin typeface="Trebuchet MS" pitchFamily="34" charset="0"/>
-                <a:ea typeface="Trebuchet MS" pitchFamily="34" charset="-122"/>
-                <a:cs typeface="Trebuchet MS" pitchFamily="34" charset="-120"/>
-              </a:rPr>
-              <a:t>e</a:t>
-            </a:r>
-            <a:endParaRPr lang="en-US" sz="900" dirty="0"/>
-          </a:p>
-        </p:txBody>
-      </p:sp>
-      <p:sp>
-        <p:nvSpPr>
-          <p:cNvPr id="42" name="Shape 40"/>
-          <p:cNvSpPr/>
-          <p:nvPr/>
-        </p:nvSpPr>
-        <p:spPr>
-          <a:xfrm>
-            <a:off x="3293146" y="4169664"/>
-            <a:ext cx="685800" cy="475488"/>
-          </a:xfrm>
-          <a:prstGeom prst="rect">
-            <a:avLst>
-              <a:gd name="adj" fmla="val 7692"/>
-            </a:avLst>
-          </a:prstGeom>
-          <a:solidFill>
-            <a:srgbClr val="FFFFFF"/>
-          </a:solidFill>
-          <a:ln w="12700">
-            <a:solidFill>
-              <a:srgbClr val="DB2777"/>
-            </a:solidFill>
-            <a:prstDash val="solid"/>
-          </a:ln>
-        </p:spPr>
-      </p:sp>
-      <p:sp>
-        <p:nvSpPr>
-          <p:cNvPr id="43" name="Text 41"/>
-          <p:cNvSpPr/>
-          <p:nvPr/>
-        </p:nvSpPr>
-        <p:spPr>
-          <a:xfrm>
-            <a:off x="3293146" y="4169664"/>
-            <a:ext cx="685800" cy="475488"/>
-          </a:xfrm>
-          <a:prstGeom prst="rect">
-            <a:avLst/>
-          </a:prstGeom>
-          <a:noFill/>
-          <a:ln/>
-        </p:spPr>
-        <p:txBody>
-          <a:bodyPr wrap="square" lIns="0" tIns="0" rIns="0" bIns="0" rtlCol="0" anchor="ctr"/>
-          <a:lstStyle/>
-          <a:p>
-            <a:pPr algn="ctr" indent="0" marL="0">
-              <a:buNone/>
-            </a:pPr>
-            <a:r>
-              <a:rPr lang="en-US" sz="900" b="1" dirty="0">
-                <a:solidFill>
-                  <a:srgbClr val="9D174D"/>
-                </a:solidFill>
-                <a:latin typeface="Trebuchet MS" pitchFamily="34" charset="0"/>
-                <a:ea typeface="Trebuchet MS" pitchFamily="34" charset="-122"/>
-                <a:cs typeface="Trebuchet MS" pitchFamily="34" charset="-120"/>
-              </a:rPr>
-              <a:t>x</a:t>
-            </a:r>
-            <a:endParaRPr lang="en-US" sz="900" dirty="0"/>
-          </a:p>
-        </p:txBody>
-      </p:sp>
-      <p:sp>
-        <p:nvSpPr>
-          <p:cNvPr id="44" name="Shape 42"/>
-          <p:cNvSpPr/>
-          <p:nvPr/>
-        </p:nvSpPr>
-        <p:spPr>
-          <a:xfrm>
-            <a:off x="4331643" y="4169664"/>
-            <a:ext cx="685800" cy="475488"/>
-          </a:xfrm>
-          <a:prstGeom prst="rect">
-            <a:avLst>
-              <a:gd name="adj" fmla="val 7692"/>
-            </a:avLst>
-          </a:prstGeom>
-          <a:solidFill>
-            <a:srgbClr val="FFFFFF"/>
-          </a:solidFill>
-          <a:ln w="12700">
-            <a:solidFill>
-              <a:srgbClr val="DB2777"/>
-            </a:solidFill>
-            <a:prstDash val="solid"/>
-          </a:ln>
-        </p:spPr>
-      </p:sp>
-      <p:sp>
-        <p:nvSpPr>
-          <p:cNvPr id="45" name="Text 43"/>
-          <p:cNvSpPr/>
-          <p:nvPr/>
-        </p:nvSpPr>
-        <p:spPr>
-          <a:xfrm>
-            <a:off x="4331643" y="4169664"/>
-            <a:ext cx="685800" cy="475488"/>
-          </a:xfrm>
-          <a:prstGeom prst="rect">
-            <a:avLst/>
-          </a:prstGeom>
-          <a:noFill/>
-          <a:ln/>
-        </p:spPr>
-        <p:txBody>
-          <a:bodyPr wrap="square" lIns="0" tIns="0" rIns="0" bIns="0" rtlCol="0" anchor="ctr"/>
-          <a:lstStyle/>
-          <a:p>
-            <a:pPr algn="ctr" indent="0" marL="0">
-              <a:buNone/>
-            </a:pPr>
-            <a:r>
-              <a:rPr lang="en-US" sz="900" b="1" dirty="0">
-                <a:solidFill>
-                  <a:srgbClr val="9D174D"/>
-                </a:solidFill>
-                <a:latin typeface="Trebuchet MS" pitchFamily="34" charset="0"/>
-                <a:ea typeface="Trebuchet MS" pitchFamily="34" charset="-122"/>
-                <a:cs typeface="Trebuchet MS" pitchFamily="34" charset="-120"/>
-              </a:rPr>
-              <a:t>p</a:t>
-            </a:r>
-            <a:endParaRPr lang="en-US" sz="900" dirty="0"/>
-          </a:p>
-        </p:txBody>
-      </p:sp>
-      <p:sp>
-        <p:nvSpPr>
-          <p:cNvPr id="46" name="Shape 44"/>
-          <p:cNvSpPr/>
-          <p:nvPr/>
-        </p:nvSpPr>
-        <p:spPr>
-          <a:xfrm>
-            <a:off x="5370141" y="4169664"/>
-            <a:ext cx="685800" cy="475488"/>
-          </a:xfrm>
-          <a:prstGeom prst="rect">
-            <a:avLst>
-              <a:gd name="adj" fmla="val 7692"/>
-            </a:avLst>
-          </a:prstGeom>
-          <a:solidFill>
-            <a:srgbClr val="FFFFFF"/>
-          </a:solidFill>
-          <a:ln w="12700">
-            <a:solidFill>
-              <a:srgbClr val="DB2777"/>
-            </a:solidFill>
-            <a:prstDash val="solid"/>
-          </a:ln>
-        </p:spPr>
-      </p:sp>
-      <p:sp>
-        <p:nvSpPr>
-          <p:cNvPr id="47" name="Text 45"/>
-          <p:cNvSpPr/>
-          <p:nvPr/>
-        </p:nvSpPr>
-        <p:spPr>
-          <a:xfrm>
-            <a:off x="5370141" y="4169664"/>
-            <a:ext cx="685800" cy="475488"/>
-          </a:xfrm>
-          <a:prstGeom prst="rect">
-            <a:avLst/>
-          </a:prstGeom>
-          <a:noFill/>
-          <a:ln/>
-        </p:spPr>
-        <p:txBody>
-          <a:bodyPr wrap="square" lIns="0" tIns="0" rIns="0" bIns="0" rtlCol="0" anchor="ctr"/>
-          <a:lstStyle/>
-          <a:p>
-            <a:pPr algn="ctr" indent="0" marL="0">
-              <a:buNone/>
-            </a:pPr>
-            <a:r>
-              <a:rPr lang="en-US" sz="900" b="1" dirty="0">
-                <a:solidFill>
-                  <a:srgbClr val="9D174D"/>
-                </a:solidFill>
-                <a:latin typeface="Trebuchet MS" pitchFamily="34" charset="0"/>
-                <a:ea typeface="Trebuchet MS" pitchFamily="34" charset="-122"/>
-                <a:cs typeface="Trebuchet MS" pitchFamily="34" charset="-120"/>
-              </a:rPr>
-              <a:t>l</a:t>
-            </a:r>
-            <a:endParaRPr lang="en-US" sz="900" dirty="0"/>
-          </a:p>
-        </p:txBody>
-      </p:sp>
-      <p:sp>
-        <p:nvSpPr>
-          <p:cNvPr id="48" name="Shape 46"/>
-          <p:cNvSpPr/>
-          <p:nvPr/>
-        </p:nvSpPr>
-        <p:spPr>
-          <a:xfrm>
-            <a:off x="6408638" y="4169664"/>
-            <a:ext cx="685800" cy="475488"/>
-          </a:xfrm>
-          <a:prstGeom prst="rect">
-            <a:avLst>
-              <a:gd name="adj" fmla="val 7692"/>
-            </a:avLst>
-          </a:prstGeom>
-          <a:solidFill>
-            <a:srgbClr val="FFFFFF"/>
-          </a:solidFill>
-          <a:ln w="12700">
-            <a:solidFill>
-              <a:srgbClr val="DB2777"/>
-            </a:solidFill>
-            <a:prstDash val="solid"/>
-          </a:ln>
-        </p:spPr>
-      </p:sp>
-      <p:sp>
-        <p:nvSpPr>
-          <p:cNvPr id="49" name="Text 47"/>
-          <p:cNvSpPr/>
-          <p:nvPr/>
-        </p:nvSpPr>
-        <p:spPr>
-          <a:xfrm>
-            <a:off x="6408638" y="4169664"/>
-            <a:ext cx="685800" cy="475488"/>
-          </a:xfrm>
-          <a:prstGeom prst="rect">
-            <a:avLst/>
-          </a:prstGeom>
-          <a:noFill/>
-          <a:ln/>
-        </p:spPr>
-        <p:txBody>
-          <a:bodyPr wrap="square" lIns="0" tIns="0" rIns="0" bIns="0" rtlCol="0" anchor="ctr"/>
-          <a:lstStyle/>
-          <a:p>
-            <a:pPr algn="ctr" indent="0" marL="0">
-              <a:buNone/>
-            </a:pPr>
-            <a:r>
-              <a:rPr lang="en-US" sz="900" b="1" dirty="0">
-                <a:solidFill>
-                  <a:srgbClr val="9D174D"/>
-                </a:solidFill>
-                <a:latin typeface="Trebuchet MS" pitchFamily="34" charset="0"/>
-                <a:ea typeface="Trebuchet MS" pitchFamily="34" charset="-122"/>
-                <a:cs typeface="Trebuchet MS" pitchFamily="34" charset="-120"/>
-              </a:rPr>
-              <a:t>or</a:t>
-            </a:r>
-            <a:endParaRPr lang="en-US" sz="900" dirty="0"/>
-          </a:p>
-        </p:txBody>
-      </p:sp>
-      <p:sp>
-        <p:nvSpPr>
-          <p:cNvPr id="50" name="Shape 48"/>
-          <p:cNvSpPr/>
-          <p:nvPr/>
-        </p:nvSpPr>
-        <p:spPr>
-          <a:xfrm>
-            <a:off x="7447135" y="4169664"/>
-            <a:ext cx="685800" cy="475488"/>
-          </a:xfrm>
-          <a:prstGeom prst="rect">
-            <a:avLst>
-              <a:gd name="adj" fmla="val 7692"/>
-            </a:avLst>
-          </a:prstGeom>
-          <a:solidFill>
-            <a:srgbClr val="FFFFFF"/>
-          </a:solidFill>
-          <a:ln w="12700">
-            <a:solidFill>
-              <a:srgbClr val="DB2777"/>
-            </a:solidFill>
-            <a:prstDash val="solid"/>
-          </a:ln>
-        </p:spPr>
-      </p:sp>
-      <p:sp>
-        <p:nvSpPr>
-          <p:cNvPr id="51" name="Text 49"/>
-          <p:cNvSpPr/>
-          <p:nvPr/>
-        </p:nvSpPr>
-        <p:spPr>
-          <a:xfrm>
-            <a:off x="7447135" y="4169664"/>
+          <p:cNvPr id="46" name="Text 44"/>
+          <p:cNvSpPr/>
+          <p:nvPr/>
+        </p:nvSpPr>
+        <p:spPr>
+          <a:xfrm>
+            <a:off x="7274052" y="4169664"/>
             <a:ext cx="685800" cy="475488"/>
           </a:xfrm>
           <a:prstGeom prst="rect">
@@ -11782,7 +11380,7 @@
                 <a:ea typeface="Calibri" pitchFamily="34" charset="-122"/>
                 <a:cs typeface="Calibri" pitchFamily="34" charset="-120"/>
               </a:rPr>
-              <a:t>Word Labs  •  wordlabs.app  •  Root: 'explore' = to search or travel through</a:t>
+              <a:t>Word Labs  •  wordlabs.app  •  Root: 'explore' = to search or discover new things</a:t>
             </a:r>
             <a:endParaRPr lang="en-US" sz="800" dirty="0"/>
           </a:p>
@@ -12609,7 +12207,7 @@
                 <a:ea typeface="Calibri" pitchFamily="34" charset="-122"/>
                 <a:cs typeface="Calibri" pitchFamily="34" charset="-120"/>
               </a:rPr>
-              <a:t>Word Labs  •  wordlabs.app  •  Root: 'explore' = to search or travel through</a:t>
+              <a:t>Word Labs  •  wordlabs.app  •  Root: 'explore' = to search or discover new things</a:t>
             </a:r>
             <a:endParaRPr lang="en-US" sz="800" dirty="0"/>
           </a:p>
@@ -12926,7 +12524,7 @@
                 <a:ea typeface="Calibri" pitchFamily="34" charset="-122"/>
                 <a:cs typeface="Calibri" pitchFamily="34" charset="-120"/>
               </a:rPr>
-              <a:t>to search or travel through</a:t>
+              <a:t>to search or discover</a:t>
             </a:r>
             <a:endParaRPr lang="en-US" sz="850" dirty="0"/>
           </a:p>
@@ -13077,7 +12675,7 @@
                 <a:ea typeface="Calibri" pitchFamily="34" charset="-122"/>
                 <a:cs typeface="Calibri" pitchFamily="34" charset="-120"/>
               </a:rPr>
-              <a:t>act or process of</a:t>
+              <a:t>the act or process of</a:t>
             </a:r>
             <a:endParaRPr lang="en-US" sz="850" dirty="0"/>
           </a:p>
@@ -13633,7 +13231,7 @@
                 <a:ea typeface="Calibri" pitchFamily="34" charset="-122"/>
                 <a:cs typeface="Calibri" pitchFamily="34" charset="-120"/>
               </a:rPr>
-              <a:t>Word Labs  •  wordlabs.app  •  Root: 'explore' = to search or travel through</a:t>
+              <a:t>Word Labs  •  wordlabs.app  •  Root: 'explore' = to search or discover new things</a:t>
             </a:r>
             <a:endParaRPr lang="en-US" sz="800" dirty="0"/>
           </a:p>
@@ -13950,7 +13548,7 @@
                 <a:ea typeface="Calibri" pitchFamily="34" charset="-122"/>
                 <a:cs typeface="Calibri" pitchFamily="34" charset="-120"/>
               </a:rPr>
-              <a:t>to search or travel through</a:t>
+              <a:t>to search or discover</a:t>
             </a:r>
             <a:endParaRPr lang="en-US" sz="850" dirty="0"/>
           </a:p>
@@ -14101,7 +13699,7 @@
                 <a:ea typeface="Calibri" pitchFamily="34" charset="-122"/>
                 <a:cs typeface="Calibri" pitchFamily="34" charset="-120"/>
               </a:rPr>
-              <a:t>act or process of</a:t>
+              <a:t>the act or process of</a:t>
             </a:r>
             <a:endParaRPr lang="en-US" sz="850" dirty="0"/>
           </a:p>
@@ -14908,7 +14506,7 @@
                 <a:ea typeface="Calibri" pitchFamily="34" charset="-122"/>
                 <a:cs typeface="Calibri" pitchFamily="34" charset="-120"/>
               </a:rPr>
-              <a:t>Root 'explore' — to search or travel through</a:t>
+              <a:t>Root 'explore' — to search or discover new things</a:t>
             </a:r>
             <a:endParaRPr lang="en-US" sz="1600" dirty="0"/>
           </a:p>
@@ -15264,7 +14862,7 @@
                 <a:ea typeface="Calibri" pitchFamily="34" charset="-122"/>
                 <a:cs typeface="Calibri" pitchFamily="34" charset="-120"/>
               </a:rPr>
-              <a:t>Word Labs  •  wordlabs.app  •  Root: 'explore' = to search or travel through</a:t>
+              <a:t>Word Labs  •  wordlabs.app  •  Root: 'explore' = to search or discover new things</a:t>
             </a:r>
             <a:endParaRPr lang="en-US" sz="800" dirty="0"/>
           </a:p>
@@ -15581,7 +15179,7 @@
                 <a:ea typeface="Calibri" pitchFamily="34" charset="-122"/>
                 <a:cs typeface="Calibri" pitchFamily="34" charset="-120"/>
               </a:rPr>
-              <a:t>to search or travel through</a:t>
+              <a:t>to search or discover</a:t>
             </a:r>
             <a:endParaRPr lang="en-US" sz="850" dirty="0"/>
           </a:p>
@@ -15732,7 +15330,7 @@
                 <a:ea typeface="Calibri" pitchFamily="34" charset="-122"/>
                 <a:cs typeface="Calibri" pitchFamily="34" charset="-120"/>
               </a:rPr>
-              <a:t>act or process of</a:t>
+              <a:t>the act or process of</a:t>
             </a:r>
             <a:endParaRPr lang="en-US" sz="850" dirty="0"/>
           </a:p>
@@ -16497,7 +16095,7 @@
                 <a:ea typeface="Trebuchet MS" pitchFamily="34" charset="-122"/>
                 <a:cs typeface="Trebuchet MS" pitchFamily="34" charset="-120"/>
               </a:rPr>
-              <a:t>p</a:t>
+              <a:t>pl</a:t>
             </a:r>
             <a:endParaRPr lang="en-US" sz="900" dirty="0"/>
           </a:p>
@@ -16563,7 +16161,7 @@
                 <a:ea typeface="Trebuchet MS" pitchFamily="34" charset="-122"/>
                 <a:cs typeface="Trebuchet MS" pitchFamily="34" charset="-120"/>
               </a:rPr>
-              <a:t>l</a:t>
+              <a:t>or</a:t>
             </a:r>
             <a:endParaRPr lang="en-US" sz="900" dirty="0"/>
           </a:p>
@@ -16629,7 +16227,7 @@
                 <a:ea typeface="Trebuchet MS" pitchFamily="34" charset="-122"/>
                 <a:cs typeface="Trebuchet MS" pitchFamily="34" charset="-120"/>
               </a:rPr>
-              <a:t>or</a:t>
+              <a:t>a</a:t>
             </a:r>
             <a:endParaRPr lang="en-US" sz="900" dirty="0"/>
           </a:p>
@@ -16695,7 +16293,7 @@
                 <a:ea typeface="Trebuchet MS" pitchFamily="34" charset="-122"/>
                 <a:cs typeface="Trebuchet MS" pitchFamily="34" charset="-120"/>
               </a:rPr>
-              <a:t>a</a:t>
+              <a:t>t</a:t>
             </a:r>
             <a:endParaRPr lang="en-US" sz="900" dirty="0"/>
           </a:p>
@@ -16703,7 +16301,46 @@
       </p:sp>
       <p:sp>
         <p:nvSpPr>
-          <p:cNvPr id="52" name="Shape 50"/>
+          <p:cNvPr id="52" name="Text 50"/>
+          <p:cNvSpPr/>
+          <p:nvPr/>
+        </p:nvSpPr>
+        <p:spPr>
+          <a:xfrm>
+            <a:off x="6062472" y="4572000"/>
+            <a:ext cx="685800" cy="219456"/>
+          </a:xfrm>
+          <a:prstGeom prst="rect">
+            <a:avLst/>
+          </a:prstGeom>
+          <a:noFill/>
+          <a:ln/>
+        </p:spPr>
+        <p:txBody>
+          <a:bodyPr wrap="square" lIns="0" tIns="0" rIns="0" bIns="0" rtlCol="0" anchor="t"/>
+          <a:lstStyle/>
+          <a:p>
+            <a:pPr algn="ctr" indent="0" marL="0">
+              <a:buNone/>
+            </a:pPr>
+            <a:r>
+              <a:rPr lang="en-US" sz="750" i="1" dirty="0">
+                <a:solidFill>
+                  <a:srgbClr val="94A3B8"/>
+                </a:solidFill>
+                <a:latin typeface="Calibri" pitchFamily="34" charset="0"/>
+                <a:ea typeface="Calibri" pitchFamily="34" charset="-122"/>
+                <a:cs typeface="Calibri" pitchFamily="34" charset="-120"/>
+              </a:rPr>
+              <a:t>/sh/</a:t>
+            </a:r>
+            <a:endParaRPr lang="en-US" sz="750" dirty="0"/>
+          </a:p>
+        </p:txBody>
+      </p:sp>
+      <p:sp>
+        <p:nvSpPr>
+          <p:cNvPr id="53" name="Shape 51"/>
           <p:cNvSpPr/>
           <p:nvPr/>
         </p:nvSpPr>
@@ -16730,7 +16367,7 @@
       </p:sp>
       <p:sp>
         <p:nvSpPr>
-          <p:cNvPr id="53" name="Text 51"/>
+          <p:cNvPr id="54" name="Text 52"/>
           <p:cNvSpPr/>
           <p:nvPr/>
         </p:nvSpPr>
@@ -16761,48 +16398,9 @@
                 <a:ea typeface="Trebuchet MS" pitchFamily="34" charset="-122"/>
                 <a:cs typeface="Trebuchet MS" pitchFamily="34" charset="-120"/>
               </a:rPr>
-              <a:t>ti</a:t>
+              <a:t>io</a:t>
             </a:r>
             <a:endParaRPr lang="en-US" sz="900" dirty="0"/>
-          </a:p>
-        </p:txBody>
-      </p:sp>
-      <p:sp>
-        <p:nvSpPr>
-          <p:cNvPr id="54" name="Text 52"/>
-          <p:cNvSpPr/>
-          <p:nvPr/>
-        </p:nvSpPr>
-        <p:spPr>
-          <a:xfrm>
-            <a:off x="6870192" y="4572000"/>
-            <a:ext cx="685800" cy="219456"/>
-          </a:xfrm>
-          <a:prstGeom prst="rect">
-            <a:avLst/>
-          </a:prstGeom>
-          <a:noFill/>
-          <a:ln/>
-        </p:spPr>
-        <p:txBody>
-          <a:bodyPr wrap="square" lIns="0" tIns="0" rIns="0" bIns="0" rtlCol="0" anchor="t"/>
-          <a:lstStyle/>
-          <a:p>
-            <a:pPr algn="ctr" indent="0" marL="0">
-              <a:buNone/>
-            </a:pPr>
-            <a:r>
-              <a:rPr lang="en-US" sz="750" i="1" dirty="0">
-                <a:solidFill>
-                  <a:srgbClr val="94A3B8"/>
-                </a:solidFill>
-                <a:latin typeface="Calibri" pitchFamily="34" charset="0"/>
-                <a:ea typeface="Calibri" pitchFamily="34" charset="-122"/>
-                <a:cs typeface="Calibri" pitchFamily="34" charset="-120"/>
-              </a:rPr>
-              <a:t>/sh/</a:t>
-            </a:r>
-            <a:endParaRPr lang="en-US" sz="750" dirty="0"/>
           </a:p>
         </p:txBody>
       </p:sp>
@@ -16866,7 +16464,7 @@
                 <a:ea typeface="Trebuchet MS" pitchFamily="34" charset="-122"/>
                 <a:cs typeface="Trebuchet MS" pitchFamily="34" charset="-120"/>
               </a:rPr>
-              <a:t>on</a:t>
+              <a:t>n</a:t>
             </a:r>
             <a:endParaRPr lang="en-US" sz="900" dirty="0"/>
           </a:p>
@@ -17440,7 +17038,7 @@
                 <a:ea typeface="Calibri" pitchFamily="34" charset="-122"/>
                 <a:cs typeface="Calibri" pitchFamily="34" charset="-120"/>
               </a:rPr>
-              <a:t>Word Labs  •  wordlabs.app  •  Root: 'explore' = to search or travel through</a:t>
+              <a:t>Word Labs  •  wordlabs.app  •  Root: 'explore' = to search or discover new things</a:t>
             </a:r>
             <a:endParaRPr lang="en-US" sz="800" dirty="0"/>
           </a:p>
@@ -18080,7 +17678,7 @@
                 <a:ea typeface="Calibri" pitchFamily="34" charset="-122"/>
                 <a:cs typeface="Calibri" pitchFamily="34" charset="-120"/>
               </a:rPr>
-              <a:t>Word Labs  •  wordlabs.app  •  Root: 'explore' = to search or travel through</a:t>
+              <a:t>Word Labs  •  wordlabs.app  •  Root: 'explore' = to search or discover new things</a:t>
             </a:r>
             <a:endParaRPr lang="en-US" sz="800" dirty="0"/>
           </a:p>
@@ -18192,7 +17790,7 @@
                 <a:ea typeface="Calibri" pitchFamily="34" charset="-122"/>
                 <a:cs typeface="Calibri" pitchFamily="34" charset="-120"/>
               </a:rPr>
-              <a:t>The </a:t>
+              <a:t>During their </a:t>
             </a:r>
             <a:pPr algn="l" indent="0" marL="0">
               <a:buNone/>
@@ -18223,7 +17821,7 @@
                 <a:ea typeface="Calibri" pitchFamily="34" charset="-122"/>
                 <a:cs typeface="Calibri" pitchFamily="34" charset="-120"/>
               </a:rPr>
-              <a:t> mission led the </a:t>
+              <a:t> mission, the team </a:t>
             </a:r>
             <a:pPr algn="l" indent="0" marL="0">
               <a:buNone/>
@@ -18240,7 +17838,7 @@
                 <a:ea typeface="Calibri" pitchFamily="34" charset="-122"/>
                 <a:cs typeface="Calibri" pitchFamily="34" charset="-120"/>
               </a:rPr>
-              <a:t>explorer</a:t>
+              <a:t>explored</a:t>
             </a:r>
             <a:pPr algn="l" indent="0" marL="0">
               <a:buNone/>
@@ -18254,7 +17852,7 @@
                 <a:ea typeface="Calibri" pitchFamily="34" charset="-122"/>
                 <a:cs typeface="Calibri" pitchFamily="34" charset="-120"/>
               </a:rPr>
-              <a:t> through </a:t>
+              <a:t> every </a:t>
             </a:r>
             <a:pPr algn="l" indent="0" marL="0">
               <a:buNone/>
@@ -18285,7 +17883,7 @@
                 <a:ea typeface="Calibri" pitchFamily="34" charset="-122"/>
                 <a:cs typeface="Calibri" pitchFamily="34" charset="-120"/>
               </a:rPr>
-              <a:t> jungle, where every step brought a new discovery!</a:t>
+              <a:t> cave in the valley.</a:t>
             </a:r>
             <a:endParaRPr lang="en-US" sz="1800" dirty="0"/>
           </a:p>
@@ -18568,7 +18166,7 @@
                 <a:ea typeface="Trebuchet MS" pitchFamily="34" charset="-122"/>
                 <a:cs typeface="Trebuchet MS" pitchFamily="34" charset="-120"/>
               </a:rPr>
-              <a:t>explorer</a:t>
+              <a:t>explored</a:t>
             </a:r>
             <a:endParaRPr lang="en-US" sz="1400" dirty="0"/>
           </a:p>
@@ -19027,7 +18625,7 @@
                 <a:ea typeface="Calibri" pitchFamily="34" charset="-122"/>
                 <a:cs typeface="Calibri" pitchFamily="34" charset="-120"/>
               </a:rPr>
-              <a:t>Word Labs  •  wordlabs.app  •  Root: 'explore' = to search or travel through</a:t>
+              <a:t>Word Labs  •  wordlabs.app  •  Root: 'explore' = to search or discover new things</a:t>
             </a:r>
             <a:endParaRPr lang="en-US" sz="800" dirty="0"/>
           </a:p>
@@ -19854,7 +19452,7 @@
                 <a:ea typeface="Calibri" pitchFamily="34" charset="-122"/>
                 <a:cs typeface="Calibri" pitchFamily="34" charset="-120"/>
               </a:rPr>
-              <a:t>Word Labs  •  wordlabs.app  •  Root: 'explore' = to search or travel through</a:t>
+              <a:t>Word Labs  •  wordlabs.app  •  Root: 'explore' = to search or discover new things</a:t>
             </a:r>
             <a:endParaRPr lang="en-US" sz="800" dirty="0"/>
           </a:p>
@@ -20171,7 +19769,7 @@
                 <a:ea typeface="Calibri" pitchFamily="34" charset="-122"/>
                 <a:cs typeface="Calibri" pitchFamily="34" charset="-120"/>
               </a:rPr>
-              <a:t>to search or travel through</a:t>
+              <a:t>to search or discover</a:t>
             </a:r>
             <a:endParaRPr lang="en-US" sz="850" dirty="0"/>
           </a:p>
@@ -20322,7 +19920,7 @@
                 <a:ea typeface="Calibri" pitchFamily="34" charset="-122"/>
                 <a:cs typeface="Calibri" pitchFamily="34" charset="-120"/>
               </a:rPr>
-              <a:t>relating to or serving for</a:t>
+              <a:t>relating to or serving the purpose of</a:t>
             </a:r>
             <a:endParaRPr lang="en-US" sz="850" dirty="0"/>
           </a:p>
@@ -20878,7 +20476,7 @@
                 <a:ea typeface="Calibri" pitchFamily="34" charset="-122"/>
                 <a:cs typeface="Calibri" pitchFamily="34" charset="-120"/>
               </a:rPr>
-              <a:t>Word Labs  •  wordlabs.app  •  Root: 'explore' = to search or travel through</a:t>
+              <a:t>Word Labs  •  wordlabs.app  •  Root: 'explore' = to search or discover new things</a:t>
             </a:r>
             <a:endParaRPr lang="en-US" sz="800" dirty="0"/>
           </a:p>
@@ -21195,7 +20793,7 @@
                 <a:ea typeface="Calibri" pitchFamily="34" charset="-122"/>
                 <a:cs typeface="Calibri" pitchFamily="34" charset="-120"/>
               </a:rPr>
-              <a:t>to search or travel through</a:t>
+              <a:t>to search or discover</a:t>
             </a:r>
             <a:endParaRPr lang="en-US" sz="850" dirty="0"/>
           </a:p>
@@ -21346,7 +20944,7 @@
                 <a:ea typeface="Calibri" pitchFamily="34" charset="-122"/>
                 <a:cs typeface="Calibri" pitchFamily="34" charset="-120"/>
               </a:rPr>
-              <a:t>relating to or serving for</a:t>
+              <a:t>relating to or serving the purpose of</a:t>
             </a:r>
             <a:endParaRPr lang="en-US" sz="850" dirty="0"/>
           </a:p>
@@ -22349,7 +21947,7 @@
                 <a:ea typeface="Calibri" pitchFamily="34" charset="-122"/>
                 <a:cs typeface="Calibri" pitchFamily="34" charset="-120"/>
               </a:rPr>
-              <a:t>Word Labs  •  wordlabs.app  •  Root: 'explore' = to search or travel through</a:t>
+              <a:t>Word Labs  •  wordlabs.app  •  Root: 'explore' = to search or discover new things</a:t>
             </a:r>
             <a:endParaRPr lang="en-US" sz="800" dirty="0"/>
           </a:p>
@@ -22666,7 +22264,7 @@
                 <a:ea typeface="Calibri" pitchFamily="34" charset="-122"/>
                 <a:cs typeface="Calibri" pitchFamily="34" charset="-120"/>
               </a:rPr>
-              <a:t>to search or travel through</a:t>
+              <a:t>to search or discover</a:t>
             </a:r>
             <a:endParaRPr lang="en-US" sz="850" dirty="0"/>
           </a:p>
@@ -22817,7 +22415,7 @@
                 <a:ea typeface="Calibri" pitchFamily="34" charset="-122"/>
                 <a:cs typeface="Calibri" pitchFamily="34" charset="-120"/>
               </a:rPr>
-              <a:t>relating to or serving for</a:t>
+              <a:t>relating to or serving the purpose of</a:t>
             </a:r>
             <a:endParaRPr lang="en-US" sz="850" dirty="0"/>
           </a:p>
@@ -23503,8 +23101,8 @@
         </p:nvSpPr>
         <p:spPr>
           <a:xfrm>
-            <a:off x="1951330" y="4169664"/>
-            <a:ext cx="676656" cy="475488"/>
+            <a:off x="2023872" y="4169664"/>
+            <a:ext cx="685800" cy="475488"/>
           </a:xfrm>
           <a:prstGeom prst="rect">
             <a:avLst>
@@ -23530,8 +23128,8 @@
         </p:nvSpPr>
         <p:spPr>
           <a:xfrm>
-            <a:off x="1951330" y="4169664"/>
-            <a:ext cx="676656" cy="475488"/>
+            <a:off x="2023872" y="4169664"/>
+            <a:ext cx="685800" cy="475488"/>
           </a:xfrm>
           <a:prstGeom prst="rect">
             <a:avLst/>
@@ -23569,8 +23167,8 @@
         </p:nvSpPr>
         <p:spPr>
           <a:xfrm>
-            <a:off x="2677363" y="4169664"/>
-            <a:ext cx="676656" cy="475488"/>
+            <a:off x="2831592" y="4169664"/>
+            <a:ext cx="685800" cy="475488"/>
           </a:xfrm>
           <a:prstGeom prst="rect">
             <a:avLst>
@@ -23596,8 +23194,8 @@
         </p:nvSpPr>
         <p:spPr>
           <a:xfrm>
-            <a:off x="2677363" y="4169664"/>
-            <a:ext cx="676656" cy="475488"/>
+            <a:off x="2831592" y="4169664"/>
+            <a:ext cx="685800" cy="475488"/>
           </a:xfrm>
           <a:prstGeom prst="rect">
             <a:avLst/>
@@ -23635,8 +23233,8 @@
         </p:nvSpPr>
         <p:spPr>
           <a:xfrm>
-            <a:off x="3403397" y="4169664"/>
-            <a:ext cx="676656" cy="475488"/>
+            <a:off x="3639312" y="4169664"/>
+            <a:ext cx="685800" cy="475488"/>
           </a:xfrm>
           <a:prstGeom prst="rect">
             <a:avLst>
@@ -23662,8 +23260,8 @@
         </p:nvSpPr>
         <p:spPr>
           <a:xfrm>
-            <a:off x="3403397" y="4169664"/>
-            <a:ext cx="676656" cy="475488"/>
+            <a:off x="3639312" y="4169664"/>
+            <a:ext cx="685800" cy="475488"/>
           </a:xfrm>
           <a:prstGeom prst="rect">
             <a:avLst/>
@@ -23687,7 +23285,7 @@
                 <a:ea typeface="Trebuchet MS" pitchFamily="34" charset="-122"/>
                 <a:cs typeface="Trebuchet MS" pitchFamily="34" charset="-120"/>
               </a:rPr>
-              <a:t>p</a:t>
+              <a:t>pl</a:t>
             </a:r>
             <a:endParaRPr lang="en-US" sz="900" dirty="0"/>
           </a:p>
@@ -23701,8 +23299,8 @@
         </p:nvSpPr>
         <p:spPr>
           <a:xfrm>
-            <a:off x="4129430" y="4169664"/>
-            <a:ext cx="676656" cy="475488"/>
+            <a:off x="4447032" y="4169664"/>
+            <a:ext cx="685800" cy="475488"/>
           </a:xfrm>
           <a:prstGeom prst="rect">
             <a:avLst>
@@ -23728,8 +23326,8 @@
         </p:nvSpPr>
         <p:spPr>
           <a:xfrm>
-            <a:off x="4129430" y="4169664"/>
-            <a:ext cx="676656" cy="475488"/>
+            <a:off x="4447032" y="4169664"/>
+            <a:ext cx="685800" cy="475488"/>
           </a:xfrm>
           <a:prstGeom prst="rect">
             <a:avLst/>
@@ -23753,7 +23351,7 @@
                 <a:ea typeface="Trebuchet MS" pitchFamily="34" charset="-122"/>
                 <a:cs typeface="Trebuchet MS" pitchFamily="34" charset="-120"/>
               </a:rPr>
-              <a:t>l</a:t>
+              <a:t>or</a:t>
             </a:r>
             <a:endParaRPr lang="en-US" sz="900" dirty="0"/>
           </a:p>
@@ -23767,8 +23365,8 @@
         </p:nvSpPr>
         <p:spPr>
           <a:xfrm>
-            <a:off x="4855464" y="4169664"/>
-            <a:ext cx="676656" cy="475488"/>
+            <a:off x="5254752" y="4169664"/>
+            <a:ext cx="685800" cy="475488"/>
           </a:xfrm>
           <a:prstGeom prst="rect">
             <a:avLst>
@@ -23794,8 +23392,8 @@
         </p:nvSpPr>
         <p:spPr>
           <a:xfrm>
-            <a:off x="4855464" y="4169664"/>
-            <a:ext cx="676656" cy="475488"/>
+            <a:off x="5254752" y="4169664"/>
+            <a:ext cx="685800" cy="475488"/>
           </a:xfrm>
           <a:prstGeom prst="rect">
             <a:avLst/>
@@ -23819,7 +23417,7 @@
                 <a:ea typeface="Trebuchet MS" pitchFamily="34" charset="-122"/>
                 <a:cs typeface="Trebuchet MS" pitchFamily="34" charset="-120"/>
               </a:rPr>
-              <a:t>or</a:t>
+              <a:t>a</a:t>
             </a:r>
             <a:endParaRPr lang="en-US" sz="900" dirty="0"/>
           </a:p>
@@ -23833,8 +23431,8 @@
         </p:nvSpPr>
         <p:spPr>
           <a:xfrm>
-            <a:off x="5581498" y="4169664"/>
-            <a:ext cx="676656" cy="475488"/>
+            <a:off x="6062472" y="4169664"/>
+            <a:ext cx="685800" cy="475488"/>
           </a:xfrm>
           <a:prstGeom prst="rect">
             <a:avLst>
@@ -23860,8 +23458,8 @@
         </p:nvSpPr>
         <p:spPr>
           <a:xfrm>
-            <a:off x="5581498" y="4169664"/>
-            <a:ext cx="676656" cy="475488"/>
+            <a:off x="6062472" y="4169664"/>
+            <a:ext cx="685800" cy="475488"/>
           </a:xfrm>
           <a:prstGeom prst="rect">
             <a:avLst/>
@@ -23885,7 +23483,7 @@
                 <a:ea typeface="Trebuchet MS" pitchFamily="34" charset="-122"/>
                 <a:cs typeface="Trebuchet MS" pitchFamily="34" charset="-120"/>
               </a:rPr>
-              <a:t>a</a:t>
+              <a:t>t</a:t>
             </a:r>
             <a:endParaRPr lang="en-US" sz="900" dirty="0"/>
           </a:p>
@@ -23899,8 +23497,8 @@
         </p:nvSpPr>
         <p:spPr>
           <a:xfrm>
-            <a:off x="6307531" y="4169664"/>
-            <a:ext cx="676656" cy="475488"/>
+            <a:off x="6870192" y="4169664"/>
+            <a:ext cx="685800" cy="475488"/>
           </a:xfrm>
           <a:prstGeom prst="rect">
             <a:avLst>
@@ -23926,8 +23524,8 @@
         </p:nvSpPr>
         <p:spPr>
           <a:xfrm>
-            <a:off x="6307531" y="4169664"/>
-            <a:ext cx="676656" cy="475488"/>
+            <a:off x="6870192" y="4169664"/>
+            <a:ext cx="685800" cy="475488"/>
           </a:xfrm>
           <a:prstGeom prst="rect">
             <a:avLst/>
@@ -23951,7 +23549,7 @@
                 <a:ea typeface="Trebuchet MS" pitchFamily="34" charset="-122"/>
                 <a:cs typeface="Trebuchet MS" pitchFamily="34" charset="-120"/>
               </a:rPr>
-              <a:t>t</a:t>
+              <a:t>or</a:t>
             </a:r>
             <a:endParaRPr lang="en-US" sz="900" dirty="0"/>
           </a:p>
@@ -23965,8 +23563,8 @@
         </p:nvSpPr>
         <p:spPr>
           <a:xfrm>
-            <a:off x="7033565" y="4169664"/>
-            <a:ext cx="676656" cy="475488"/>
+            <a:off x="7677912" y="4169664"/>
+            <a:ext cx="685800" cy="475488"/>
           </a:xfrm>
           <a:prstGeom prst="rect">
             <a:avLst>
@@ -23992,74 +23590,8 @@
         </p:nvSpPr>
         <p:spPr>
           <a:xfrm>
-            <a:off x="7033565" y="4169664"/>
-            <a:ext cx="676656" cy="475488"/>
-          </a:xfrm>
-          <a:prstGeom prst="rect">
-            <a:avLst/>
-          </a:prstGeom>
-          <a:noFill/>
-          <a:ln/>
-        </p:spPr>
-        <p:txBody>
-          <a:bodyPr wrap="square" lIns="0" tIns="0" rIns="0" bIns="0" rtlCol="0" anchor="ctr"/>
-          <a:lstStyle/>
-          <a:p>
-            <a:pPr algn="ctr" indent="0" marL="0">
-              <a:buNone/>
-            </a:pPr>
-            <a:r>
-              <a:rPr lang="en-US" sz="900" b="1" dirty="0">
-                <a:solidFill>
-                  <a:srgbClr val="9D174D"/>
-                </a:solidFill>
-                <a:latin typeface="Trebuchet MS" pitchFamily="34" charset="0"/>
-                <a:ea typeface="Trebuchet MS" pitchFamily="34" charset="-122"/>
-                <a:cs typeface="Trebuchet MS" pitchFamily="34" charset="-120"/>
-              </a:rPr>
-              <a:t>or</a:t>
-            </a:r>
-            <a:endParaRPr lang="en-US" sz="900" dirty="0"/>
-          </a:p>
-        </p:txBody>
-      </p:sp>
-      <p:sp>
-        <p:nvSpPr>
-          <p:cNvPr id="59" name="Shape 57"/>
-          <p:cNvSpPr/>
-          <p:nvPr/>
-        </p:nvSpPr>
-        <p:spPr>
-          <a:xfrm>
-            <a:off x="7759598" y="4169664"/>
-            <a:ext cx="676656" cy="475488"/>
-          </a:xfrm>
-          <a:prstGeom prst="rect">
-            <a:avLst>
-              <a:gd name="adj" fmla="val 7692"/>
-            </a:avLst>
-          </a:prstGeom>
-          <a:solidFill>
-            <a:srgbClr val="FFFFFF"/>
-          </a:solidFill>
-          <a:ln w="12700">
-            <a:solidFill>
-              <a:srgbClr val="DB2777"/>
-            </a:solidFill>
-            <a:prstDash val="solid"/>
-          </a:ln>
-        </p:spPr>
-      </p:sp>
-      <p:sp>
-        <p:nvSpPr>
-          <p:cNvPr id="60" name="Text 58"/>
-          <p:cNvSpPr/>
-          <p:nvPr/>
-        </p:nvSpPr>
-        <p:spPr>
-          <a:xfrm>
-            <a:off x="7759598" y="4169664"/>
-            <a:ext cx="676656" cy="475488"/>
+            <a:off x="7677912" y="4169664"/>
+            <a:ext cx="685800" cy="475488"/>
           </a:xfrm>
           <a:prstGeom prst="rect">
             <a:avLst/>
@@ -24375,7 +23907,7 @@
                 <a:ea typeface="Calibri" pitchFamily="34" charset="-122"/>
                 <a:cs typeface="Calibri" pitchFamily="34" charset="-120"/>
               </a:rPr>
-              <a:t>Word Labs  •  wordlabs.app  •  Root: 'explore' = to search or travel through</a:t>
+              <a:t>Word Labs  •  wordlabs.app  •  Root: 'explore' = to search or discover new things</a:t>
             </a:r>
             <a:endParaRPr lang="en-US" sz="800" dirty="0"/>
           </a:p>
@@ -24514,7 +24046,7 @@
                 <a:ea typeface="Trebuchet MS" pitchFamily="34" charset="-122"/>
                 <a:cs typeface="Trebuchet MS" pitchFamily="34" charset="-120"/>
               </a:rPr>
-              <a:t>explorer</a:t>
+              <a:t>explored</a:t>
             </a:r>
             <a:endParaRPr lang="en-US" sz="2800" dirty="0"/>
           </a:p>
@@ -25202,7 +24734,7 @@
                 <a:ea typeface="Calibri" pitchFamily="34" charset="-122"/>
                 <a:cs typeface="Calibri" pitchFamily="34" charset="-120"/>
               </a:rPr>
-              <a:t>Word Labs  •  wordlabs.app  •  Root: 'explore' = to search or travel through</a:t>
+              <a:t>Word Labs  •  wordlabs.app  •  Root: 'explore' = to search or discover new things</a:t>
             </a:r>
             <a:endParaRPr lang="en-US" sz="800" dirty="0"/>
           </a:p>
@@ -25341,7 +24873,7 @@
                 <a:ea typeface="Trebuchet MS" pitchFamily="34" charset="-122"/>
                 <a:cs typeface="Trebuchet MS" pitchFamily="34" charset="-120"/>
               </a:rPr>
-              <a:t>explorer</a:t>
+              <a:t>explored</a:t>
             </a:r>
             <a:endParaRPr lang="en-US" sz="2800" dirty="0"/>
           </a:p>
@@ -25519,7 +25051,7 @@
                 <a:ea typeface="Calibri" pitchFamily="34" charset="-122"/>
                 <a:cs typeface="Calibri" pitchFamily="34" charset="-120"/>
               </a:rPr>
-              <a:t>to search or travel through</a:t>
+              <a:t>to search or discover</a:t>
             </a:r>
             <a:endParaRPr lang="en-US" sz="850" dirty="0"/>
           </a:p>
@@ -25631,7 +25163,7 @@
                 <a:ea typeface="Trebuchet MS" pitchFamily="34" charset="-122"/>
                 <a:cs typeface="Trebuchet MS" pitchFamily="34" charset="-120"/>
               </a:rPr>
-              <a:t>er</a:t>
+              <a:t>ed</a:t>
             </a:r>
             <a:endParaRPr lang="en-US" sz="1300" dirty="0"/>
           </a:p>
@@ -25670,7 +25202,7 @@
                 <a:ea typeface="Calibri" pitchFamily="34" charset="-122"/>
                 <a:cs typeface="Calibri" pitchFamily="34" charset="-120"/>
               </a:rPr>
-              <a:t>a person who</a:t>
+              <a:t>happened in the past</a:t>
             </a:r>
             <a:endParaRPr lang="en-US" sz="850" dirty="0"/>
           </a:p>
@@ -26226,7 +25758,7 @@
                 <a:ea typeface="Calibri" pitchFamily="34" charset="-122"/>
                 <a:cs typeface="Calibri" pitchFamily="34" charset="-120"/>
               </a:rPr>
-              <a:t>Word Labs  •  wordlabs.app  •  Root: 'explore' = to search or travel through</a:t>
+              <a:t>Word Labs  •  wordlabs.app  •  Root: 'explore' = to search or discover new things</a:t>
             </a:r>
             <a:endParaRPr lang="en-US" sz="800" dirty="0"/>
           </a:p>
@@ -26299,7 +25831,7 @@
                 <a:ea typeface="Trebuchet MS" pitchFamily="34" charset="-122"/>
                 <a:cs typeface="Trebuchet MS" pitchFamily="34" charset="-120"/>
               </a:rPr>
-              <a:t>We are learning that the root 'explore' means 'to search or travel through'.</a:t>
+              <a:t>We are learning that the root 'explore' means 'to search or discover new things'.</a:t>
             </a:r>
             <a:endParaRPr lang="en-US" sz="2000" dirty="0"/>
           </a:p>
@@ -26945,7 +26477,7 @@
                 <a:ea typeface="Calibri" pitchFamily="34" charset="-122"/>
                 <a:cs typeface="Calibri" pitchFamily="34" charset="-120"/>
               </a:rPr>
-              <a:t>Word Labs  •  wordlabs.app  •  Root: 'explore' = to search or travel through</a:t>
+              <a:t>Word Labs  •  wordlabs.app  •  Root: 'explore' = to search or discover new things</a:t>
             </a:r>
             <a:endParaRPr lang="en-US" sz="800" dirty="0"/>
           </a:p>
@@ -27084,7 +26616,7 @@
                 <a:ea typeface="Trebuchet MS" pitchFamily="34" charset="-122"/>
                 <a:cs typeface="Trebuchet MS" pitchFamily="34" charset="-120"/>
               </a:rPr>
-              <a:t>explorer</a:t>
+              <a:t>explored</a:t>
             </a:r>
             <a:endParaRPr lang="en-US" sz="2800" dirty="0"/>
           </a:p>
@@ -27262,7 +26794,7 @@
                 <a:ea typeface="Calibri" pitchFamily="34" charset="-122"/>
                 <a:cs typeface="Calibri" pitchFamily="34" charset="-120"/>
               </a:rPr>
-              <a:t>to search or travel through</a:t>
+              <a:t>to search or discover</a:t>
             </a:r>
             <a:endParaRPr lang="en-US" sz="850" dirty="0"/>
           </a:p>
@@ -27374,7 +26906,7 @@
                 <a:ea typeface="Trebuchet MS" pitchFamily="34" charset="-122"/>
                 <a:cs typeface="Trebuchet MS" pitchFamily="34" charset="-120"/>
               </a:rPr>
-              <a:t>er</a:t>
+              <a:t>ed</a:t>
             </a:r>
             <a:endParaRPr lang="en-US" sz="1300" dirty="0"/>
           </a:p>
@@ -27413,7 +26945,7 @@
                 <a:ea typeface="Calibri" pitchFamily="34" charset="-122"/>
                 <a:cs typeface="Calibri" pitchFamily="34" charset="-120"/>
               </a:rPr>
-              <a:t>a person who</a:t>
+              <a:t>happened in the past</a:t>
             </a:r>
             <a:endParaRPr lang="en-US" sz="850" dirty="0"/>
           </a:p>
@@ -27520,7 +27052,7 @@
         </p:nvSpPr>
         <p:spPr>
           <a:xfrm>
-            <a:off x="2313432" y="3364992"/>
+            <a:off x="2999232" y="3364992"/>
             <a:ext cx="1645920" cy="475488"/>
           </a:xfrm>
           <a:prstGeom prst="rect">
@@ -27547,7 +27079,7 @@
         </p:nvSpPr>
         <p:spPr>
           <a:xfrm>
-            <a:off x="2313432" y="3364992"/>
+            <a:off x="2999232" y="3364992"/>
             <a:ext cx="1645920" cy="475488"/>
           </a:xfrm>
           <a:prstGeom prst="rect">
@@ -27586,8 +27118,8 @@
         </p:nvSpPr>
         <p:spPr>
           <a:xfrm>
-            <a:off x="3959352" y="3364992"/>
-            <a:ext cx="411480" cy="475488"/>
+            <a:off x="4645152" y="3364992"/>
+            <a:ext cx="1097280" cy="475488"/>
           </a:xfrm>
           <a:prstGeom prst="rect">
             <a:avLst/>
@@ -27625,7 +27157,7 @@
         </p:nvSpPr>
         <p:spPr>
           <a:xfrm>
-            <a:off x="4370832" y="3364992"/>
+            <a:off x="5742432" y="3364992"/>
             <a:ext cx="1645920" cy="475488"/>
           </a:xfrm>
           <a:prstGeom prst="rect">
@@ -27652,7 +27184,7 @@
         </p:nvSpPr>
         <p:spPr>
           <a:xfrm>
-            <a:off x="4370832" y="3364992"/>
+            <a:off x="5742432" y="3364992"/>
             <a:ext cx="1645920" cy="475488"/>
           </a:xfrm>
           <a:prstGeom prst="rect">
@@ -27677,7 +27209,7 @@
                 <a:ea typeface="Trebuchet MS" pitchFamily="34" charset="-122"/>
                 <a:cs typeface="Trebuchet MS" pitchFamily="34" charset="-120"/>
               </a:rPr>
-              <a:t>plor</a:t>
+              <a:t>plored</a:t>
             </a:r>
             <a:endParaRPr lang="en-US" sz="1400" dirty="0"/>
           </a:p>
@@ -27685,119 +27217,80 @@
       </p:sp>
       <p:sp>
         <p:nvSpPr>
-          <p:cNvPr id="31" name="Text 29"/>
-          <p:cNvSpPr/>
-          <p:nvPr/>
-        </p:nvSpPr>
-        <p:spPr>
-          <a:xfrm>
-            <a:off x="6016752" y="3364992"/>
-            <a:ext cx="411480" cy="475488"/>
-          </a:xfrm>
-          <a:prstGeom prst="rect">
-            <a:avLst/>
-          </a:prstGeom>
-          <a:noFill/>
-          <a:ln/>
-        </p:spPr>
-        <p:txBody>
-          <a:bodyPr wrap="square" lIns="0" tIns="0" rIns="0" bIns="0" rtlCol="0" anchor="ctr"/>
-          <a:lstStyle/>
-          <a:p>
-            <a:pPr algn="ctr" indent="0" marL="0">
-              <a:buNone/>
-            </a:pPr>
-            <a:r>
-              <a:rPr lang="en-US" sz="1600" b="1" dirty="0">
-                <a:solidFill>
-                  <a:srgbClr val="0D9488"/>
+          <p:cNvPr id="31" name="Shape 29"/>
+          <p:cNvSpPr/>
+          <p:nvPr/>
+        </p:nvSpPr>
+        <p:spPr>
+          <a:xfrm>
+            <a:off x="365760" y="4096512"/>
+            <a:ext cx="1371600" cy="804672"/>
+          </a:xfrm>
+          <a:prstGeom prst="rect">
+            <a:avLst>
+              <a:gd name="adj" fmla="val 6818"/>
+            </a:avLst>
+          </a:prstGeom>
+          <a:solidFill>
+            <a:srgbClr val="E2E8F0"/>
+          </a:solidFill>
+          <a:ln w="12700">
+            <a:solidFill>
+              <a:srgbClr val="E2E8F0"/>
+            </a:solidFill>
+            <a:prstDash val="solid"/>
+          </a:ln>
+        </p:spPr>
+      </p:sp>
+      <p:sp>
+        <p:nvSpPr>
+          <p:cNvPr id="32" name="Text 30"/>
+          <p:cNvSpPr/>
+          <p:nvPr/>
+        </p:nvSpPr>
+        <p:spPr>
+          <a:xfrm>
+            <a:off x="365760" y="4096512"/>
+            <a:ext cx="1371600" cy="804672"/>
+          </a:xfrm>
+          <a:prstGeom prst="rect">
+            <a:avLst/>
+          </a:prstGeom>
+          <a:noFill/>
+          <a:ln/>
+        </p:spPr>
+        <p:txBody>
+          <a:bodyPr wrap="square" lIns="0" tIns="0" rIns="0" bIns="0" rtlCol="0" anchor="ctr"/>
+          <a:lstStyle/>
+          <a:p>
+            <a:pPr algn="ctr" indent="0" marL="0">
+              <a:buNone/>
+            </a:pPr>
+            <a:r>
+              <a:rPr lang="en-US" sz="1100" b="1" dirty="0">
+                <a:solidFill>
+                  <a:srgbClr val="475569"/>
                 </a:solidFill>
                 <a:latin typeface="Trebuchet MS" pitchFamily="34" charset="0"/>
                 <a:ea typeface="Trebuchet MS" pitchFamily="34" charset="-122"/>
                 <a:cs typeface="Trebuchet MS" pitchFamily="34" charset="-120"/>
               </a:rPr>
-              <a:t>·</a:t>
-            </a:r>
-            <a:endParaRPr lang="en-US" sz="1600" dirty="0"/>
-          </a:p>
-        </p:txBody>
-      </p:sp>
-      <p:sp>
-        <p:nvSpPr>
-          <p:cNvPr id="32" name="Shape 30"/>
-          <p:cNvSpPr/>
-          <p:nvPr/>
-        </p:nvSpPr>
-        <p:spPr>
-          <a:xfrm>
-            <a:off x="6428232" y="3364992"/>
-            <a:ext cx="1645920" cy="475488"/>
-          </a:xfrm>
-          <a:prstGeom prst="rect">
-            <a:avLst>
-              <a:gd name="adj" fmla="val 9615"/>
-            </a:avLst>
-          </a:prstGeom>
-          <a:solidFill>
-            <a:srgbClr val="FFFFFF"/>
-          </a:solidFill>
-          <a:ln w="12700">
-            <a:solidFill>
-              <a:srgbClr val="0D9488"/>
-            </a:solidFill>
-            <a:prstDash val="solid"/>
-          </a:ln>
-        </p:spPr>
-      </p:sp>
-      <p:sp>
-        <p:nvSpPr>
-          <p:cNvPr id="33" name="Text 31"/>
-          <p:cNvSpPr/>
-          <p:nvPr/>
-        </p:nvSpPr>
-        <p:spPr>
-          <a:xfrm>
-            <a:off x="6428232" y="3364992"/>
-            <a:ext cx="1645920" cy="475488"/>
-          </a:xfrm>
-          <a:prstGeom prst="rect">
-            <a:avLst/>
-          </a:prstGeom>
-          <a:noFill/>
-          <a:ln/>
-        </p:spPr>
-        <p:txBody>
-          <a:bodyPr wrap="square" lIns="0" tIns="0" rIns="0" bIns="0" rtlCol="0" anchor="ctr"/>
-          <a:lstStyle/>
-          <a:p>
-            <a:pPr algn="ctr" indent="0" marL="0">
-              <a:buNone/>
-            </a:pPr>
-            <a:r>
-              <a:rPr lang="en-US" sz="1400" b="1" dirty="0">
-                <a:solidFill>
-                  <a:srgbClr val="0D9488"/>
-                </a:solidFill>
-                <a:latin typeface="Trebuchet MS" pitchFamily="34" charset="0"/>
-                <a:ea typeface="Trebuchet MS" pitchFamily="34" charset="-122"/>
-                <a:cs typeface="Trebuchet MS" pitchFamily="34" charset="-120"/>
-              </a:rPr>
-              <a:t>er</a:t>
-            </a:r>
-            <a:endParaRPr lang="en-US" sz="1400" dirty="0"/>
-          </a:p>
-        </p:txBody>
-      </p:sp>
-      <p:sp>
-        <p:nvSpPr>
-          <p:cNvPr id="34" name="Shape 32"/>
-          <p:cNvSpPr/>
-          <p:nvPr/>
-        </p:nvSpPr>
-        <p:spPr>
-          <a:xfrm>
-            <a:off x="365760" y="4096512"/>
-            <a:ext cx="1371600" cy="804672"/>
+              <a:t>Phonemes</a:t>
+            </a:r>
+            <a:endParaRPr lang="en-US" sz="1100" dirty="0"/>
+          </a:p>
+        </p:txBody>
+      </p:sp>
+      <p:sp>
+        <p:nvSpPr>
+          <p:cNvPr id="33" name="Shape 31"/>
+          <p:cNvSpPr/>
+          <p:nvPr/>
+        </p:nvSpPr>
+        <p:spPr>
+          <a:xfrm>
+            <a:off x="1874520" y="4096512"/>
+            <a:ext cx="6903720" cy="804672"/>
           </a:xfrm>
           <a:prstGeom prst="rect">
             <a:avLst>
@@ -27805,85 +27298,19 @@
             </a:avLst>
           </a:prstGeom>
           <a:solidFill>
-            <a:srgbClr val="E2E8F0"/>
+            <a:srgbClr val="F8FAFC"/>
           </a:solidFill>
           <a:ln w="12700">
             <a:solidFill>
               <a:srgbClr val="E2E8F0"/>
             </a:solidFill>
-            <a:prstDash val="solid"/>
-          </a:ln>
-        </p:spPr>
-      </p:sp>
-      <p:sp>
-        <p:nvSpPr>
-          <p:cNvPr id="35" name="Text 33"/>
-          <p:cNvSpPr/>
-          <p:nvPr/>
-        </p:nvSpPr>
-        <p:spPr>
-          <a:xfrm>
-            <a:off x="365760" y="4096512"/>
-            <a:ext cx="1371600" cy="804672"/>
-          </a:xfrm>
-          <a:prstGeom prst="rect">
-            <a:avLst/>
-          </a:prstGeom>
-          <a:noFill/>
-          <a:ln/>
-        </p:spPr>
-        <p:txBody>
-          <a:bodyPr wrap="square" lIns="0" tIns="0" rIns="0" bIns="0" rtlCol="0" anchor="ctr"/>
-          <a:lstStyle/>
-          <a:p>
-            <a:pPr algn="ctr" indent="0" marL="0">
-              <a:buNone/>
-            </a:pPr>
-            <a:r>
-              <a:rPr lang="en-US" sz="1100" b="1" dirty="0">
-                <a:solidFill>
-                  <a:srgbClr val="475569"/>
-                </a:solidFill>
-                <a:latin typeface="Trebuchet MS" pitchFamily="34" charset="0"/>
-                <a:ea typeface="Trebuchet MS" pitchFamily="34" charset="-122"/>
-                <a:cs typeface="Trebuchet MS" pitchFamily="34" charset="-120"/>
-              </a:rPr>
-              <a:t>Phonemes</a:t>
-            </a:r>
-            <a:endParaRPr lang="en-US" sz="1100" dirty="0"/>
-          </a:p>
-        </p:txBody>
-      </p:sp>
-      <p:sp>
-        <p:nvSpPr>
-          <p:cNvPr id="36" name="Shape 34"/>
-          <p:cNvSpPr/>
-          <p:nvPr/>
-        </p:nvSpPr>
-        <p:spPr>
-          <a:xfrm>
-            <a:off x="1874520" y="4096512"/>
-            <a:ext cx="6903720" cy="804672"/>
-          </a:xfrm>
-          <a:prstGeom prst="rect">
-            <a:avLst>
-              <a:gd name="adj" fmla="val 6818"/>
-            </a:avLst>
-          </a:prstGeom>
-          <a:solidFill>
-            <a:srgbClr val="F8FAFC"/>
-          </a:solidFill>
-          <a:ln w="12700">
-            <a:solidFill>
-              <a:srgbClr val="E2E8F0"/>
-            </a:solidFill>
             <a:prstDash val="dash"/>
           </a:ln>
         </p:spPr>
       </p:sp>
       <p:sp>
         <p:nvSpPr>
-          <p:cNvPr id="37" name="Text 35"/>
+          <p:cNvPr id="34" name="Text 32"/>
           <p:cNvSpPr/>
           <p:nvPr/>
         </p:nvSpPr>
@@ -28206,7 +27633,7 @@
                 <a:ea typeface="Calibri" pitchFamily="34" charset="-122"/>
                 <a:cs typeface="Calibri" pitchFamily="34" charset="-120"/>
               </a:rPr>
-              <a:t>Word Labs  •  wordlabs.app  •  Root: 'explore' = to search or travel through</a:t>
+              <a:t>Word Labs  •  wordlabs.app  •  Root: 'explore' = to search or discover new things</a:t>
             </a:r>
             <a:endParaRPr lang="en-US" sz="800" dirty="0"/>
           </a:p>
@@ -28345,7 +27772,7 @@
                 <a:ea typeface="Trebuchet MS" pitchFamily="34" charset="-122"/>
                 <a:cs typeface="Trebuchet MS" pitchFamily="34" charset="-120"/>
               </a:rPr>
-              <a:t>explorer</a:t>
+              <a:t>explored</a:t>
             </a:r>
             <a:endParaRPr lang="en-US" sz="2800" dirty="0"/>
           </a:p>
@@ -28523,7 +27950,7 @@
                 <a:ea typeface="Calibri" pitchFamily="34" charset="-122"/>
                 <a:cs typeface="Calibri" pitchFamily="34" charset="-120"/>
               </a:rPr>
-              <a:t>to search or travel through</a:t>
+              <a:t>to search or discover</a:t>
             </a:r>
             <a:endParaRPr lang="en-US" sz="850" dirty="0"/>
           </a:p>
@@ -28635,7 +28062,7 @@
                 <a:ea typeface="Trebuchet MS" pitchFamily="34" charset="-122"/>
                 <a:cs typeface="Trebuchet MS" pitchFamily="34" charset="-120"/>
               </a:rPr>
-              <a:t>er</a:t>
+              <a:t>ed</a:t>
             </a:r>
             <a:endParaRPr lang="en-US" sz="1300" dirty="0"/>
           </a:p>
@@ -28674,7 +28101,7 @@
                 <a:ea typeface="Calibri" pitchFamily="34" charset="-122"/>
                 <a:cs typeface="Calibri" pitchFamily="34" charset="-120"/>
               </a:rPr>
-              <a:t>a person who</a:t>
+              <a:t>happened in the past</a:t>
             </a:r>
             <a:endParaRPr lang="en-US" sz="850" dirty="0"/>
           </a:p>
@@ -28781,7 +28208,7 @@
         </p:nvSpPr>
         <p:spPr>
           <a:xfrm>
-            <a:off x="2313432" y="3364992"/>
+            <a:off x="2999232" y="3364992"/>
             <a:ext cx="1645920" cy="475488"/>
           </a:xfrm>
           <a:prstGeom prst="rect">
@@ -28808,7 +28235,7 @@
         </p:nvSpPr>
         <p:spPr>
           <a:xfrm>
-            <a:off x="2313432" y="3364992"/>
+            <a:off x="2999232" y="3364992"/>
             <a:ext cx="1645920" cy="475488"/>
           </a:xfrm>
           <a:prstGeom prst="rect">
@@ -28847,8 +28274,8 @@
         </p:nvSpPr>
         <p:spPr>
           <a:xfrm>
-            <a:off x="3959352" y="3364992"/>
-            <a:ext cx="411480" cy="475488"/>
+            <a:off x="4645152" y="3364992"/>
+            <a:ext cx="1097280" cy="475488"/>
           </a:xfrm>
           <a:prstGeom prst="rect">
             <a:avLst/>
@@ -28886,7 +28313,7 @@
         </p:nvSpPr>
         <p:spPr>
           <a:xfrm>
-            <a:off x="4370832" y="3364992"/>
+            <a:off x="5742432" y="3364992"/>
             <a:ext cx="1645920" cy="475488"/>
           </a:xfrm>
           <a:prstGeom prst="rect">
@@ -28913,7 +28340,7 @@
         </p:nvSpPr>
         <p:spPr>
           <a:xfrm>
-            <a:off x="4370832" y="3364992"/>
+            <a:off x="5742432" y="3364992"/>
             <a:ext cx="1645920" cy="475488"/>
           </a:xfrm>
           <a:prstGeom prst="rect">
@@ -28938,7 +28365,7 @@
                 <a:ea typeface="Trebuchet MS" pitchFamily="34" charset="-122"/>
                 <a:cs typeface="Trebuchet MS" pitchFamily="34" charset="-120"/>
               </a:rPr>
-              <a:t>plor</a:t>
+              <a:t>plored</a:t>
             </a:r>
             <a:endParaRPr lang="en-US" sz="1400" dirty="0"/>
           </a:p>
@@ -28946,211 +28373,238 @@
       </p:sp>
       <p:sp>
         <p:nvSpPr>
-          <p:cNvPr id="31" name="Text 29"/>
-          <p:cNvSpPr/>
-          <p:nvPr/>
-        </p:nvSpPr>
-        <p:spPr>
-          <a:xfrm>
-            <a:off x="6016752" y="3364992"/>
-            <a:ext cx="411480" cy="475488"/>
-          </a:xfrm>
-          <a:prstGeom prst="rect">
-            <a:avLst/>
-          </a:prstGeom>
-          <a:noFill/>
-          <a:ln/>
-        </p:spPr>
-        <p:txBody>
-          <a:bodyPr wrap="square" lIns="0" tIns="0" rIns="0" bIns="0" rtlCol="0" anchor="ctr"/>
-          <a:lstStyle/>
-          <a:p>
-            <a:pPr algn="ctr" indent="0" marL="0">
-              <a:buNone/>
-            </a:pPr>
-            <a:r>
-              <a:rPr lang="en-US" sz="1600" b="1" dirty="0">
-                <a:solidFill>
-                  <a:srgbClr val="0D9488"/>
+          <p:cNvPr id="31" name="Shape 29"/>
+          <p:cNvSpPr/>
+          <p:nvPr/>
+        </p:nvSpPr>
+        <p:spPr>
+          <a:xfrm>
+            <a:off x="365760" y="4096512"/>
+            <a:ext cx="1371600" cy="804672"/>
+          </a:xfrm>
+          <a:prstGeom prst="rect">
+            <a:avLst>
+              <a:gd name="adj" fmla="val 6818"/>
+            </a:avLst>
+          </a:prstGeom>
+          <a:solidFill>
+            <a:srgbClr val="E2E8F0"/>
+          </a:solidFill>
+          <a:ln w="12700">
+            <a:solidFill>
+              <a:srgbClr val="E2E8F0"/>
+            </a:solidFill>
+            <a:prstDash val="solid"/>
+          </a:ln>
+        </p:spPr>
+      </p:sp>
+      <p:sp>
+        <p:nvSpPr>
+          <p:cNvPr id="32" name="Text 30"/>
+          <p:cNvSpPr/>
+          <p:nvPr/>
+        </p:nvSpPr>
+        <p:spPr>
+          <a:xfrm>
+            <a:off x="365760" y="4096512"/>
+            <a:ext cx="1371600" cy="804672"/>
+          </a:xfrm>
+          <a:prstGeom prst="rect">
+            <a:avLst/>
+          </a:prstGeom>
+          <a:noFill/>
+          <a:ln/>
+        </p:spPr>
+        <p:txBody>
+          <a:bodyPr wrap="square" lIns="0" tIns="0" rIns="0" bIns="0" rtlCol="0" anchor="ctr"/>
+          <a:lstStyle/>
+          <a:p>
+            <a:pPr algn="ctr" indent="0" marL="0">
+              <a:buNone/>
+            </a:pPr>
+            <a:r>
+              <a:rPr lang="en-US" sz="1100" b="1" dirty="0">
+                <a:solidFill>
+                  <a:srgbClr val="475569"/>
                 </a:solidFill>
                 <a:latin typeface="Trebuchet MS" pitchFamily="34" charset="0"/>
                 <a:ea typeface="Trebuchet MS" pitchFamily="34" charset="-122"/>
                 <a:cs typeface="Trebuchet MS" pitchFamily="34" charset="-120"/>
               </a:rPr>
-              <a:t>·</a:t>
-            </a:r>
-            <a:endParaRPr lang="en-US" sz="1600" dirty="0"/>
-          </a:p>
-        </p:txBody>
-      </p:sp>
-      <p:sp>
-        <p:nvSpPr>
-          <p:cNvPr id="32" name="Shape 30"/>
-          <p:cNvSpPr/>
-          <p:nvPr/>
-        </p:nvSpPr>
-        <p:spPr>
-          <a:xfrm>
-            <a:off x="6428232" y="3364992"/>
-            <a:ext cx="1645920" cy="475488"/>
+              <a:t>Phonemes</a:t>
+            </a:r>
+            <a:endParaRPr lang="en-US" sz="1100" dirty="0"/>
+          </a:p>
+        </p:txBody>
+      </p:sp>
+      <p:sp>
+        <p:nvSpPr>
+          <p:cNvPr id="33" name="Shape 31"/>
+          <p:cNvSpPr/>
+          <p:nvPr/>
+        </p:nvSpPr>
+        <p:spPr>
+          <a:xfrm>
+            <a:off x="1874520" y="4096512"/>
+            <a:ext cx="6903720" cy="658368"/>
           </a:xfrm>
           <a:prstGeom prst="rect">
             <a:avLst>
-              <a:gd name="adj" fmla="val 9615"/>
+              <a:gd name="adj" fmla="val 8333"/>
             </a:avLst>
           </a:prstGeom>
           <a:solidFill>
+            <a:srgbClr val="FCE7F3"/>
+          </a:solidFill>
+          <a:ln w="12700">
+            <a:solidFill>
+              <a:srgbClr val="DB2777"/>
+            </a:solidFill>
+            <a:prstDash val="solid"/>
+          </a:ln>
+        </p:spPr>
+      </p:sp>
+      <p:sp>
+        <p:nvSpPr>
+          <p:cNvPr id="34" name="Shape 32"/>
+          <p:cNvSpPr/>
+          <p:nvPr/>
+        </p:nvSpPr>
+        <p:spPr>
+          <a:xfrm>
+            <a:off x="2427732" y="4169664"/>
+            <a:ext cx="685800" cy="475488"/>
+          </a:xfrm>
+          <a:prstGeom prst="rect">
+            <a:avLst>
+              <a:gd name="adj" fmla="val 7692"/>
+            </a:avLst>
+          </a:prstGeom>
+          <a:solidFill>
             <a:srgbClr val="FFFFFF"/>
           </a:solidFill>
           <a:ln w="12700">
             <a:solidFill>
-              <a:srgbClr val="0D9488"/>
-            </a:solidFill>
-            <a:prstDash val="solid"/>
-          </a:ln>
-        </p:spPr>
-      </p:sp>
-      <p:sp>
-        <p:nvSpPr>
-          <p:cNvPr id="33" name="Text 31"/>
-          <p:cNvSpPr/>
-          <p:nvPr/>
-        </p:nvSpPr>
-        <p:spPr>
-          <a:xfrm>
-            <a:off x="6428232" y="3364992"/>
-            <a:ext cx="1645920" cy="475488"/>
-          </a:xfrm>
-          <a:prstGeom prst="rect">
-            <a:avLst/>
-          </a:prstGeom>
-          <a:noFill/>
-          <a:ln/>
-        </p:spPr>
-        <p:txBody>
-          <a:bodyPr wrap="square" lIns="0" tIns="0" rIns="0" bIns="0" rtlCol="0" anchor="ctr"/>
-          <a:lstStyle/>
-          <a:p>
-            <a:pPr algn="ctr" indent="0" marL="0">
-              <a:buNone/>
-            </a:pPr>
-            <a:r>
-              <a:rPr lang="en-US" sz="1400" b="1" dirty="0">
-                <a:solidFill>
-                  <a:srgbClr val="0D9488"/>
+              <a:srgbClr val="DB2777"/>
+            </a:solidFill>
+            <a:prstDash val="solid"/>
+          </a:ln>
+        </p:spPr>
+      </p:sp>
+      <p:sp>
+        <p:nvSpPr>
+          <p:cNvPr id="35" name="Text 33"/>
+          <p:cNvSpPr/>
+          <p:nvPr/>
+        </p:nvSpPr>
+        <p:spPr>
+          <a:xfrm>
+            <a:off x="2427732" y="4169664"/>
+            <a:ext cx="685800" cy="475488"/>
+          </a:xfrm>
+          <a:prstGeom prst="rect">
+            <a:avLst/>
+          </a:prstGeom>
+          <a:noFill/>
+          <a:ln/>
+        </p:spPr>
+        <p:txBody>
+          <a:bodyPr wrap="square" lIns="0" tIns="0" rIns="0" bIns="0" rtlCol="0" anchor="ctr"/>
+          <a:lstStyle/>
+          <a:p>
+            <a:pPr algn="ctr" indent="0" marL="0">
+              <a:buNone/>
+            </a:pPr>
+            <a:r>
+              <a:rPr lang="en-US" sz="900" b="1" dirty="0">
+                <a:solidFill>
+                  <a:srgbClr val="9D174D"/>
                 </a:solidFill>
                 <a:latin typeface="Trebuchet MS" pitchFamily="34" charset="0"/>
                 <a:ea typeface="Trebuchet MS" pitchFamily="34" charset="-122"/>
                 <a:cs typeface="Trebuchet MS" pitchFamily="34" charset="-120"/>
               </a:rPr>
-              <a:t>er</a:t>
-            </a:r>
-            <a:endParaRPr lang="en-US" sz="1400" dirty="0"/>
-          </a:p>
-        </p:txBody>
-      </p:sp>
-      <p:sp>
-        <p:nvSpPr>
-          <p:cNvPr id="34" name="Shape 32"/>
-          <p:cNvSpPr/>
-          <p:nvPr/>
-        </p:nvSpPr>
-        <p:spPr>
-          <a:xfrm>
-            <a:off x="365760" y="4096512"/>
-            <a:ext cx="1371600" cy="804672"/>
+              <a:t>e</a:t>
+            </a:r>
+            <a:endParaRPr lang="en-US" sz="900" dirty="0"/>
+          </a:p>
+        </p:txBody>
+      </p:sp>
+      <p:sp>
+        <p:nvSpPr>
+          <p:cNvPr id="36" name="Shape 34"/>
+          <p:cNvSpPr/>
+          <p:nvPr/>
+        </p:nvSpPr>
+        <p:spPr>
+          <a:xfrm>
+            <a:off x="3639312" y="4169664"/>
+            <a:ext cx="685800" cy="475488"/>
           </a:xfrm>
           <a:prstGeom prst="rect">
             <a:avLst>
-              <a:gd name="adj" fmla="val 6818"/>
+              <a:gd name="adj" fmla="val 7692"/>
             </a:avLst>
           </a:prstGeom>
           <a:solidFill>
-            <a:srgbClr val="E2E8F0"/>
-          </a:solidFill>
-          <a:ln w="12700">
-            <a:solidFill>
-              <a:srgbClr val="E2E8F0"/>
-            </a:solidFill>
-            <a:prstDash val="solid"/>
-          </a:ln>
-        </p:spPr>
-      </p:sp>
-      <p:sp>
-        <p:nvSpPr>
-          <p:cNvPr id="35" name="Text 33"/>
-          <p:cNvSpPr/>
-          <p:nvPr/>
-        </p:nvSpPr>
-        <p:spPr>
-          <a:xfrm>
-            <a:off x="365760" y="4096512"/>
-            <a:ext cx="1371600" cy="804672"/>
-          </a:xfrm>
-          <a:prstGeom prst="rect">
-            <a:avLst/>
-          </a:prstGeom>
-          <a:noFill/>
-          <a:ln/>
-        </p:spPr>
-        <p:txBody>
-          <a:bodyPr wrap="square" lIns="0" tIns="0" rIns="0" bIns="0" rtlCol="0" anchor="ctr"/>
-          <a:lstStyle/>
-          <a:p>
-            <a:pPr algn="ctr" indent="0" marL="0">
-              <a:buNone/>
-            </a:pPr>
-            <a:r>
-              <a:rPr lang="en-US" sz="1100" b="1" dirty="0">
-                <a:solidFill>
-                  <a:srgbClr val="475569"/>
+            <a:srgbClr val="FFFFFF"/>
+          </a:solidFill>
+          <a:ln w="12700">
+            <a:solidFill>
+              <a:srgbClr val="DB2777"/>
+            </a:solidFill>
+            <a:prstDash val="solid"/>
+          </a:ln>
+        </p:spPr>
+      </p:sp>
+      <p:sp>
+        <p:nvSpPr>
+          <p:cNvPr id="37" name="Text 35"/>
+          <p:cNvSpPr/>
+          <p:nvPr/>
+        </p:nvSpPr>
+        <p:spPr>
+          <a:xfrm>
+            <a:off x="3639312" y="4169664"/>
+            <a:ext cx="685800" cy="475488"/>
+          </a:xfrm>
+          <a:prstGeom prst="rect">
+            <a:avLst/>
+          </a:prstGeom>
+          <a:noFill/>
+          <a:ln/>
+        </p:spPr>
+        <p:txBody>
+          <a:bodyPr wrap="square" lIns="0" tIns="0" rIns="0" bIns="0" rtlCol="0" anchor="ctr"/>
+          <a:lstStyle/>
+          <a:p>
+            <a:pPr algn="ctr" indent="0" marL="0">
+              <a:buNone/>
+            </a:pPr>
+            <a:r>
+              <a:rPr lang="en-US" sz="900" b="1" dirty="0">
+                <a:solidFill>
+                  <a:srgbClr val="9D174D"/>
                 </a:solidFill>
                 <a:latin typeface="Trebuchet MS" pitchFamily="34" charset="0"/>
                 <a:ea typeface="Trebuchet MS" pitchFamily="34" charset="-122"/>
                 <a:cs typeface="Trebuchet MS" pitchFamily="34" charset="-120"/>
               </a:rPr>
-              <a:t>Phonemes</a:t>
-            </a:r>
-            <a:endParaRPr lang="en-US" sz="1100" dirty="0"/>
-          </a:p>
-        </p:txBody>
-      </p:sp>
-      <p:sp>
-        <p:nvSpPr>
-          <p:cNvPr id="36" name="Shape 34"/>
-          <p:cNvSpPr/>
-          <p:nvPr/>
-        </p:nvSpPr>
-        <p:spPr>
-          <a:xfrm>
-            <a:off x="1874520" y="4096512"/>
-            <a:ext cx="6903720" cy="658368"/>
-          </a:xfrm>
-          <a:prstGeom prst="rect">
-            <a:avLst>
-              <a:gd name="adj" fmla="val 8333"/>
-            </a:avLst>
-          </a:prstGeom>
-          <a:solidFill>
-            <a:srgbClr val="FCE7F3"/>
-          </a:solidFill>
-          <a:ln w="12700">
-            <a:solidFill>
-              <a:srgbClr val="DB2777"/>
-            </a:solidFill>
-            <a:prstDash val="solid"/>
-          </a:ln>
-        </p:spPr>
-      </p:sp>
-      <p:sp>
-        <p:nvSpPr>
-          <p:cNvPr id="37" name="Shape 35"/>
-          <p:cNvSpPr/>
-          <p:nvPr/>
-        </p:nvSpPr>
-        <p:spPr>
-          <a:xfrm>
-            <a:off x="2254649" y="4169664"/>
+              <a:t>x</a:t>
+            </a:r>
+            <a:endParaRPr lang="en-US" sz="900" dirty="0"/>
+          </a:p>
+        </p:txBody>
+      </p:sp>
+      <p:sp>
+        <p:nvSpPr>
+          <p:cNvPr id="38" name="Shape 36"/>
+          <p:cNvSpPr/>
+          <p:nvPr/>
+        </p:nvSpPr>
+        <p:spPr>
+          <a:xfrm>
+            <a:off x="4850892" y="4169664"/>
             <a:ext cx="685800" cy="475488"/>
           </a:xfrm>
           <a:prstGeom prst="rect">
@@ -29171,13 +28625,13 @@
       </p:sp>
       <p:sp>
         <p:nvSpPr>
-          <p:cNvPr id="38" name="Text 36"/>
-          <p:cNvSpPr/>
-          <p:nvPr/>
-        </p:nvSpPr>
-        <p:spPr>
-          <a:xfrm>
-            <a:off x="2254649" y="4169664"/>
+          <p:cNvPr id="39" name="Text 37"/>
+          <p:cNvSpPr/>
+          <p:nvPr/>
+        </p:nvSpPr>
+        <p:spPr>
+          <a:xfrm>
+            <a:off x="4850892" y="4169664"/>
             <a:ext cx="685800" cy="475488"/>
           </a:xfrm>
           <a:prstGeom prst="rect">
@@ -29202,7 +28656,7 @@
                 <a:ea typeface="Trebuchet MS" pitchFamily="34" charset="-122"/>
                 <a:cs typeface="Trebuchet MS" pitchFamily="34" charset="-120"/>
               </a:rPr>
-              <a:t>e</a:t>
+              <a:t>pl</a:t>
             </a:r>
             <a:endParaRPr lang="en-US" sz="900" dirty="0"/>
           </a:p>
@@ -29210,13 +28664,13 @@
       </p:sp>
       <p:sp>
         <p:nvSpPr>
-          <p:cNvPr id="39" name="Shape 37"/>
-          <p:cNvSpPr/>
-          <p:nvPr/>
-        </p:nvSpPr>
-        <p:spPr>
-          <a:xfrm>
-            <a:off x="3293146" y="4169664"/>
+          <p:cNvPr id="40" name="Shape 38"/>
+          <p:cNvSpPr/>
+          <p:nvPr/>
+        </p:nvSpPr>
+        <p:spPr>
+          <a:xfrm>
+            <a:off x="6062472" y="4169664"/>
             <a:ext cx="685800" cy="475488"/>
           </a:xfrm>
           <a:prstGeom prst="rect">
@@ -29237,13 +28691,13 @@
       </p:sp>
       <p:sp>
         <p:nvSpPr>
-          <p:cNvPr id="40" name="Text 38"/>
-          <p:cNvSpPr/>
-          <p:nvPr/>
-        </p:nvSpPr>
-        <p:spPr>
-          <a:xfrm>
-            <a:off x="3293146" y="4169664"/>
+          <p:cNvPr id="41" name="Text 39"/>
+          <p:cNvSpPr/>
+          <p:nvPr/>
+        </p:nvSpPr>
+        <p:spPr>
+          <a:xfrm>
+            <a:off x="6062472" y="4169664"/>
             <a:ext cx="685800" cy="475488"/>
           </a:xfrm>
           <a:prstGeom prst="rect">
@@ -29268,7 +28722,7 @@
                 <a:ea typeface="Trebuchet MS" pitchFamily="34" charset="-122"/>
                 <a:cs typeface="Trebuchet MS" pitchFamily="34" charset="-120"/>
               </a:rPr>
-              <a:t>x</a:t>
+              <a:t>or</a:t>
             </a:r>
             <a:endParaRPr lang="en-US" sz="900" dirty="0"/>
           </a:p>
@@ -29276,13 +28730,13 @@
       </p:sp>
       <p:sp>
         <p:nvSpPr>
-          <p:cNvPr id="41" name="Shape 39"/>
-          <p:cNvSpPr/>
-          <p:nvPr/>
-        </p:nvSpPr>
-        <p:spPr>
-          <a:xfrm>
-            <a:off x="4331643" y="4169664"/>
+          <p:cNvPr id="42" name="Shape 40"/>
+          <p:cNvSpPr/>
+          <p:nvPr/>
+        </p:nvSpPr>
+        <p:spPr>
+          <a:xfrm>
+            <a:off x="7274052" y="4169664"/>
             <a:ext cx="685800" cy="475488"/>
           </a:xfrm>
           <a:prstGeom prst="rect">
@@ -29303,13 +28757,13 @@
       </p:sp>
       <p:sp>
         <p:nvSpPr>
-          <p:cNvPr id="42" name="Text 40"/>
-          <p:cNvSpPr/>
-          <p:nvPr/>
-        </p:nvSpPr>
-        <p:spPr>
-          <a:xfrm>
-            <a:off x="4331643" y="4169664"/>
+          <p:cNvPr id="43" name="Text 41"/>
+          <p:cNvSpPr/>
+          <p:nvPr/>
+        </p:nvSpPr>
+        <p:spPr>
+          <a:xfrm>
+            <a:off x="7274052" y="4169664"/>
             <a:ext cx="685800" cy="475488"/>
           </a:xfrm>
           <a:prstGeom prst="rect">
@@ -29334,205 +28788,7 @@
                 <a:ea typeface="Trebuchet MS" pitchFamily="34" charset="-122"/>
                 <a:cs typeface="Trebuchet MS" pitchFamily="34" charset="-120"/>
               </a:rPr>
-              <a:t>p</a:t>
-            </a:r>
-            <a:endParaRPr lang="en-US" sz="900" dirty="0"/>
-          </a:p>
-        </p:txBody>
-      </p:sp>
-      <p:sp>
-        <p:nvSpPr>
-          <p:cNvPr id="43" name="Shape 41"/>
-          <p:cNvSpPr/>
-          <p:nvPr/>
-        </p:nvSpPr>
-        <p:spPr>
-          <a:xfrm>
-            <a:off x="5370141" y="4169664"/>
-            <a:ext cx="685800" cy="475488"/>
-          </a:xfrm>
-          <a:prstGeom prst="rect">
-            <a:avLst>
-              <a:gd name="adj" fmla="val 7692"/>
-            </a:avLst>
-          </a:prstGeom>
-          <a:solidFill>
-            <a:srgbClr val="FFFFFF"/>
-          </a:solidFill>
-          <a:ln w="12700">
-            <a:solidFill>
-              <a:srgbClr val="DB2777"/>
-            </a:solidFill>
-            <a:prstDash val="solid"/>
-          </a:ln>
-        </p:spPr>
-      </p:sp>
-      <p:sp>
-        <p:nvSpPr>
-          <p:cNvPr id="44" name="Text 42"/>
-          <p:cNvSpPr/>
-          <p:nvPr/>
-        </p:nvSpPr>
-        <p:spPr>
-          <a:xfrm>
-            <a:off x="5370141" y="4169664"/>
-            <a:ext cx="685800" cy="475488"/>
-          </a:xfrm>
-          <a:prstGeom prst="rect">
-            <a:avLst/>
-          </a:prstGeom>
-          <a:noFill/>
-          <a:ln/>
-        </p:spPr>
-        <p:txBody>
-          <a:bodyPr wrap="square" lIns="0" tIns="0" rIns="0" bIns="0" rtlCol="0" anchor="ctr"/>
-          <a:lstStyle/>
-          <a:p>
-            <a:pPr algn="ctr" indent="0" marL="0">
-              <a:buNone/>
-            </a:pPr>
-            <a:r>
-              <a:rPr lang="en-US" sz="900" b="1" dirty="0">
-                <a:solidFill>
-                  <a:srgbClr val="9D174D"/>
-                </a:solidFill>
-                <a:latin typeface="Trebuchet MS" pitchFamily="34" charset="0"/>
-                <a:ea typeface="Trebuchet MS" pitchFamily="34" charset="-122"/>
-                <a:cs typeface="Trebuchet MS" pitchFamily="34" charset="-120"/>
-              </a:rPr>
-              <a:t>l</a:t>
-            </a:r>
-            <a:endParaRPr lang="en-US" sz="900" dirty="0"/>
-          </a:p>
-        </p:txBody>
-      </p:sp>
-      <p:sp>
-        <p:nvSpPr>
-          <p:cNvPr id="45" name="Shape 43"/>
-          <p:cNvSpPr/>
-          <p:nvPr/>
-        </p:nvSpPr>
-        <p:spPr>
-          <a:xfrm>
-            <a:off x="6408638" y="4169664"/>
-            <a:ext cx="685800" cy="475488"/>
-          </a:xfrm>
-          <a:prstGeom prst="rect">
-            <a:avLst>
-              <a:gd name="adj" fmla="val 7692"/>
-            </a:avLst>
-          </a:prstGeom>
-          <a:solidFill>
-            <a:srgbClr val="FFFFFF"/>
-          </a:solidFill>
-          <a:ln w="12700">
-            <a:solidFill>
-              <a:srgbClr val="DB2777"/>
-            </a:solidFill>
-            <a:prstDash val="solid"/>
-          </a:ln>
-        </p:spPr>
-      </p:sp>
-      <p:sp>
-        <p:nvSpPr>
-          <p:cNvPr id="46" name="Text 44"/>
-          <p:cNvSpPr/>
-          <p:nvPr/>
-        </p:nvSpPr>
-        <p:spPr>
-          <a:xfrm>
-            <a:off x="6408638" y="4169664"/>
-            <a:ext cx="685800" cy="475488"/>
-          </a:xfrm>
-          <a:prstGeom prst="rect">
-            <a:avLst/>
-          </a:prstGeom>
-          <a:noFill/>
-          <a:ln/>
-        </p:spPr>
-        <p:txBody>
-          <a:bodyPr wrap="square" lIns="0" tIns="0" rIns="0" bIns="0" rtlCol="0" anchor="ctr"/>
-          <a:lstStyle/>
-          <a:p>
-            <a:pPr algn="ctr" indent="0" marL="0">
-              <a:buNone/>
-            </a:pPr>
-            <a:r>
-              <a:rPr lang="en-US" sz="900" b="1" dirty="0">
-                <a:solidFill>
-                  <a:srgbClr val="9D174D"/>
-                </a:solidFill>
-                <a:latin typeface="Trebuchet MS" pitchFamily="34" charset="0"/>
-                <a:ea typeface="Trebuchet MS" pitchFamily="34" charset="-122"/>
-                <a:cs typeface="Trebuchet MS" pitchFamily="34" charset="-120"/>
-              </a:rPr>
-              <a:t>or</a:t>
-            </a:r>
-            <a:endParaRPr lang="en-US" sz="900" dirty="0"/>
-          </a:p>
-        </p:txBody>
-      </p:sp>
-      <p:sp>
-        <p:nvSpPr>
-          <p:cNvPr id="47" name="Shape 45"/>
-          <p:cNvSpPr/>
-          <p:nvPr/>
-        </p:nvSpPr>
-        <p:spPr>
-          <a:xfrm>
-            <a:off x="7447135" y="4169664"/>
-            <a:ext cx="685800" cy="475488"/>
-          </a:xfrm>
-          <a:prstGeom prst="rect">
-            <a:avLst>
-              <a:gd name="adj" fmla="val 7692"/>
-            </a:avLst>
-          </a:prstGeom>
-          <a:solidFill>
-            <a:srgbClr val="FFFFFF"/>
-          </a:solidFill>
-          <a:ln w="12700">
-            <a:solidFill>
-              <a:srgbClr val="DB2777"/>
-            </a:solidFill>
-            <a:prstDash val="solid"/>
-          </a:ln>
-        </p:spPr>
-      </p:sp>
-      <p:sp>
-        <p:nvSpPr>
-          <p:cNvPr id="48" name="Text 46"/>
-          <p:cNvSpPr/>
-          <p:nvPr/>
-        </p:nvSpPr>
-        <p:spPr>
-          <a:xfrm>
-            <a:off x="7447135" y="4169664"/>
-            <a:ext cx="685800" cy="475488"/>
-          </a:xfrm>
-          <a:prstGeom prst="rect">
-            <a:avLst/>
-          </a:prstGeom>
-          <a:noFill/>
-          <a:ln/>
-        </p:spPr>
-        <p:txBody>
-          <a:bodyPr wrap="square" lIns="0" tIns="0" rIns="0" bIns="0" rtlCol="0" anchor="ctr"/>
-          <a:lstStyle/>
-          <a:p>
-            <a:pPr algn="ctr" indent="0" marL="0">
-              <a:buNone/>
-            </a:pPr>
-            <a:r>
-              <a:rPr lang="en-US" sz="900" b="1" dirty="0">
-                <a:solidFill>
-                  <a:srgbClr val="9D174D"/>
-                </a:solidFill>
-                <a:latin typeface="Trebuchet MS" pitchFamily="34" charset="0"/>
-                <a:ea typeface="Trebuchet MS" pitchFamily="34" charset="-122"/>
-                <a:cs typeface="Trebuchet MS" pitchFamily="34" charset="-120"/>
-              </a:rPr>
-              <a:t>er</a:t>
+              <a:t>ed</a:t>
             </a:r>
             <a:endParaRPr lang="en-US" sz="900" dirty="0"/>
           </a:p>
@@ -29824,7 +29080,7 @@
                 <a:ea typeface="Calibri" pitchFamily="34" charset="-122"/>
                 <a:cs typeface="Calibri" pitchFamily="34" charset="-120"/>
               </a:rPr>
-              <a:t>Word Labs  •  wordlabs.app  •  Root: 'explore' = to search or travel through</a:t>
+              <a:t>Word Labs  •  wordlabs.app  •  Root: 'explore' = to search or discover new things</a:t>
             </a:r>
             <a:endParaRPr lang="en-US" sz="800" dirty="0"/>
           </a:p>
@@ -30651,7 +29907,7 @@
                 <a:ea typeface="Calibri" pitchFamily="34" charset="-122"/>
                 <a:cs typeface="Calibri" pitchFamily="34" charset="-120"/>
               </a:rPr>
-              <a:t>Word Labs  •  wordlabs.app  •  Root: 'explore' = to search or travel through</a:t>
+              <a:t>Word Labs  •  wordlabs.app  •  Root: 'explore' = to search or discover new things</a:t>
             </a:r>
             <a:endParaRPr lang="en-US" sz="800" dirty="0"/>
           </a:p>
@@ -31080,7 +30336,7 @@
                 <a:ea typeface="Calibri" pitchFamily="34" charset="-122"/>
                 <a:cs typeface="Calibri" pitchFamily="34" charset="-120"/>
               </a:rPr>
-              <a:t>to search or travel through</a:t>
+              <a:t>to search or discover</a:t>
             </a:r>
             <a:endParaRPr lang="en-US" sz="850" dirty="0"/>
           </a:p>
@@ -31231,7 +30487,7 @@
                 <a:ea typeface="Calibri" pitchFamily="34" charset="-122"/>
                 <a:cs typeface="Calibri" pitchFamily="34" charset="-120"/>
               </a:rPr>
-              <a:t>past tense or describing a state</a:t>
+              <a:t>happened in the past</a:t>
             </a:r>
             <a:endParaRPr lang="en-US" sz="850" dirty="0"/>
           </a:p>
@@ -31787,7 +31043,7 @@
                 <a:ea typeface="Calibri" pitchFamily="34" charset="-122"/>
                 <a:cs typeface="Calibri" pitchFamily="34" charset="-120"/>
               </a:rPr>
-              <a:t>Word Labs  •  wordlabs.app  •  Root: 'explore' = to search or travel through</a:t>
+              <a:t>Word Labs  •  wordlabs.app  •  Root: 'explore' = to search or discover new things</a:t>
             </a:r>
             <a:endParaRPr lang="en-US" sz="800" dirty="0"/>
           </a:p>
@@ -32216,7 +31472,7 @@
                 <a:ea typeface="Calibri" pitchFamily="34" charset="-122"/>
                 <a:cs typeface="Calibri" pitchFamily="34" charset="-120"/>
               </a:rPr>
-              <a:t>to search or travel through</a:t>
+              <a:t>to search or discover</a:t>
             </a:r>
             <a:endParaRPr lang="en-US" sz="850" dirty="0"/>
           </a:p>
@@ -32367,7 +31623,7 @@
                 <a:ea typeface="Calibri" pitchFamily="34" charset="-122"/>
                 <a:cs typeface="Calibri" pitchFamily="34" charset="-120"/>
               </a:rPr>
-              <a:t>past tense or describing a state</a:t>
+              <a:t>happened in the past</a:t>
             </a:r>
             <a:endParaRPr lang="en-US" sz="850" dirty="0"/>
           </a:p>
@@ -33160,7 +32416,7 @@
                 <a:ea typeface="Calibri" pitchFamily="34" charset="-122"/>
                 <a:cs typeface="Calibri" pitchFamily="34" charset="-120"/>
               </a:rPr>
-              <a:t>Word Labs  •  wordlabs.app  •  Root: 'explore' = to search or travel through</a:t>
+              <a:t>Word Labs  •  wordlabs.app  •  Root: 'explore' = to search or discover new things</a:t>
             </a:r>
             <a:endParaRPr lang="en-US" sz="800" dirty="0"/>
           </a:p>
@@ -33589,7 +32845,7 @@
                 <a:ea typeface="Calibri" pitchFamily="34" charset="-122"/>
                 <a:cs typeface="Calibri" pitchFamily="34" charset="-120"/>
               </a:rPr>
-              <a:t>to search or travel through</a:t>
+              <a:t>to search or discover</a:t>
             </a:r>
             <a:endParaRPr lang="en-US" sz="850" dirty="0"/>
           </a:p>
@@ -33740,7 +32996,7 @@
                 <a:ea typeface="Calibri" pitchFamily="34" charset="-122"/>
                 <a:cs typeface="Calibri" pitchFamily="34" charset="-120"/>
               </a:rPr>
-              <a:t>past tense or describing a state</a:t>
+              <a:t>happened in the past</a:t>
             </a:r>
             <a:endParaRPr lang="en-US" sz="850" dirty="0"/>
           </a:p>
@@ -34216,7 +33472,7 @@
         </p:nvSpPr>
         <p:spPr>
           <a:xfrm>
-            <a:off x="2023872" y="4169664"/>
+            <a:off x="2124837" y="4169664"/>
             <a:ext cx="685800" cy="475488"/>
           </a:xfrm>
           <a:prstGeom prst="rect">
@@ -34243,7 +33499,7 @@
         </p:nvSpPr>
         <p:spPr>
           <a:xfrm>
-            <a:off x="2023872" y="4169664"/>
+            <a:off x="2124837" y="4169664"/>
             <a:ext cx="685800" cy="475488"/>
           </a:xfrm>
           <a:prstGeom prst="rect">
@@ -34282,7 +33538,7 @@
         </p:nvSpPr>
         <p:spPr>
           <a:xfrm>
-            <a:off x="2831592" y="4169664"/>
+            <a:off x="3033522" y="4169664"/>
             <a:ext cx="685800" cy="475488"/>
           </a:xfrm>
           <a:prstGeom prst="rect">
@@ -34309,7 +33565,7 @@
         </p:nvSpPr>
         <p:spPr>
           <a:xfrm>
-            <a:off x="2831592" y="4169664"/>
+            <a:off x="3033522" y="4169664"/>
             <a:ext cx="685800" cy="475488"/>
           </a:xfrm>
           <a:prstGeom prst="rect">
@@ -34348,7 +33604,7 @@
         </p:nvSpPr>
         <p:spPr>
           <a:xfrm>
-            <a:off x="3639312" y="4169664"/>
+            <a:off x="3942207" y="4169664"/>
             <a:ext cx="685800" cy="475488"/>
           </a:xfrm>
           <a:prstGeom prst="rect">
@@ -34375,7 +33631,7 @@
         </p:nvSpPr>
         <p:spPr>
           <a:xfrm>
-            <a:off x="3639312" y="4169664"/>
+            <a:off x="3942207" y="4169664"/>
             <a:ext cx="685800" cy="475488"/>
           </a:xfrm>
           <a:prstGeom prst="rect">
@@ -34414,7 +33670,7 @@
         </p:nvSpPr>
         <p:spPr>
           <a:xfrm>
-            <a:off x="4447032" y="4169664"/>
+            <a:off x="4850892" y="4169664"/>
             <a:ext cx="685800" cy="475488"/>
           </a:xfrm>
           <a:prstGeom prst="rect">
@@ -34441,7 +33697,7 @@
         </p:nvSpPr>
         <p:spPr>
           <a:xfrm>
-            <a:off x="4447032" y="4169664"/>
+            <a:off x="4850892" y="4169664"/>
             <a:ext cx="685800" cy="475488"/>
           </a:xfrm>
           <a:prstGeom prst="rect">
@@ -34480,7 +33736,7 @@
         </p:nvSpPr>
         <p:spPr>
           <a:xfrm>
-            <a:off x="5254752" y="4169664"/>
+            <a:off x="5759577" y="4169664"/>
             <a:ext cx="685800" cy="475488"/>
           </a:xfrm>
           <a:prstGeom prst="rect">
@@ -34507,7 +33763,7 @@
         </p:nvSpPr>
         <p:spPr>
           <a:xfrm>
-            <a:off x="5254752" y="4169664"/>
+            <a:off x="5759577" y="4169664"/>
             <a:ext cx="685800" cy="475488"/>
           </a:xfrm>
           <a:prstGeom prst="rect">
@@ -34532,7 +33788,7 @@
                 <a:ea typeface="Trebuchet MS" pitchFamily="34" charset="-122"/>
                 <a:cs typeface="Trebuchet MS" pitchFamily="34" charset="-120"/>
               </a:rPr>
-              <a:t>p</a:t>
+              <a:t>pl</a:t>
             </a:r>
             <a:endParaRPr lang="en-US" sz="900" dirty="0"/>
           </a:p>
@@ -34546,7 +33802,7 @@
         </p:nvSpPr>
         <p:spPr>
           <a:xfrm>
-            <a:off x="6062472" y="4169664"/>
+            <a:off x="6668262" y="4169664"/>
             <a:ext cx="685800" cy="475488"/>
           </a:xfrm>
           <a:prstGeom prst="rect">
@@ -34573,7 +33829,7 @@
         </p:nvSpPr>
         <p:spPr>
           <a:xfrm>
-            <a:off x="6062472" y="4169664"/>
+            <a:off x="6668262" y="4169664"/>
             <a:ext cx="685800" cy="475488"/>
           </a:xfrm>
           <a:prstGeom prst="rect">
@@ -34598,7 +33854,7 @@
                 <a:ea typeface="Trebuchet MS" pitchFamily="34" charset="-122"/>
                 <a:cs typeface="Trebuchet MS" pitchFamily="34" charset="-120"/>
               </a:rPr>
-              <a:t>l</a:t>
+              <a:t>or</a:t>
             </a:r>
             <a:endParaRPr lang="en-US" sz="900" dirty="0"/>
           </a:p>
@@ -34612,7 +33868,7 @@
         </p:nvSpPr>
         <p:spPr>
           <a:xfrm>
-            <a:off x="6870192" y="4169664"/>
+            <a:off x="7576947" y="4169664"/>
             <a:ext cx="685800" cy="475488"/>
           </a:xfrm>
           <a:prstGeom prst="rect">
@@ -34639,73 +33895,7 @@
         </p:nvSpPr>
         <p:spPr>
           <a:xfrm>
-            <a:off x="6870192" y="4169664"/>
-            <a:ext cx="685800" cy="475488"/>
-          </a:xfrm>
-          <a:prstGeom prst="rect">
-            <a:avLst/>
-          </a:prstGeom>
-          <a:noFill/>
-          <a:ln/>
-        </p:spPr>
-        <p:txBody>
-          <a:bodyPr wrap="square" lIns="0" tIns="0" rIns="0" bIns="0" rtlCol="0" anchor="ctr"/>
-          <a:lstStyle/>
-          <a:p>
-            <a:pPr algn="ctr" indent="0" marL="0">
-              <a:buNone/>
-            </a:pPr>
-            <a:r>
-              <a:rPr lang="en-US" sz="900" b="1" dirty="0">
-                <a:solidFill>
-                  <a:srgbClr val="9D174D"/>
-                </a:solidFill>
-                <a:latin typeface="Trebuchet MS" pitchFamily="34" charset="0"/>
-                <a:ea typeface="Trebuchet MS" pitchFamily="34" charset="-122"/>
-                <a:cs typeface="Trebuchet MS" pitchFamily="34" charset="-120"/>
-              </a:rPr>
-              <a:t>or</a:t>
-            </a:r>
-            <a:endParaRPr lang="en-US" sz="900" dirty="0"/>
-          </a:p>
-        </p:txBody>
-      </p:sp>
-      <p:sp>
-        <p:nvSpPr>
-          <p:cNvPr id="54" name="Shape 52"/>
-          <p:cNvSpPr/>
-          <p:nvPr/>
-        </p:nvSpPr>
-        <p:spPr>
-          <a:xfrm>
-            <a:off x="7677912" y="4169664"/>
-            <a:ext cx="685800" cy="475488"/>
-          </a:xfrm>
-          <a:prstGeom prst="rect">
-            <a:avLst>
-              <a:gd name="adj" fmla="val 7692"/>
-            </a:avLst>
-          </a:prstGeom>
-          <a:solidFill>
-            <a:srgbClr val="FFFFFF"/>
-          </a:solidFill>
-          <a:ln w="12700">
-            <a:solidFill>
-              <a:srgbClr val="DB2777"/>
-            </a:solidFill>
-            <a:prstDash val="solid"/>
-          </a:ln>
-        </p:spPr>
-      </p:sp>
-      <p:sp>
-        <p:nvSpPr>
-          <p:cNvPr id="55" name="Text 53"/>
-          <p:cNvSpPr/>
-          <p:nvPr/>
-        </p:nvSpPr>
-        <p:spPr>
-          <a:xfrm>
-            <a:off x="7677912" y="4169664"/>
+            <a:off x="7576947" y="4169664"/>
             <a:ext cx="685800" cy="475488"/>
           </a:xfrm>
           <a:prstGeom prst="rect">
@@ -35022,7 +34212,7 @@
                 <a:ea typeface="Calibri" pitchFamily="34" charset="-122"/>
                 <a:cs typeface="Calibri" pitchFamily="34" charset="-120"/>
               </a:rPr>
-              <a:t>Word Labs  •  wordlabs.app  •  Root: 'explore' = to search or travel through</a:t>
+              <a:t>Word Labs  •  wordlabs.app  •  Root: 'explore' = to search or discover new things</a:t>
             </a:r>
             <a:endParaRPr lang="en-US" sz="800" dirty="0"/>
           </a:p>
@@ -36191,7 +35381,7 @@
                 <a:ea typeface="Calibri" pitchFamily="34" charset="-122"/>
                 <a:cs typeface="Calibri" pitchFamily="34" charset="-120"/>
               </a:rPr>
-              <a:t>Word Labs  •  wordlabs.app  •  Root: 'explore' = to search or travel through</a:t>
+              <a:t>Word Labs  •  wordlabs.app  •  Root: 'explore' = to search or discover new things</a:t>
             </a:r>
             <a:endParaRPr lang="en-US" sz="800" dirty="0"/>
           </a:p>
@@ -36990,7 +36180,7 @@
                 <a:ea typeface="Trebuchet MS" pitchFamily="34" charset="-122"/>
                 <a:cs typeface="Trebuchet MS" pitchFamily="34" charset="-120"/>
               </a:rPr>
-              <a:t>over-</a:t>
+              <a:t>pre-</a:t>
             </a:r>
             <a:endParaRPr lang="en-US" sz="1300" dirty="0"/>
           </a:p>
@@ -37143,7 +36333,7 @@
                 <a:ea typeface="Trebuchet MS" pitchFamily="34" charset="-122"/>
                 <a:cs typeface="Trebuchet MS" pitchFamily="34" charset="-120"/>
               </a:rPr>
-              <a:t>pre-</a:t>
+              <a:t>over-</a:t>
             </a:r>
             <a:endParaRPr lang="en-US" sz="1300" dirty="0"/>
           </a:p>
@@ -38091,7 +37281,7 @@
                 <a:ea typeface="Calibri" pitchFamily="34" charset="-122"/>
                 <a:cs typeface="Calibri" pitchFamily="34" charset="-120"/>
               </a:rPr>
-              <a:t>Word Labs  •  wordlabs.app  •  Root: 'explore' = to search or travel through</a:t>
+              <a:t>Word Labs  •  wordlabs.app  •  Root: 'explore' = to search or discover new things</a:t>
             </a:r>
             <a:endParaRPr lang="en-US" sz="800" dirty="0"/>
           </a:p>
@@ -38255,7 +37445,7 @@
                 <a:ea typeface="Calibri" pitchFamily="34" charset="-122"/>
                 <a:cs typeface="Calibri" pitchFamily="34" charset="-120"/>
               </a:rPr>
-              <a:t>The core part of a word carrying its basic meaning. For example, 'explore' means 'to search or travel through'.</a:t>
+              <a:t>The core part of a word carrying its basic meaning. For example, 'explore' means 'to search or discover new things'.</a:t>
             </a:r>
             <a:endParaRPr lang="en-US" sz="1350" dirty="0"/>
           </a:p>
@@ -38875,7 +38065,7 @@
                 <a:ea typeface="Calibri" pitchFamily="34" charset="-122"/>
                 <a:cs typeface="Calibri" pitchFamily="34" charset="-120"/>
               </a:rPr>
-              <a:t>Word Labs  •  wordlabs.app  •  Root: 'explore' = to search or travel through</a:t>
+              <a:t>Word Labs  •  wordlabs.app  •  Root: 'explore' = to search or discover new things</a:t>
             </a:r>
             <a:endParaRPr lang="en-US" sz="800" dirty="0"/>
           </a:p>
@@ -38987,7 +38177,7 @@
                 <a:ea typeface="Calibri" pitchFamily="34" charset="-122"/>
                 <a:cs typeface="Calibri" pitchFamily="34" charset="-120"/>
               </a:rPr>
-              <a:t>1.  The word 'explorer' contains the root 'explore' and the suffix '-er', meaning a person who explores.</a:t>
+              <a:t>1.  The root 'explore' comes from a Latin word meaning to search or discover.</a:t>
             </a:r>
             <a:endParaRPr lang="en-US" sz="1300" dirty="0"/>
           </a:p>
@@ -39126,7 +38316,7 @@
                 <a:ea typeface="Calibri" pitchFamily="34" charset="-122"/>
                 <a:cs typeface="Calibri" pitchFamily="34" charset="-120"/>
               </a:rPr>
-              <a:t>2.  The root 'explore' comes from a Greek word.</a:t>
+              <a:t>2.  An 'explorer' is a person who travels to discover new places.</a:t>
             </a:r>
             <a:endParaRPr lang="en-US" sz="1300" dirty="0"/>
           </a:p>
@@ -39149,11 +38339,11 @@
             </a:avLst>
           </a:prstGeom>
           <a:solidFill>
-            <a:srgbClr val="FEE2E2"/>
-          </a:solidFill>
-          <a:ln w="12700">
-            <a:solidFill>
-              <a:srgbClr val="DC2626"/>
+            <a:srgbClr val="DCFCE7"/>
+          </a:solidFill>
+          <a:ln w="12700">
+            <a:solidFill>
+              <a:srgbClr val="16A34A"/>
             </a:solidFill>
             <a:prstDash val="solid"/>
           </a:ln>
@@ -39186,13 +38376,13 @@
             <a:r>
               <a:rPr lang="en-US" sz="1100" b="1" dirty="0">
                 <a:solidFill>
-                  <a:srgbClr val="DC2626"/>
+                  <a:srgbClr val="16A34A"/>
                 </a:solidFill>
                 <a:latin typeface="Trebuchet MS" pitchFamily="34" charset="0"/>
                 <a:ea typeface="Trebuchet MS" pitchFamily="34" charset="-122"/>
                 <a:cs typeface="Trebuchet MS" pitchFamily="34" charset="-120"/>
               </a:rPr>
-              <a:t>FALSE</a:t>
+              <a:t>TRUE</a:t>
             </a:r>
             <a:endParaRPr lang="en-US" sz="1100" dirty="0"/>
           </a:p>
@@ -39265,7 +38455,7 @@
                 <a:ea typeface="Calibri" pitchFamily="34" charset="-122"/>
                 <a:cs typeface="Calibri" pitchFamily="34" charset="-120"/>
               </a:rPr>
-              <a:t>3.  The word 'unexplored' uses the prefix 'un-' to mean something has not been explored.</a:t>
+              <a:t>3.  The word 'unexplored' means a place that has already been fully mapped and studied.</a:t>
             </a:r>
             <a:endParaRPr lang="en-US" sz="1300" dirty="0"/>
           </a:p>
@@ -39288,11 +38478,11 @@
             </a:avLst>
           </a:prstGeom>
           <a:solidFill>
-            <a:srgbClr val="DCFCE7"/>
-          </a:solidFill>
-          <a:ln w="12700">
-            <a:solidFill>
-              <a:srgbClr val="16A34A"/>
+            <a:srgbClr val="FEE2E2"/>
+          </a:solidFill>
+          <a:ln w="12700">
+            <a:solidFill>
+              <a:srgbClr val="DC2626"/>
             </a:solidFill>
             <a:prstDash val="solid"/>
           </a:ln>
@@ -39325,13 +38515,13 @@
             <a:r>
               <a:rPr lang="en-US" sz="1100" b="1" dirty="0">
                 <a:solidFill>
-                  <a:srgbClr val="16A34A"/>
+                  <a:srgbClr val="DC2626"/>
                 </a:solidFill>
                 <a:latin typeface="Trebuchet MS" pitchFamily="34" charset="0"/>
                 <a:ea typeface="Trebuchet MS" pitchFamily="34" charset="-122"/>
                 <a:cs typeface="Trebuchet MS" pitchFamily="34" charset="-120"/>
               </a:rPr>
-              <a:t>TRUE</a:t>
+              <a:t>FALSE</a:t>
             </a:r>
             <a:endParaRPr lang="en-US" sz="1100" dirty="0"/>
           </a:p>
@@ -39404,7 +38594,7 @@
                 <a:ea typeface="Calibri" pitchFamily="34" charset="-122"/>
                 <a:cs typeface="Calibri" pitchFamily="34" charset="-120"/>
               </a:rPr>
-              <a:t>4.  The word 'exploration' is built from the root 'explore' plus the suffix '-ation'.</a:t>
+              <a:t>4.  The root 'explore' comes from a Greek word meaning to look at the sky.</a:t>
             </a:r>
             <a:endParaRPr lang="en-US" sz="1300" dirty="0"/>
           </a:p>
@@ -39427,11 +38617,11 @@
             </a:avLst>
           </a:prstGeom>
           <a:solidFill>
-            <a:srgbClr val="DCFCE7"/>
-          </a:solidFill>
-          <a:ln w="12700">
-            <a:solidFill>
-              <a:srgbClr val="16A34A"/>
+            <a:srgbClr val="FEE2E2"/>
+          </a:solidFill>
+          <a:ln w="12700">
+            <a:solidFill>
+              <a:srgbClr val="DC2626"/>
             </a:solidFill>
             <a:prstDash val="solid"/>
           </a:ln>
@@ -39464,13 +38654,13 @@
             <a:r>
               <a:rPr lang="en-US" sz="1100" b="1" dirty="0">
                 <a:solidFill>
-                  <a:srgbClr val="16A34A"/>
+                  <a:srgbClr val="DC2626"/>
                 </a:solidFill>
                 <a:latin typeface="Trebuchet MS" pitchFamily="34" charset="0"/>
                 <a:ea typeface="Trebuchet MS" pitchFamily="34" charset="-122"/>
                 <a:cs typeface="Trebuchet MS" pitchFamily="34" charset="-120"/>
               </a:rPr>
-              <a:t>TRUE</a:t>
+              <a:t>FALSE</a:t>
             </a:r>
             <a:endParaRPr lang="en-US" sz="1100" dirty="0"/>
           </a:p>
@@ -39543,7 +38733,7 @@
                 <a:ea typeface="Calibri" pitchFamily="34" charset="-122"/>
                 <a:cs typeface="Calibri" pitchFamily="34" charset="-120"/>
               </a:rPr>
-              <a:t>5.  The suffix '-atory' in 'exploratory' means 'again'.</a:t>
+              <a:t>5.  Adding the suffix '-ation' to 'explore' gives us the word 'exploration'.</a:t>
             </a:r>
             <a:endParaRPr lang="en-US" sz="1300" dirty="0"/>
           </a:p>
@@ -39566,11 +38756,11 @@
             </a:avLst>
           </a:prstGeom>
           <a:solidFill>
-            <a:srgbClr val="FEE2E2"/>
-          </a:solidFill>
-          <a:ln w="12700">
-            <a:solidFill>
-              <a:srgbClr val="DC2626"/>
+            <a:srgbClr val="DCFCE7"/>
+          </a:solidFill>
+          <a:ln w="12700">
+            <a:solidFill>
+              <a:srgbClr val="16A34A"/>
             </a:solidFill>
             <a:prstDash val="solid"/>
           </a:ln>
@@ -39603,13 +38793,13 @@
             <a:r>
               <a:rPr lang="en-US" sz="1100" b="1" dirty="0">
                 <a:solidFill>
-                  <a:srgbClr val="DC2626"/>
+                  <a:srgbClr val="16A34A"/>
                 </a:solidFill>
                 <a:latin typeface="Trebuchet MS" pitchFamily="34" charset="0"/>
                 <a:ea typeface="Trebuchet MS" pitchFamily="34" charset="-122"/>
                 <a:cs typeface="Trebuchet MS" pitchFamily="34" charset="-120"/>
               </a:rPr>
-              <a:t>FALSE</a:t>
+              <a:t>TRUE</a:t>
             </a:r>
             <a:endParaRPr lang="en-US" sz="1100" dirty="0"/>
           </a:p>
@@ -39901,7 +39091,7 @@
                 <a:ea typeface="Calibri" pitchFamily="34" charset="-122"/>
                 <a:cs typeface="Calibri" pitchFamily="34" charset="-120"/>
               </a:rPr>
-              <a:t>Word Labs  •  wordlabs.app  •  Root: 'explore' = to search or travel through</a:t>
+              <a:t>Word Labs  •  wordlabs.app  •  Root: 'explore' = to search or discover new things</a:t>
             </a:r>
             <a:endParaRPr lang="en-US" sz="800" dirty="0"/>
           </a:p>
@@ -40038,7 +39228,7 @@
                 <a:ea typeface="Trebuchet MS" pitchFamily="34" charset="-122"/>
                 <a:cs typeface="Trebuchet MS" pitchFamily="34" charset="-120"/>
               </a:rPr>
-              <a:t>to search or travel through</a:t>
+              <a:t>to search or discover new things</a:t>
             </a:r>
             <a:endParaRPr lang="en-US" sz="2000" dirty="0"/>
           </a:p>
@@ -40870,7 +40060,7 @@
                 <a:ea typeface="Calibri" pitchFamily="34" charset="-122"/>
                 <a:cs typeface="Calibri" pitchFamily="34" charset="-120"/>
               </a:rPr>
-              <a:t>Word Labs  •  wordlabs.app  •  Root: 'explore' = to search or travel through</a:t>
+              <a:t>Word Labs  •  wordlabs.app  •  Root: 'explore' = to search or discover new things</a:t>
             </a:r>
             <a:endParaRPr lang="en-US" sz="800" dirty="0"/>
           </a:p>
@@ -41669,7 +40859,7 @@
                 <a:ea typeface="Trebuchet MS" pitchFamily="34" charset="-122"/>
                 <a:cs typeface="Trebuchet MS" pitchFamily="34" charset="-120"/>
               </a:rPr>
-              <a:t>over-</a:t>
+              <a:t>pre-</a:t>
             </a:r>
             <a:endParaRPr lang="en-US" sz="1300" dirty="0"/>
           </a:p>
@@ -41822,7 +41012,7 @@
                 <a:ea typeface="Trebuchet MS" pitchFamily="34" charset="-122"/>
                 <a:cs typeface="Trebuchet MS" pitchFamily="34" charset="-120"/>
               </a:rPr>
-              <a:t>pre-</a:t>
+              <a:t>over-</a:t>
             </a:r>
             <a:endParaRPr lang="en-US" sz="1300" dirty="0"/>
           </a:p>
@@ -42644,7 +41834,7 @@
                 <a:ea typeface="Calibri" pitchFamily="34" charset="-122"/>
                 <a:cs typeface="Calibri" pitchFamily="34" charset="-120"/>
               </a:rPr>
-              <a:t>Word Labs  •  wordlabs.app  •  Root: 'explore' = to search or travel through</a:t>
+              <a:t>Word Labs  •  wordlabs.app  •  Root: 'explore' = to search or discover new things</a:t>
             </a:r>
             <a:endParaRPr lang="en-US" sz="800" dirty="0"/>
           </a:p>
@@ -42822,7 +42012,7 @@
                 <a:ea typeface="Calibri" pitchFamily="34" charset="-122"/>
                 <a:cs typeface="Calibri" pitchFamily="34" charset="-120"/>
               </a:rPr>
-              <a:t>A person who travels to unknown or unfamiliar places to discover new things.</a:t>
+              <a:t>A person who travels to unknown places to find out about them.</a:t>
             </a:r>
             <a:endParaRPr lang="en-US" sz="1200" dirty="0"/>
           </a:p>
@@ -42961,7 +42151,7 @@
                 <a:ea typeface="Calibri" pitchFamily="34" charset="-122"/>
                 <a:cs typeface="Calibri" pitchFamily="34" charset="-120"/>
               </a:rPr>
-              <a:t>To travel through or investigate a place or idea to find out more about it.</a:t>
+              <a:t>To travel around and discover new places or things.</a:t>
             </a:r>
             <a:endParaRPr lang="en-US" sz="1200" dirty="0"/>
           </a:p>
@@ -43100,7 +42290,7 @@
                 <a:ea typeface="Calibri" pitchFamily="34" charset="-122"/>
                 <a:cs typeface="Calibri" pitchFamily="34" charset="-120"/>
               </a:rPr>
-              <a:t>A place or idea that has not been investigated or travelled through yet.</a:t>
+              <a:t>A place that has not yet been visited or discovered by anyone.</a:t>
             </a:r>
             <a:endParaRPr lang="en-US" sz="1200" dirty="0"/>
           </a:p>
@@ -43239,7 +42429,7 @@
                 <a:ea typeface="Calibri" pitchFamily="34" charset="-122"/>
                 <a:cs typeface="Calibri" pitchFamily="34" charset="-120"/>
               </a:rPr>
-              <a:t>Currently travelling through or looking into something new to find out more.</a:t>
+              <a:t>Currently travelling around and discovering new things.</a:t>
             </a:r>
             <a:endParaRPr lang="en-US" sz="1200" dirty="0"/>
           </a:p>
@@ -43378,7 +42568,7 @@
                 <a:ea typeface="Calibri" pitchFamily="34" charset="-122"/>
                 <a:cs typeface="Calibri" pitchFamily="34" charset="-120"/>
               </a:rPr>
-              <a:t>Describing something done to find out more information, like an exploratory mission.</a:t>
+              <a:t>Something done to find out more information, like an exploratory investigation.</a:t>
             </a:r>
             <a:endParaRPr lang="en-US" sz="1200" dirty="0"/>
           </a:p>
@@ -43517,7 +42707,7 @@
                 <a:ea typeface="Calibri" pitchFamily="34" charset="-122"/>
                 <a:cs typeface="Calibri" pitchFamily="34" charset="-120"/>
               </a:rPr>
-              <a:t>The act of travelling through or investigating a place or idea to learn about it.</a:t>
+              <a:t>The activity of travelling to unknown places to learn about them.</a:t>
             </a:r>
             <a:endParaRPr lang="en-US" sz="1200" dirty="0"/>
           </a:p>
@@ -43656,7 +42846,7 @@
                 <a:ea typeface="Calibri" pitchFamily="34" charset="-122"/>
                 <a:cs typeface="Calibri" pitchFamily="34" charset="-120"/>
               </a:rPr>
-              <a:t>When someone has already travelled through or investigated something to learn about it.</a:t>
+              <a:t>Went to a new place and looked around to find out about it.</a:t>
             </a:r>
             <a:endParaRPr lang="en-US" sz="1200" dirty="0"/>
           </a:p>
@@ -43948,7 +43138,7 @@
                 <a:ea typeface="Calibri" pitchFamily="34" charset="-122"/>
                 <a:cs typeface="Calibri" pitchFamily="34" charset="-120"/>
               </a:rPr>
-              <a:t>Word Labs  •  wordlabs.app  •  Root: 'explore' = to search or travel through</a:t>
+              <a:t>Word Labs  •  wordlabs.app  •  Root: 'explore' = to search or discover new things</a:t>
             </a:r>
             <a:endParaRPr lang="en-US" sz="800" dirty="0"/>
           </a:p>
@@ -44151,7 +43341,7 @@
                 <a:ea typeface="Calibri" pitchFamily="34" charset="-122"/>
                 <a:cs typeface="Calibri" pitchFamily="34" charset="-120"/>
               </a:rPr>
-              <a:t>The brave explorer climbed the mountain to discover what was on the other side.</a:t>
+              <a:t>The brave explorer sailed across the ocean to discover new lands.</a:t>
             </a:r>
             <a:endParaRPr lang="en-US" sz="1500" dirty="0"/>
           </a:p>
@@ -44315,7 +43505,7 @@
                 <a:ea typeface="Calibri" pitchFamily="34" charset="-122"/>
                 <a:cs typeface="Calibri" pitchFamily="34" charset="-120"/>
               </a:rPr>
-              <a:t>Our class will go on an exploration of the rock pools at the beach to find out which animals live there.</a:t>
+              <a:t>Our class went on an exploration of the school garden to find different insects.</a:t>
             </a:r>
             <a:endParaRPr lang="en-US" sz="1500" dirty="0"/>
           </a:p>
@@ -44479,7 +43669,7 @@
                 <a:ea typeface="Calibri" pitchFamily="34" charset="-122"/>
                 <a:cs typeface="Calibri" pitchFamily="34" charset="-120"/>
               </a:rPr>
-              <a:t>Scientists sent a robot to explore the surface of Mars and send back photographs.</a:t>
+              <a:t>Scientists are still exploring the deepest parts of the ocean.</a:t>
             </a:r>
             <a:endParaRPr lang="en-US" sz="1500" dirty="0"/>
           </a:p>
